--- a/docs/Olist_Executive_Summary.pptx
+++ b/docs/Olist_Executive_Summary.pptx
@@ -278,7 +278,7 @@
       </p15:sldGuideLst>
     </p:ext>
     <p:ext uri="GoogleSlidesCustomDataVersion2">
-      <go:slidesCustomData xmlns:go="http://customooxmlschemas.google.com/" r:id="rId29" roundtripDataSignature="AMtx7mgEvtLweebKcuu0pRcFkKun1shYBA=="/>
+      <go:slidesCustomData xmlns:go="http://customooxmlschemas.google.com/" r:id="rId29" roundtripDataSignature="AMtx7mgqGwnwd0c8NNkxQpfGD7TrkMnb9Q=="/>
     </p:ext>
   </p:extLst>
 </p:presentation>
@@ -974,7 +974,7 @@
   <p:cSld>
     <p:spTree>
       <p:nvGrpSpPr>
-        <p:cNvPr id="268" name="Shape 268"/>
+        <p:cNvPr id="262" name="Shape 262"/>
         <p:cNvGrpSpPr/>
         <p:nvPr/>
       </p:nvGrpSpPr>
@@ -988,7 +988,7 @@
       </p:grpSpPr>
       <p:sp>
         <p:nvSpPr>
-          <p:cNvPr id="269" name="Google Shape;269;p34:notes"/>
+          <p:cNvPr id="263" name="Google Shape;263;p34:notes"/>
           <p:cNvSpPr/>
           <p:nvPr>
             <p:ph idx="2" type="sldImg"/>
@@ -996,8 +996,8 @@
         </p:nvSpPr>
         <p:spPr>
           <a:xfrm>
-            <a:off x="1143225" y="685800"/>
-            <a:ext cx="4572225" cy="3429000"/>
+            <a:off x="381000" y="685800"/>
+            <a:ext cx="6096000" cy="3429000"/>
           </a:xfrm>
           <a:custGeom>
             <a:rect b="b" l="l" r="r" t="t"/>
@@ -1033,7 +1033,7 @@
       </p:sp>
       <p:sp>
         <p:nvSpPr>
-          <p:cNvPr id="270" name="Google Shape;270;p34:notes"/>
+          <p:cNvPr id="264" name="Google Shape;264;p34:notes"/>
           <p:cNvSpPr txBox="1"/>
           <p:nvPr>
             <p:ph idx="1" type="body"/>
@@ -1092,7 +1092,7 @@
   <p:cSld>
     <p:spTree>
       <p:nvGrpSpPr>
-        <p:cNvPr id="288" name="Shape 288"/>
+        <p:cNvPr id="279" name="Shape 279"/>
         <p:cNvGrpSpPr/>
         <p:nvPr/>
       </p:nvGrpSpPr>
@@ -1106,7 +1106,7 @@
       </p:grpSpPr>
       <p:sp>
         <p:nvSpPr>
-          <p:cNvPr id="289" name="Google Shape;289;p14:notes"/>
+          <p:cNvPr id="280" name="Google Shape;280;p6:notes"/>
           <p:cNvSpPr txBox="1"/>
           <p:nvPr>
             <p:ph idx="1" type="body"/>
@@ -1153,7 +1153,7 @@
       </p:sp>
       <p:sp>
         <p:nvSpPr>
-          <p:cNvPr id="290" name="Google Shape;290;p14:notes"/>
+          <p:cNvPr id="281" name="Google Shape;281;p6:notes"/>
           <p:cNvSpPr/>
           <p:nvPr>
             <p:ph idx="2" type="sldImg"/>
@@ -1161,8 +1161,8 @@
         </p:nvSpPr>
         <p:spPr>
           <a:xfrm>
-            <a:off x="1143225" y="685800"/>
-            <a:ext cx="4572225" cy="3429000"/>
+            <a:off x="381000" y="685800"/>
+            <a:ext cx="6096000" cy="3429000"/>
           </a:xfrm>
           <a:custGeom>
             <a:rect b="b" l="l" r="r" t="t"/>
@@ -1209,7 +1209,7 @@
   <p:cSld>
     <p:spTree>
       <p:nvGrpSpPr>
-        <p:cNvPr id="311" name="Shape 311"/>
+        <p:cNvPr id="293" name="Shape 293"/>
         <p:cNvGrpSpPr/>
         <p:nvPr/>
       </p:nvGrpSpPr>
@@ -1223,7 +1223,7 @@
       </p:grpSpPr>
       <p:sp>
         <p:nvSpPr>
-          <p:cNvPr id="312" name="Google Shape;312;p6:notes"/>
+          <p:cNvPr id="294" name="Google Shape;294;p8:notes"/>
           <p:cNvSpPr txBox="1"/>
           <p:nvPr>
             <p:ph idx="1" type="body"/>
@@ -1270,7 +1270,7 @@
       </p:sp>
       <p:sp>
         <p:nvSpPr>
-          <p:cNvPr id="313" name="Google Shape;313;p6:notes"/>
+          <p:cNvPr id="295" name="Google Shape;295;p8:notes"/>
           <p:cNvSpPr/>
           <p:nvPr>
             <p:ph idx="2" type="sldImg"/>
@@ -1326,7 +1326,7 @@
   <p:cSld>
     <p:spTree>
       <p:nvGrpSpPr>
-        <p:cNvPr id="325" name="Shape 325"/>
+        <p:cNvPr id="307" name="Shape 307"/>
         <p:cNvGrpSpPr/>
         <p:nvPr/>
       </p:nvGrpSpPr>
@@ -1340,7 +1340,106 @@
       </p:grpSpPr>
       <p:sp>
         <p:nvSpPr>
-          <p:cNvPr id="326" name="Google Shape;326;p8:notes"/>
+          <p:cNvPr id="308" name="Google Shape;308;p3:notes"/>
+          <p:cNvSpPr txBox="1"/>
+          <p:nvPr>
+            <p:ph idx="1" type="body"/>
+          </p:nvPr>
+        </p:nvSpPr>
+        <p:spPr>
+          <a:xfrm>
+            <a:off x="685800" y="4343400"/>
+            <a:ext cx="5486400" cy="4114800"/>
+          </a:xfrm>
+          <a:prstGeom prst="rect">
+            <a:avLst/>
+          </a:prstGeom>
+        </p:spPr>
+        <p:txBody>
+          <a:bodyPr anchorCtr="0" anchor="t" bIns="91425" lIns="91425" spcFirstLastPara="1" rIns="91425" wrap="square" tIns="91425">
+            <a:noAutofit/>
+          </a:bodyPr>
+          <a:lstStyle/>
+          <a:p>
+            <a:pPr indent="0" lvl="0" marL="0" rtl="0" algn="l">
+              <a:spcBef>
+                <a:spcPts val="0"/>
+              </a:spcBef>
+              <a:spcAft>
+                <a:spcPts val="0"/>
+              </a:spcAft>
+              <a:buNone/>
+            </a:pPr>
+            <a:r>
+              <a:t/>
+            </a:r>
+            <a:endParaRPr/>
+          </a:p>
+        </p:txBody>
+      </p:sp>
+      <p:sp>
+        <p:nvSpPr>
+          <p:cNvPr id="309" name="Google Shape;309;p3:notes"/>
+          <p:cNvSpPr/>
+          <p:nvPr>
+            <p:ph idx="2" type="sldImg"/>
+          </p:nvPr>
+        </p:nvSpPr>
+        <p:spPr>
+          <a:xfrm>
+            <a:off x="1143225" y="685800"/>
+            <a:ext cx="4572225" cy="3429000"/>
+          </a:xfrm>
+          <a:custGeom>
+            <a:rect b="b" l="l" r="r" t="t"/>
+            <a:pathLst>
+              <a:path extrusionOk="0" h="120000" w="120000">
+                <a:moveTo>
+                  <a:pt x="0" y="0"/>
+                </a:moveTo>
+                <a:lnTo>
+                  <a:pt x="120000" y="0"/>
+                </a:lnTo>
+                <a:lnTo>
+                  <a:pt x="120000" y="120000"/>
+                </a:lnTo>
+                <a:lnTo>
+                  <a:pt x="0" y="120000"/>
+                </a:lnTo>
+                <a:close/>
+              </a:path>
+            </a:pathLst>
+          </a:custGeom>
+        </p:spPr>
+      </p:sp>
+    </p:spTree>
+  </p:cSld>
+  <p:clrMapOvr>
+    <a:masterClrMapping/>
+  </p:clrMapOvr>
+</p:notes>
+</file>
+
+<file path=ppt/notesSlides/notesSlide14.xml><?xml version="1.0" encoding="utf-8"?>
+<p:notes xmlns:a="http://schemas.openxmlformats.org/drawingml/2006/main" xmlns:r="http://schemas.openxmlformats.org/officeDocument/2006/relationships" xmlns:mc="http://schemas.openxmlformats.org/markup-compatibility/2006" xmlns:mv="urn:schemas-microsoft-com:mac:vml" xmlns:p="http://schemas.openxmlformats.org/presentationml/2006/main" xmlns:c="http://schemas.openxmlformats.org/drawingml/2006/chart" xmlns:dgm="http://schemas.openxmlformats.org/drawingml/2006/diagram" xmlns:o="urn:schemas-microsoft-com:office:office" xmlns:v="urn:schemas-microsoft-com:vml" xmlns:pvml="urn:schemas-microsoft-com:office:powerpoint" xmlns:com="http://schemas.openxmlformats.org/drawingml/2006/compatibility" xmlns:p14="http://schemas.microsoft.com/office/powerpoint/2010/main" xmlns:p15="http://schemas.microsoft.com/office/powerpoint/2012/main" xmlns:ahyp="http://schemas.microsoft.com/office/drawing/2018/hyperlinkcolor" showMasterPhAnim="0" showMasterSp="0">
+  <p:cSld>
+    <p:spTree>
+      <p:nvGrpSpPr>
+        <p:cNvPr id="329" name="Shape 329"/>
+        <p:cNvGrpSpPr/>
+        <p:nvPr/>
+      </p:nvGrpSpPr>
+      <p:grpSpPr>
+        <a:xfrm>
+          <a:off x="0" y="0"/>
+          <a:ext cx="0" cy="0"/>
+          <a:chOff x="0" y="0"/>
+          <a:chExt cx="0" cy="0"/>
+        </a:xfrm>
+      </p:grpSpPr>
+      <p:sp>
+        <p:nvSpPr>
+          <p:cNvPr id="330" name="Google Shape;330;g3faa39e91dc_0_0:notes"/>
           <p:cNvSpPr txBox="1"/>
           <p:nvPr>
             <p:ph idx="1" type="body"/>
@@ -1387,124 +1486,7 @@
       </p:sp>
       <p:sp>
         <p:nvSpPr>
-          <p:cNvPr id="327" name="Google Shape;327;p8:notes"/>
-          <p:cNvSpPr/>
-          <p:nvPr>
-            <p:ph idx="2" type="sldImg"/>
-          </p:nvPr>
-        </p:nvSpPr>
-        <p:spPr>
-          <a:xfrm>
-            <a:off x="381000" y="685800"/>
-            <a:ext cx="6096000" cy="3429000"/>
-          </a:xfrm>
-          <a:custGeom>
-            <a:rect b="b" l="l" r="r" t="t"/>
-            <a:pathLst>
-              <a:path extrusionOk="0" h="120000" w="120000">
-                <a:moveTo>
-                  <a:pt x="0" y="0"/>
-                </a:moveTo>
-                <a:lnTo>
-                  <a:pt x="120000" y="0"/>
-                </a:lnTo>
-                <a:lnTo>
-                  <a:pt x="120000" y="120000"/>
-                </a:lnTo>
-                <a:lnTo>
-                  <a:pt x="0" y="120000"/>
-                </a:lnTo>
-                <a:close/>
-              </a:path>
-            </a:pathLst>
-          </a:custGeom>
-          <a:noFill/>
-          <a:ln cap="flat" cmpd="sng" w="9525">
-            <a:solidFill>
-              <a:srgbClr val="000000"/>
-            </a:solidFill>
-            <a:prstDash val="solid"/>
-            <a:round/>
-            <a:headEnd len="sm" w="sm" type="none"/>
-            <a:tailEnd len="sm" w="sm" type="none"/>
-          </a:ln>
-        </p:spPr>
-      </p:sp>
-    </p:spTree>
-  </p:cSld>
-  <p:clrMapOvr>
-    <a:masterClrMapping/>
-  </p:clrMapOvr>
-</p:notes>
-</file>
-
-<file path=ppt/notesSlides/notesSlide14.xml><?xml version="1.0" encoding="utf-8"?>
-<p:notes xmlns:a="http://schemas.openxmlformats.org/drawingml/2006/main" xmlns:r="http://schemas.openxmlformats.org/officeDocument/2006/relationships" xmlns:mc="http://schemas.openxmlformats.org/markup-compatibility/2006" xmlns:mv="urn:schemas-microsoft-com:mac:vml" xmlns:p="http://schemas.openxmlformats.org/presentationml/2006/main" xmlns:c="http://schemas.openxmlformats.org/drawingml/2006/chart" xmlns:dgm="http://schemas.openxmlformats.org/drawingml/2006/diagram" xmlns:o="urn:schemas-microsoft-com:office:office" xmlns:v="urn:schemas-microsoft-com:vml" xmlns:pvml="urn:schemas-microsoft-com:office:powerpoint" xmlns:com="http://schemas.openxmlformats.org/drawingml/2006/compatibility" xmlns:p14="http://schemas.microsoft.com/office/powerpoint/2010/main" xmlns:p15="http://schemas.microsoft.com/office/powerpoint/2012/main" xmlns:ahyp="http://schemas.microsoft.com/office/drawing/2018/hyperlinkcolor" showMasterPhAnim="0" showMasterSp="0">
-  <p:cSld>
-    <p:spTree>
-      <p:nvGrpSpPr>
-        <p:cNvPr id="339" name="Shape 339"/>
-        <p:cNvGrpSpPr/>
-        <p:nvPr/>
-      </p:nvGrpSpPr>
-      <p:grpSpPr>
-        <a:xfrm>
-          <a:off x="0" y="0"/>
-          <a:ext cx="0" cy="0"/>
-          <a:chOff x="0" y="0"/>
-          <a:chExt cx="0" cy="0"/>
-        </a:xfrm>
-      </p:grpSpPr>
-      <p:sp>
-        <p:nvSpPr>
-          <p:cNvPr id="340" name="Google Shape;340;g3faa39e91dc_0_0:notes"/>
-          <p:cNvSpPr txBox="1"/>
-          <p:nvPr>
-            <p:ph idx="1" type="body"/>
-          </p:nvPr>
-        </p:nvSpPr>
-        <p:spPr>
-          <a:xfrm>
-            <a:off x="685800" y="4343400"/>
-            <a:ext cx="5486400" cy="4114800"/>
-          </a:xfrm>
-          <a:prstGeom prst="rect">
-            <a:avLst/>
-          </a:prstGeom>
-          <a:noFill/>
-          <a:ln>
-            <a:noFill/>
-          </a:ln>
-        </p:spPr>
-        <p:txBody>
-          <a:bodyPr anchorCtr="0" anchor="t" bIns="91425" lIns="91425" spcFirstLastPara="1" rIns="91425" wrap="square" tIns="91425">
-            <a:noAutofit/>
-          </a:bodyPr>
-          <a:lstStyle/>
-          <a:p>
-            <a:pPr indent="0" lvl="0" marL="0" rtl="0" algn="l">
-              <a:lnSpc>
-                <a:spcPct val="100000"/>
-              </a:lnSpc>
-              <a:spcBef>
-                <a:spcPts val="0"/>
-              </a:spcBef>
-              <a:spcAft>
-                <a:spcPts val="0"/>
-              </a:spcAft>
-              <a:buSzPts val="1100"/>
-              <a:buNone/>
-            </a:pPr>
-            <a:r>
-              <a:t/>
-            </a:r>
-            <a:endParaRPr/>
-          </a:p>
-        </p:txBody>
-      </p:sp>
-      <p:sp>
-        <p:nvSpPr>
-          <p:cNvPr id="341" name="Google Shape;341;g3faa39e91dc_0_0:notes"/>
+          <p:cNvPr id="331" name="Google Shape;331;g3faa39e91dc_0_0:notes"/>
           <p:cNvSpPr/>
           <p:nvPr>
             <p:ph idx="2" type="sldImg"/>
@@ -1560,7 +1542,7 @@
   <p:cSld>
     <p:spTree>
       <p:nvGrpSpPr>
-        <p:cNvPr id="346" name="Shape 346"/>
+        <p:cNvPr id="336" name="Shape 336"/>
         <p:cNvGrpSpPr/>
         <p:nvPr/>
       </p:nvGrpSpPr>
@@ -1574,7 +1556,7 @@
       </p:grpSpPr>
       <p:sp>
         <p:nvSpPr>
-          <p:cNvPr id="347" name="Google Shape;347;g409df0ac948_0_12:notes"/>
+          <p:cNvPr id="337" name="Google Shape;337;g409df0ac948_0_12:notes"/>
           <p:cNvSpPr txBox="1"/>
           <p:nvPr>
             <p:ph idx="1" type="body"/>
@@ -1621,7 +1603,7 @@
       </p:sp>
       <p:sp>
         <p:nvSpPr>
-          <p:cNvPr id="348" name="Google Shape;348;g409df0ac948_0_12:notes"/>
+          <p:cNvPr id="338" name="Google Shape;338;g409df0ac948_0_12:notes"/>
           <p:cNvSpPr/>
           <p:nvPr>
             <p:ph idx="2" type="sldImg"/>
@@ -1677,7 +1659,7 @@
   <p:cSld>
     <p:spTree>
       <p:nvGrpSpPr>
-        <p:cNvPr id="353" name="Shape 353"/>
+        <p:cNvPr id="343" name="Shape 343"/>
         <p:cNvGrpSpPr/>
         <p:nvPr/>
       </p:nvGrpSpPr>
@@ -1691,7 +1673,7 @@
       </p:grpSpPr>
       <p:sp>
         <p:nvSpPr>
-          <p:cNvPr id="354" name="Google Shape;354;g3fb723d6469_0_0:notes"/>
+          <p:cNvPr id="344" name="Google Shape;344;g3fb723d6469_0_0:notes"/>
           <p:cNvSpPr txBox="1"/>
           <p:nvPr>
             <p:ph idx="1" type="body"/>
@@ -1738,7 +1720,7 @@
       </p:sp>
       <p:sp>
         <p:nvSpPr>
-          <p:cNvPr id="355" name="Google Shape;355;g3fb723d6469_0_0:notes"/>
+          <p:cNvPr id="345" name="Google Shape;345;g3fb723d6469_0_0:notes"/>
           <p:cNvSpPr/>
           <p:nvPr>
             <p:ph idx="2" type="sldImg"/>
@@ -1794,7 +1776,7 @@
   <p:cSld>
     <p:spTree>
       <p:nvGrpSpPr>
-        <p:cNvPr id="360" name="Shape 360"/>
+        <p:cNvPr id="350" name="Shape 350"/>
         <p:cNvGrpSpPr/>
         <p:nvPr/>
       </p:nvGrpSpPr>
@@ -1808,7 +1790,7 @@
       </p:grpSpPr>
       <p:sp>
         <p:nvSpPr>
-          <p:cNvPr id="361" name="Google Shape;361;g409df0ac948_0_19:notes"/>
+          <p:cNvPr id="351" name="Google Shape;351;g409df0ac948_0_19:notes"/>
           <p:cNvSpPr txBox="1"/>
           <p:nvPr>
             <p:ph idx="1" type="body"/>
@@ -1855,7 +1837,7 @@
       </p:sp>
       <p:sp>
         <p:nvSpPr>
-          <p:cNvPr id="362" name="Google Shape;362;g409df0ac948_0_19:notes"/>
+          <p:cNvPr id="352" name="Google Shape;352;g409df0ac948_0_19:notes"/>
           <p:cNvSpPr/>
           <p:nvPr>
             <p:ph idx="2" type="sldImg"/>
@@ -1911,7 +1893,7 @@
   <p:cSld>
     <p:spTree>
       <p:nvGrpSpPr>
-        <p:cNvPr id="367" name="Shape 367"/>
+        <p:cNvPr id="357" name="Shape 357"/>
         <p:cNvGrpSpPr/>
         <p:nvPr/>
       </p:nvGrpSpPr>
@@ -1925,7 +1907,7 @@
       </p:grpSpPr>
       <p:sp>
         <p:nvSpPr>
-          <p:cNvPr id="368" name="Google Shape;368;g409df0ac948_0_26:notes"/>
+          <p:cNvPr id="358" name="Google Shape;358;g409df0ac948_0_26:notes"/>
           <p:cNvSpPr txBox="1"/>
           <p:nvPr>
             <p:ph idx="1" type="body"/>
@@ -1972,7 +1954,7 @@
       </p:sp>
       <p:sp>
         <p:nvSpPr>
-          <p:cNvPr id="369" name="Google Shape;369;g409df0ac948_0_26:notes"/>
+          <p:cNvPr id="359" name="Google Shape;359;g409df0ac948_0_26:notes"/>
           <p:cNvSpPr/>
           <p:nvPr>
             <p:ph idx="2" type="sldImg"/>
@@ -2028,7 +2010,7 @@
   <p:cSld>
     <p:spTree>
       <p:nvGrpSpPr>
-        <p:cNvPr id="374" name="Shape 374"/>
+        <p:cNvPr id="364" name="Shape 364"/>
         <p:cNvGrpSpPr/>
         <p:nvPr/>
       </p:nvGrpSpPr>
@@ -2042,7 +2024,7 @@
       </p:grpSpPr>
       <p:sp>
         <p:nvSpPr>
-          <p:cNvPr id="375" name="Google Shape;375;g3fb723d6469_0_7:notes"/>
+          <p:cNvPr id="365" name="Google Shape;365;g3fb723d6469_0_7:notes"/>
           <p:cNvSpPr txBox="1"/>
           <p:nvPr>
             <p:ph idx="1" type="body"/>
@@ -2089,7 +2071,7 @@
       </p:sp>
       <p:sp>
         <p:nvSpPr>
-          <p:cNvPr id="376" name="Google Shape;376;g3fb723d6469_0_7:notes"/>
+          <p:cNvPr id="366" name="Google Shape;366;g3fb723d6469_0_7:notes"/>
           <p:cNvSpPr/>
           <p:nvPr>
             <p:ph idx="2" type="sldImg"/>
@@ -2229,24 +2211,35 @@
           </a:bodyPr>
           <a:lstStyle/>
           <a:p>
-            <a:pPr indent="-298450" lvl="0" marL="457200" rtl="0" algn="l">
-              <a:lnSpc>
-                <a:spcPct val="100000"/>
-              </a:lnSpc>
-              <a:spcBef>
-                <a:spcPts val="0"/>
-              </a:spcBef>
-              <a:spcAft>
-                <a:spcPts val="0"/>
-              </a:spcAft>
-              <a:buSzPts val="1100"/>
-              <a:buChar char="●"/>
+            <a:pPr indent="0" lvl="0" marL="0" marR="0" rtl="0" algn="l">
+              <a:lnSpc>
+                <a:spcPct val="110000"/>
+              </a:lnSpc>
+              <a:spcBef>
+                <a:spcPts val="0"/>
+              </a:spcBef>
+              <a:spcAft>
+                <a:spcPts val="0"/>
+              </a:spcAft>
+              <a:buClr>
+                <a:srgbClr val="000000"/>
+              </a:buClr>
+              <a:buSzPts val="1600"/>
+              <a:buFont typeface="Arial"/>
+              <a:buNone/>
             </a:pPr>
             <a:r>
-              <a:rPr lang="en-US"/>
-              <a:t>Marketing numbers = </a:t>
+              <a:t/>
             </a:r>
-            <a:endParaRPr/>
+            <a:endParaRPr b="0" i="0" sz="1050" u="none" cap="none" strike="noStrike">
+              <a:solidFill>
+                <a:srgbClr val="000000"/>
+              </a:solidFill>
+              <a:latin typeface="Arial"/>
+              <a:ea typeface="Arial"/>
+              <a:cs typeface="Arial"/>
+              <a:sym typeface="Arial"/>
+            </a:endParaRPr>
           </a:p>
         </p:txBody>
       </p:sp>
@@ -2263,7 +2256,7 @@
   <p:cSld>
     <p:spTree>
       <p:nvGrpSpPr>
-        <p:cNvPr id="381" name="Shape 381"/>
+        <p:cNvPr id="371" name="Shape 371"/>
         <p:cNvGrpSpPr/>
         <p:nvPr/>
       </p:nvGrpSpPr>
@@ -2277,7 +2270,7 @@
       </p:grpSpPr>
       <p:sp>
         <p:nvSpPr>
-          <p:cNvPr id="382" name="Google Shape;382;g409df0ac948_0_33:notes"/>
+          <p:cNvPr id="372" name="Google Shape;372;g409df0ac948_0_33:notes"/>
           <p:cNvSpPr txBox="1"/>
           <p:nvPr>
             <p:ph idx="1" type="body"/>
@@ -2324,7 +2317,7 @@
       </p:sp>
       <p:sp>
         <p:nvSpPr>
-          <p:cNvPr id="383" name="Google Shape;383;g409df0ac948_0_33:notes"/>
+          <p:cNvPr id="373" name="Google Shape;373;g409df0ac948_0_33:notes"/>
           <p:cNvSpPr/>
           <p:nvPr>
             <p:ph idx="2" type="sldImg"/>
@@ -2380,7 +2373,7 @@
   <p:cSld>
     <p:spTree>
       <p:nvGrpSpPr>
-        <p:cNvPr id="388" name="Shape 388"/>
+        <p:cNvPr id="378" name="Shape 378"/>
         <p:cNvGrpSpPr/>
         <p:nvPr/>
       </p:nvGrpSpPr>
@@ -2394,7 +2387,7 @@
       </p:grpSpPr>
       <p:sp>
         <p:nvSpPr>
-          <p:cNvPr id="389" name="Google Shape;389;g409df0ac948_0_0:notes"/>
+          <p:cNvPr id="379" name="Google Shape;379;g409df0ac948_0_0:notes"/>
           <p:cNvSpPr txBox="1"/>
           <p:nvPr>
             <p:ph idx="1" type="body"/>
@@ -2441,7 +2434,7 @@
       </p:sp>
       <p:sp>
         <p:nvSpPr>
-          <p:cNvPr id="390" name="Google Shape;390;g409df0ac948_0_0:notes"/>
+          <p:cNvPr id="380" name="Google Shape;380;g409df0ac948_0_0:notes"/>
           <p:cNvSpPr/>
           <p:nvPr>
             <p:ph idx="2" type="sldImg"/>
@@ -2497,7 +2490,7 @@
   <p:cSld>
     <p:spTree>
       <p:nvGrpSpPr>
-        <p:cNvPr id="399" name="Shape 399"/>
+        <p:cNvPr id="389" name="Shape 389"/>
         <p:cNvGrpSpPr/>
         <p:nvPr/>
       </p:nvGrpSpPr>
@@ -2511,7 +2504,7 @@
       </p:grpSpPr>
       <p:sp>
         <p:nvSpPr>
-          <p:cNvPr id="400" name="Google Shape;400;p10:notes"/>
+          <p:cNvPr id="390" name="Google Shape;390;p10:notes"/>
           <p:cNvSpPr txBox="1"/>
           <p:nvPr>
             <p:ph idx="1" type="body"/>
@@ -2558,7 +2551,7 @@
       </p:sp>
       <p:sp>
         <p:nvSpPr>
-          <p:cNvPr id="401" name="Google Shape;401;p10:notes"/>
+          <p:cNvPr id="391" name="Google Shape;391;p10:notes"/>
           <p:cNvSpPr/>
           <p:nvPr>
             <p:ph idx="2" type="sldImg"/>
@@ -2753,8 +2746,8 @@
         </p:nvSpPr>
         <p:spPr>
           <a:xfrm>
-            <a:off x="1143225" y="685800"/>
-            <a:ext cx="4572225" cy="3429000"/>
+            <a:off x="381000" y="685800"/>
+            <a:ext cx="6096000" cy="3429000"/>
           </a:xfrm>
           <a:custGeom>
             <a:rect b="b" l="l" r="r" t="t"/>
@@ -2871,8 +2864,8 @@
         </p:nvSpPr>
         <p:spPr>
           <a:xfrm>
-            <a:off x="1143225" y="685800"/>
-            <a:ext cx="4572225" cy="3429000"/>
+            <a:off x="381000" y="685800"/>
+            <a:ext cx="6096000" cy="3429000"/>
           </a:xfrm>
           <a:custGeom>
             <a:rect b="b" l="l" r="r" t="t"/>
@@ -3107,8 +3100,8 @@
         </p:nvSpPr>
         <p:spPr>
           <a:xfrm>
-            <a:off x="1143225" y="685800"/>
-            <a:ext cx="4572225" cy="3429000"/>
+            <a:off x="381000" y="685800"/>
+            <a:ext cx="6096000" cy="3429000"/>
           </a:xfrm>
           <a:custGeom>
             <a:rect b="b" l="l" r="r" t="t"/>
@@ -3203,7 +3196,7 @@
   <p:cSld>
     <p:spTree>
       <p:nvGrpSpPr>
-        <p:cNvPr id="208" name="Shape 208"/>
+        <p:cNvPr id="207" name="Shape 207"/>
         <p:cNvGrpSpPr/>
         <p:nvPr/>
       </p:nvGrpSpPr>
@@ -3217,7 +3210,7 @@
       </p:grpSpPr>
       <p:sp>
         <p:nvSpPr>
-          <p:cNvPr id="209" name="Google Shape;209;p32:notes"/>
+          <p:cNvPr id="208" name="Google Shape;208;p32:notes"/>
           <p:cNvSpPr/>
           <p:nvPr>
             <p:ph idx="2" type="sldImg"/>
@@ -3225,8 +3218,8 @@
         </p:nvSpPr>
         <p:spPr>
           <a:xfrm>
-            <a:off x="1143225" y="685800"/>
-            <a:ext cx="4572225" cy="3429000"/>
+            <a:off x="381000" y="685800"/>
+            <a:ext cx="6096000" cy="3429000"/>
           </a:xfrm>
           <a:custGeom>
             <a:rect b="b" l="l" r="r" t="t"/>
@@ -3262,7 +3255,7 @@
       </p:sp>
       <p:sp>
         <p:nvSpPr>
-          <p:cNvPr id="210" name="Google Shape;210;p32:notes"/>
+          <p:cNvPr id="209" name="Google Shape;209;p32:notes"/>
           <p:cNvSpPr txBox="1"/>
           <p:nvPr>
             <p:ph idx="1" type="body"/>
@@ -3321,7 +3314,7 @@
   <p:cSld>
     <p:spTree>
       <p:nvGrpSpPr>
-        <p:cNvPr id="234" name="Shape 234"/>
+        <p:cNvPr id="233" name="Shape 233"/>
         <p:cNvGrpSpPr/>
         <p:nvPr/>
       </p:nvGrpSpPr>
@@ -3335,7 +3328,7 @@
       </p:grpSpPr>
       <p:sp>
         <p:nvSpPr>
-          <p:cNvPr id="235" name="Google Shape;235;p33:notes"/>
+          <p:cNvPr id="234" name="Google Shape;234;p33:notes"/>
           <p:cNvSpPr/>
           <p:nvPr>
             <p:ph idx="2" type="sldImg"/>
@@ -3343,8 +3336,8 @@
         </p:nvSpPr>
         <p:spPr>
           <a:xfrm>
-            <a:off x="1143225" y="685800"/>
-            <a:ext cx="4572225" cy="3429000"/>
+            <a:off x="381000" y="685800"/>
+            <a:ext cx="6096000" cy="3429000"/>
           </a:xfrm>
           <a:custGeom>
             <a:rect b="b" l="l" r="r" t="t"/>
@@ -3380,7 +3373,7 @@
       </p:sp>
       <p:sp>
         <p:nvSpPr>
-          <p:cNvPr id="236" name="Google Shape;236;p33:notes"/>
+          <p:cNvPr id="235" name="Google Shape;235;p33:notes"/>
           <p:cNvSpPr txBox="1"/>
           <p:nvPr>
             <p:ph idx="1" type="body"/>
@@ -16752,7 +16745,7 @@
         <p:spPr>
           <a:xfrm>
             <a:off x="804672" y="3154680"/>
-            <a:ext cx="10607040" cy="1097280"/>
+            <a:ext cx="10607100" cy="615600"/>
           </a:xfrm>
           <a:prstGeom prst="rect">
             <a:avLst/>
@@ -16795,7 +16788,7 @@
                 <a:cs typeface="Calibri"/>
                 <a:sym typeface="Calibri"/>
               </a:rPr>
-              <a:t>Delivery, Retention &amp; Growth Opportunities</a:t>
+              <a:t>Delivery &amp; Growth Opportunities</a:t>
             </a:r>
             <a:endParaRPr b="0" i="0" sz="1400" u="none" cap="none" strike="noStrike">
               <a:solidFill>
@@ -16984,7 +16977,7 @@
     </p:bg>
     <p:spTree>
       <p:nvGrpSpPr>
-        <p:cNvPr id="271" name="Shape 271"/>
+        <p:cNvPr id="265" name="Shape 265"/>
         <p:cNvGrpSpPr/>
         <p:nvPr/>
       </p:nvGrpSpPr>
@@ -16998,14 +16991,14 @@
       </p:grpSpPr>
       <p:sp>
         <p:nvSpPr>
-          <p:cNvPr id="272" name="Google Shape;272;p34"/>
+          <p:cNvPr id="266" name="Google Shape;266;p34"/>
           <p:cNvSpPr txBox="1"/>
           <p:nvPr/>
         </p:nvSpPr>
         <p:spPr>
           <a:xfrm>
             <a:off x="502920" y="292608"/>
-            <a:ext cx="8229600" cy="292608"/>
+            <a:ext cx="8229600" cy="200100"/>
           </a:xfrm>
           <a:prstGeom prst="rect">
             <a:avLst/>
@@ -17048,7 +17041,7 @@
                 <a:cs typeface="Calibri"/>
                 <a:sym typeface="Calibri"/>
               </a:rPr>
-              <a:t>TECHNICAL FOUNDATION  ·  7 OF 8</a:t>
+              <a:t>TECHNICAL FOUNDATION  ·  7 OF 7</a:t>
             </a:r>
             <a:endParaRPr b="0" i="0" sz="1400" u="none" cap="none" strike="noStrike">
               <a:solidFill>
@@ -17064,7 +17057,7 @@
       </p:sp>
       <p:sp>
         <p:nvSpPr>
-          <p:cNvPr id="273" name="Google Shape;273;p34"/>
+          <p:cNvPr id="267" name="Google Shape;267;p34"/>
           <p:cNvSpPr txBox="1"/>
           <p:nvPr/>
         </p:nvSpPr>
@@ -17130,7 +17123,7 @@
       </p:sp>
       <p:sp>
         <p:nvSpPr>
-          <p:cNvPr id="274" name="Google Shape;274;p34"/>
+          <p:cNvPr id="268" name="Google Shape;268;p34"/>
           <p:cNvSpPr/>
           <p:nvPr/>
         </p:nvSpPr>
@@ -17189,7 +17182,7 @@
       </p:sp>
       <p:sp>
         <p:nvSpPr>
-          <p:cNvPr id="275" name="Google Shape;275;p34"/>
+          <p:cNvPr id="269" name="Google Shape;269;p34"/>
           <p:cNvSpPr txBox="1"/>
           <p:nvPr/>
         </p:nvSpPr>
@@ -17255,7 +17248,7 @@
       </p:sp>
       <p:sp>
         <p:nvSpPr>
-          <p:cNvPr id="276" name="Google Shape;276;p34"/>
+          <p:cNvPr id="270" name="Google Shape;270;p34"/>
           <p:cNvSpPr txBox="1"/>
           <p:nvPr/>
         </p:nvSpPr>
@@ -17321,73 +17314,7 @@
       </p:sp>
       <p:sp>
         <p:nvSpPr>
-          <p:cNvPr id="277" name="Google Shape;277;p34"/>
-          <p:cNvSpPr txBox="1"/>
-          <p:nvPr/>
-        </p:nvSpPr>
-        <p:spPr>
-          <a:xfrm>
-            <a:off x="502920" y="1389888"/>
-            <a:ext cx="11155680" cy="365760"/>
-          </a:xfrm>
-          <a:prstGeom prst="rect">
-            <a:avLst/>
-          </a:prstGeom>
-          <a:noFill/>
-          <a:ln>
-            <a:noFill/>
-          </a:ln>
-        </p:spPr>
-        <p:txBody>
-          <a:bodyPr anchorCtr="0" anchor="t" bIns="0" lIns="0" spcFirstLastPara="1" rIns="0" wrap="square" tIns="0">
-            <a:spAutoFit/>
-          </a:bodyPr>
-          <a:lstStyle/>
-          <a:p>
-            <a:pPr indent="0" lvl="0" marL="0" marR="0" rtl="0" algn="l">
-              <a:lnSpc>
-                <a:spcPct val="115000"/>
-              </a:lnSpc>
-              <a:spcBef>
-                <a:spcPts val="0"/>
-              </a:spcBef>
-              <a:spcAft>
-                <a:spcPts val="0"/>
-              </a:spcAft>
-              <a:buClr>
-                <a:srgbClr val="000000"/>
-              </a:buClr>
-              <a:buSzPts val="1500"/>
-              <a:buFont typeface="Arial"/>
-              <a:buNone/>
-            </a:pPr>
-            <a:r>
-              <a:rPr b="0" i="0" lang="en-US" sz="1500" u="none" cap="none" strike="noStrike">
-                <a:solidFill>
-                  <a:srgbClr val="222C37"/>
-                </a:solidFill>
-                <a:latin typeface="Calibri"/>
-                <a:ea typeface="Calibri"/>
-                <a:cs typeface="Calibri"/>
-                <a:sym typeface="Calibri"/>
-              </a:rPr>
-              <a:t>Scalability is a claim worth being specific about. Here is what survives growth untouched, and what we would rebuild.</a:t>
-            </a:r>
-            <a:endParaRPr b="0" i="0" sz="1400" u="none" cap="none" strike="noStrike">
-              <a:solidFill>
-                <a:srgbClr val="000000"/>
-              </a:solidFill>
-              <a:latin typeface="Arial"/>
-              <a:ea typeface="Arial"/>
-              <a:cs typeface="Arial"/>
-              <a:sym typeface="Arial"/>
-            </a:endParaRPr>
-          </a:p>
-        </p:txBody>
-      </p:sp>
-      <p:sp>
-        <p:nvSpPr>
-          <p:cNvPr id="278" name="Google Shape;278;p34"/>
+          <p:cNvPr id="271" name="Google Shape;271;p34"/>
           <p:cNvSpPr/>
           <p:nvPr/>
         </p:nvSpPr>
@@ -17452,7 +17379,7 @@
       </p:sp>
       <p:sp>
         <p:nvSpPr>
-          <p:cNvPr id="279" name="Google Shape;279;p34"/>
+          <p:cNvPr id="272" name="Google Shape;272;p34"/>
           <p:cNvSpPr/>
           <p:nvPr/>
         </p:nvSpPr>
@@ -17511,7 +17438,7 @@
       </p:sp>
       <p:sp>
         <p:nvSpPr>
-          <p:cNvPr id="280" name="Google Shape;280;p34"/>
+          <p:cNvPr id="273" name="Google Shape;273;p34"/>
           <p:cNvSpPr txBox="1"/>
           <p:nvPr/>
         </p:nvSpPr>
@@ -17577,7 +17504,7 @@
       </p:sp>
       <p:sp>
         <p:nvSpPr>
-          <p:cNvPr id="281" name="Google Shape;281;p34"/>
+          <p:cNvPr id="274" name="Google Shape;274;p34"/>
           <p:cNvSpPr txBox="1"/>
           <p:nvPr/>
         </p:nvSpPr>
@@ -17923,7 +17850,7 @@
       </p:sp>
       <p:sp>
         <p:nvSpPr>
-          <p:cNvPr id="282" name="Google Shape;282;p34"/>
+          <p:cNvPr id="275" name="Google Shape;275;p34"/>
           <p:cNvSpPr/>
           <p:nvPr/>
         </p:nvSpPr>
@@ -17988,7 +17915,7 @@
       </p:sp>
       <p:sp>
         <p:nvSpPr>
-          <p:cNvPr id="283" name="Google Shape;283;p34"/>
+          <p:cNvPr id="276" name="Google Shape;276;p34"/>
           <p:cNvSpPr/>
           <p:nvPr/>
         </p:nvSpPr>
@@ -18047,7 +17974,7 @@
       </p:sp>
       <p:sp>
         <p:nvSpPr>
-          <p:cNvPr id="284" name="Google Shape;284;p34"/>
+          <p:cNvPr id="277" name="Google Shape;277;p34"/>
           <p:cNvSpPr txBox="1"/>
           <p:nvPr/>
         </p:nvSpPr>
@@ -18113,7 +18040,7 @@
       </p:sp>
       <p:sp>
         <p:nvSpPr>
-          <p:cNvPr id="285" name="Google Shape;285;p34"/>
+          <p:cNvPr id="278" name="Google Shape;278;p34"/>
           <p:cNvSpPr txBox="1"/>
           <p:nvPr/>
         </p:nvSpPr>
@@ -18444,149 +18371,6 @@
                 <a:sym typeface="Calibri"/>
               </a:rPr>
               <a:t>Notebooks and the console suffice today; a BI semantic layer follows the user count.</a:t>
-            </a:r>
-            <a:endParaRPr b="0" i="0" sz="1400" u="none" cap="none" strike="noStrike">
-              <a:solidFill>
-                <a:srgbClr val="000000"/>
-              </a:solidFill>
-              <a:latin typeface="Arial"/>
-              <a:ea typeface="Arial"/>
-              <a:cs typeface="Arial"/>
-              <a:sym typeface="Arial"/>
-            </a:endParaRPr>
-          </a:p>
-        </p:txBody>
-      </p:sp>
-      <p:sp>
-        <p:nvSpPr>
-          <p:cNvPr id="286" name="Google Shape;286;p34"/>
-          <p:cNvSpPr/>
-          <p:nvPr/>
-        </p:nvSpPr>
-        <p:spPr>
-          <a:xfrm>
-            <a:off x="502920" y="5596128"/>
-            <a:ext cx="11183112" cy="566928"/>
-          </a:xfrm>
-          <a:prstGeom prst="rect">
-            <a:avLst/>
-          </a:prstGeom>
-          <a:solidFill>
-            <a:srgbClr val="FFFFFF"/>
-          </a:solidFill>
-          <a:ln cap="flat" cmpd="sng" w="15875">
-            <a:solidFill>
-              <a:srgbClr val="E0793A"/>
-            </a:solidFill>
-            <a:prstDash val="solid"/>
-            <a:round/>
-            <a:headEnd len="sm" w="sm" type="none"/>
-            <a:tailEnd len="sm" w="sm" type="none"/>
-          </a:ln>
-        </p:spPr>
-        <p:txBody>
-          <a:bodyPr anchorCtr="0" anchor="ctr" bIns="45700" lIns="91425" spcFirstLastPara="1" rIns="91425" wrap="square" tIns="45700">
-            <a:noAutofit/>
-          </a:bodyPr>
-          <a:lstStyle/>
-          <a:p>
-            <a:pPr indent="0" lvl="0" marL="0" marR="0" rtl="0" algn="ctr">
-              <a:lnSpc>
-                <a:spcPct val="100000"/>
-              </a:lnSpc>
-              <a:spcBef>
-                <a:spcPts val="0"/>
-              </a:spcBef>
-              <a:spcAft>
-                <a:spcPts val="0"/>
-              </a:spcAft>
-              <a:buClr>
-                <a:srgbClr val="000000"/>
-              </a:buClr>
-              <a:buSzPts val="1400"/>
-              <a:buFont typeface="Arial"/>
-              <a:buNone/>
-            </a:pPr>
-            <a:r>
-              <a:t/>
-            </a:r>
-            <a:endParaRPr b="0" i="0" sz="1400" u="none" cap="none" strike="noStrike">
-              <a:solidFill>
-                <a:schemeClr val="lt1"/>
-              </a:solidFill>
-              <a:latin typeface="Arial"/>
-              <a:ea typeface="Arial"/>
-              <a:cs typeface="Arial"/>
-              <a:sym typeface="Arial"/>
-            </a:endParaRPr>
-          </a:p>
-        </p:txBody>
-      </p:sp>
-      <p:sp>
-        <p:nvSpPr>
-          <p:cNvPr id="287" name="Google Shape;287;p34"/>
-          <p:cNvSpPr txBox="1"/>
-          <p:nvPr/>
-        </p:nvSpPr>
-        <p:spPr>
-          <a:xfrm>
-            <a:off x="758952" y="5596128"/>
-            <a:ext cx="10671048" cy="566928"/>
-          </a:xfrm>
-          <a:prstGeom prst="rect">
-            <a:avLst/>
-          </a:prstGeom>
-          <a:noFill/>
-          <a:ln>
-            <a:noFill/>
-          </a:ln>
-        </p:spPr>
-        <p:txBody>
-          <a:bodyPr anchorCtr="0" anchor="ctr" bIns="0" lIns="0" spcFirstLastPara="1" rIns="0" wrap="square" tIns="0">
-            <a:spAutoFit/>
-          </a:bodyPr>
-          <a:lstStyle/>
-          <a:p>
-            <a:pPr indent="0" lvl="0" marL="0" marR="0" rtl="0" algn="l">
-              <a:lnSpc>
-                <a:spcPct val="120000"/>
-              </a:lnSpc>
-              <a:spcBef>
-                <a:spcPts val="0"/>
-              </a:spcBef>
-              <a:spcAft>
-                <a:spcPts val="0"/>
-              </a:spcAft>
-              <a:buClr>
-                <a:srgbClr val="000000"/>
-              </a:buClr>
-              <a:buSzPts val="1250"/>
-              <a:buFont typeface="Arial"/>
-              <a:buNone/>
-            </a:pPr>
-            <a:r>
-              <a:rPr b="1" i="0" lang="en-US" sz="1250" u="none" cap="none" strike="noStrike">
-                <a:solidFill>
-                  <a:srgbClr val="14304D"/>
-                </a:solidFill>
-                <a:latin typeface="Calibri"/>
-                <a:ea typeface="Calibri"/>
-                <a:cs typeface="Calibri"/>
-                <a:sym typeface="Calibri"/>
-              </a:rPr>
-              <a:t>Honest caveat:</a:t>
-            </a:r>
-            <a:r>
-              <a:rPr b="0" i="0" lang="en-US" sz="1250" u="none" cap="none" strike="noStrike">
-                <a:solidFill>
-                  <a:srgbClr val="222C37"/>
-                </a:solidFill>
-                <a:latin typeface="Calibri"/>
-                <a:ea typeface="Calibri"/>
-                <a:cs typeface="Calibri"/>
-                <a:sym typeface="Calibri"/>
-              </a:rPr>
-              <a:t>  at ~120 MB, partitioning and clustering express the intended access pattern — they are not a measured speedup on this sample. We present them as scale-aware design, not as a performance result.</a:t>
             </a:r>
             <a:endParaRPr b="0" i="0" sz="1400" u="none" cap="none" strike="noStrike">
               <a:solidFill>
@@ -18620,7 +18404,7 @@
     </p:bg>
     <p:spTree>
       <p:nvGrpSpPr>
-        <p:cNvPr id="291" name="Shape 291"/>
+        <p:cNvPr id="282" name="Shape 282"/>
         <p:cNvGrpSpPr/>
         <p:nvPr/>
       </p:nvGrpSpPr>
@@ -18634,14 +18418,14 @@
       </p:grpSpPr>
       <p:sp>
         <p:nvSpPr>
-          <p:cNvPr id="292" name="Google Shape;292;p14"/>
+          <p:cNvPr id="283" name="Google Shape;283;p6"/>
           <p:cNvSpPr txBox="1"/>
           <p:nvPr/>
         </p:nvSpPr>
         <p:spPr>
           <a:xfrm>
-            <a:off x="502920" y="292608"/>
-            <a:ext cx="8229600" cy="292608"/>
+            <a:off x="502920" y="139773"/>
+            <a:ext cx="8229600" cy="200055"/>
           </a:xfrm>
           <a:prstGeom prst="rect">
             <a:avLst/>
@@ -18684,7 +18468,7 @@
                 <a:cs typeface="Calibri"/>
                 <a:sym typeface="Calibri"/>
               </a:rPr>
-              <a:t>TECHNICAL FOUNDATION  ·  8 OF 8</a:t>
+              <a:t>BUSINESS VALUE  ·  DRIVER 1 OF 2</a:t>
             </a:r>
             <a:endParaRPr b="0" i="0" sz="1400" u="none" cap="none" strike="noStrike">
               <a:solidFill>
@@ -18700,14 +18484,14 @@
       </p:sp>
       <p:sp>
         <p:nvSpPr>
-          <p:cNvPr id="293" name="Google Shape;293;p14"/>
+          <p:cNvPr id="284" name="Google Shape;284;p6"/>
           <p:cNvSpPr txBox="1"/>
           <p:nvPr/>
         </p:nvSpPr>
         <p:spPr>
           <a:xfrm>
             <a:off x="484632" y="548640"/>
-            <a:ext cx="10515600" cy="658368"/>
+            <a:ext cx="10515600" cy="415498"/>
           </a:xfrm>
           <a:prstGeom prst="rect">
             <a:avLst/>
@@ -18736,12 +18520,12 @@
               <a:buClr>
                 <a:srgbClr val="000000"/>
               </a:buClr>
-              <a:buSzPts val="2500"/>
+              <a:buSzPts val="2700"/>
               <a:buFont typeface="Arial"/>
               <a:buNone/>
             </a:pPr>
             <a:r>
-              <a:rPr b="1" i="0" lang="en-US" sz="2500" u="none" cap="none" strike="noStrike">
+              <a:rPr b="1" i="0" lang="en-US" sz="2700" u="none" cap="none" strike="noStrike">
                 <a:solidFill>
                   <a:srgbClr val="14304D"/>
                 </a:solidFill>
@@ -18750,7 +18534,7 @@
                 <a:cs typeface="Calibri"/>
                 <a:sym typeface="Calibri"/>
               </a:rPr>
-              <a:t>Why the Architecture Is Part of the Business Value</a:t>
+              <a:t>Delivery Reliability to safeguard Olist’s reputation</a:t>
             </a:r>
             <a:endParaRPr b="0" i="0" sz="1400" u="none" cap="none" strike="noStrike">
               <a:solidFill>
@@ -18766,7 +18550,7 @@
       </p:sp>
       <p:sp>
         <p:nvSpPr>
-          <p:cNvPr id="294" name="Google Shape;294;p14"/>
+          <p:cNvPr id="285" name="Google Shape;285;p6"/>
           <p:cNvSpPr/>
           <p:nvPr/>
         </p:nvSpPr>
@@ -18823,140 +18607,23 @@
           </a:p>
         </p:txBody>
       </p:sp>
-      <p:sp>
-        <p:nvSpPr>
-          <p:cNvPr id="295" name="Google Shape;295;p14"/>
-          <p:cNvSpPr/>
+      <p:pic>
+        <p:nvPicPr>
+          <p:cNvPr descr="chart_delivery_reviews.png" id="286" name="Google Shape;286;p6"/>
+          <p:cNvPicPr preferRelativeResize="0"/>
           <p:nvPr/>
-        </p:nvSpPr>
+        </p:nvPicPr>
+        <p:blipFill rotWithShape="1">
+          <a:blip r:embed="rId3">
+            <a:alphaModFix/>
+          </a:blip>
+          <a:srcRect b="0" l="0" r="0" t="0"/>
+          <a:stretch/>
+        </p:blipFill>
         <p:spPr>
           <a:xfrm>
-            <a:off x="502920" y="1508760"/>
-            <a:ext cx="3529584" cy="3429000"/>
-          </a:xfrm>
-          <a:prstGeom prst="rect">
-            <a:avLst/>
-          </a:prstGeom>
-          <a:solidFill>
-            <a:srgbClr val="FFFFFF"/>
-          </a:solidFill>
-          <a:ln cap="flat" cmpd="sng" w="9525">
-            <a:solidFill>
-              <a:srgbClr val="DDE2E7"/>
-            </a:solidFill>
-            <a:prstDash val="solid"/>
-            <a:round/>
-            <a:headEnd len="sm" w="sm" type="none"/>
-            <a:tailEnd len="sm" w="sm" type="none"/>
-          </a:ln>
-        </p:spPr>
-        <p:txBody>
-          <a:bodyPr anchorCtr="0" anchor="ctr" bIns="45700" lIns="91425" spcFirstLastPara="1" rIns="91425" wrap="square" tIns="45700">
-            <a:noAutofit/>
-          </a:bodyPr>
-          <a:lstStyle/>
-          <a:p>
-            <a:pPr indent="0" lvl="0" marL="0" marR="0" rtl="0" algn="ctr">
-              <a:lnSpc>
-                <a:spcPct val="100000"/>
-              </a:lnSpc>
-              <a:spcBef>
-                <a:spcPts val="0"/>
-              </a:spcBef>
-              <a:spcAft>
-                <a:spcPts val="0"/>
-              </a:spcAft>
-              <a:buClr>
-                <a:srgbClr val="000000"/>
-              </a:buClr>
-              <a:buSzPts val="1800"/>
-              <a:buFont typeface="Arial"/>
-              <a:buNone/>
-            </a:pPr>
-            <a:r>
-              <a:t/>
-            </a:r>
-            <a:endParaRPr b="0" i="0" sz="1800" u="none" cap="none" strike="noStrike">
-              <a:solidFill>
-                <a:schemeClr val="dk1"/>
-              </a:solidFill>
-              <a:latin typeface="Calibri"/>
-              <a:ea typeface="Calibri"/>
-              <a:cs typeface="Calibri"/>
-              <a:sym typeface="Calibri"/>
-            </a:endParaRPr>
-          </a:p>
-        </p:txBody>
-      </p:sp>
-      <p:sp>
-        <p:nvSpPr>
-          <p:cNvPr id="296" name="Google Shape;296;p14"/>
-          <p:cNvSpPr/>
-          <p:nvPr/>
-        </p:nvSpPr>
-        <p:spPr>
-          <a:xfrm>
-            <a:off x="502920" y="1508760"/>
-            <a:ext cx="3529584" cy="566928"/>
-          </a:xfrm>
-          <a:prstGeom prst="rect">
-            <a:avLst/>
-          </a:prstGeom>
-          <a:solidFill>
-            <a:srgbClr val="14304D"/>
-          </a:solidFill>
-          <a:ln>
-            <a:noFill/>
-          </a:ln>
-        </p:spPr>
-        <p:txBody>
-          <a:bodyPr anchorCtr="0" anchor="ctr" bIns="45700" lIns="91425" spcFirstLastPara="1" rIns="91425" wrap="square" tIns="45700">
-            <a:noAutofit/>
-          </a:bodyPr>
-          <a:lstStyle/>
-          <a:p>
-            <a:pPr indent="0" lvl="0" marL="0" marR="0" rtl="0" algn="ctr">
-              <a:lnSpc>
-                <a:spcPct val="100000"/>
-              </a:lnSpc>
-              <a:spcBef>
-                <a:spcPts val="0"/>
-              </a:spcBef>
-              <a:spcAft>
-                <a:spcPts val="0"/>
-              </a:spcAft>
-              <a:buClr>
-                <a:srgbClr val="000000"/>
-              </a:buClr>
-              <a:buSzPts val="1800"/>
-              <a:buFont typeface="Arial"/>
-              <a:buNone/>
-            </a:pPr>
-            <a:r>
-              <a:t/>
-            </a:r>
-            <a:endParaRPr b="0" i="0" sz="1800" u="none" cap="none" strike="noStrike">
-              <a:solidFill>
-                <a:schemeClr val="dk1"/>
-              </a:solidFill>
-              <a:latin typeface="Calibri"/>
-              <a:ea typeface="Calibri"/>
-              <a:cs typeface="Calibri"/>
-              <a:sym typeface="Calibri"/>
-            </a:endParaRPr>
-          </a:p>
-        </p:txBody>
-      </p:sp>
-      <p:sp>
-        <p:nvSpPr>
-          <p:cNvPr id="297" name="Google Shape;297;p14"/>
-          <p:cNvSpPr txBox="1"/>
-          <p:nvPr/>
-        </p:nvSpPr>
-        <p:spPr>
-          <a:xfrm>
-            <a:off x="704088" y="1508760"/>
-            <a:ext cx="3127248" cy="566928"/>
+            <a:off x="214686" y="1322251"/>
+            <a:ext cx="6263640" cy="2998361"/>
           </a:xfrm>
           <a:prstGeom prst="rect">
             <a:avLst/>
@@ -18966,63 +18633,17 @@
             <a:noFill/>
           </a:ln>
         </p:spPr>
-        <p:txBody>
-          <a:bodyPr anchorCtr="0" anchor="ctr" bIns="0" lIns="0" spcFirstLastPara="1" rIns="0" wrap="square" tIns="0">
-            <a:spAutoFit/>
-          </a:bodyPr>
-          <a:lstStyle/>
-          <a:p>
-            <a:pPr indent="0" lvl="0" marL="0" marR="0" rtl="0" algn="l">
-              <a:lnSpc>
-                <a:spcPct val="100000"/>
-              </a:lnSpc>
-              <a:spcBef>
-                <a:spcPts val="0"/>
-              </a:spcBef>
-              <a:spcAft>
-                <a:spcPts val="0"/>
-              </a:spcAft>
-              <a:buClr>
-                <a:srgbClr val="000000"/>
-              </a:buClr>
-              <a:buSzPts val="1700"/>
-              <a:buFont typeface="Arial"/>
-              <a:buNone/>
-            </a:pPr>
-            <a:r>
-              <a:rPr b="1" i="0" lang="en-US" sz="1700" u="none" cap="none" strike="noStrike">
-                <a:solidFill>
-                  <a:srgbClr val="FFFFFF"/>
-                </a:solidFill>
-                <a:latin typeface="Calibri"/>
-                <a:ea typeface="Calibri"/>
-                <a:cs typeface="Calibri"/>
-                <a:sym typeface="Calibri"/>
-              </a:rPr>
-              <a:t>Delivery → Reviews</a:t>
-            </a:r>
-            <a:endParaRPr b="0" i="0" sz="1400" u="none" cap="none" strike="noStrike">
-              <a:solidFill>
-                <a:srgbClr val="000000"/>
-              </a:solidFill>
-              <a:latin typeface="Arial"/>
-              <a:ea typeface="Arial"/>
-              <a:cs typeface="Arial"/>
-              <a:sym typeface="Arial"/>
-            </a:endParaRPr>
-          </a:p>
-        </p:txBody>
-      </p:sp>
+      </p:pic>
       <p:sp>
         <p:nvSpPr>
-          <p:cNvPr id="298" name="Google Shape;298;p14"/>
+          <p:cNvPr id="287" name="Google Shape;287;p6"/>
           <p:cNvSpPr txBox="1"/>
           <p:nvPr/>
         </p:nvSpPr>
         <p:spPr>
           <a:xfrm>
-            <a:off x="758952" y="2286000"/>
-            <a:ext cx="3017520" cy="2423160"/>
+            <a:off x="502920" y="4334256"/>
+            <a:ext cx="6035040" cy="365760"/>
           </a:xfrm>
           <a:prstGeom prst="rect">
             <a:avLst/>
@@ -19040,32 +18661,32 @@
           <a:p>
             <a:pPr indent="0" lvl="0" marL="0" marR="0" rtl="0" algn="l">
               <a:lnSpc>
-                <a:spcPct val="124000"/>
-              </a:lnSpc>
-              <a:spcBef>
-                <a:spcPts val="0"/>
-              </a:spcBef>
-              <a:spcAft>
-                <a:spcPts val="0"/>
-              </a:spcAft>
-              <a:buClr>
-                <a:srgbClr val="000000"/>
-              </a:buClr>
-              <a:buSzPts val="1600"/>
+                <a:spcPct val="100000"/>
+              </a:lnSpc>
+              <a:spcBef>
+                <a:spcPts val="0"/>
+              </a:spcBef>
+              <a:spcAft>
+                <a:spcPts val="0"/>
+              </a:spcAft>
+              <a:buClr>
+                <a:srgbClr val="000000"/>
+              </a:buClr>
+              <a:buSzPts val="1300"/>
               <a:buFont typeface="Arial"/>
               <a:buNone/>
             </a:pPr>
             <a:r>
-              <a:rPr b="0" i="0" lang="en-US" sz="1600" u="none" cap="none" strike="noStrike">
-                <a:solidFill>
-                  <a:srgbClr val="222C37"/>
+              <a:rPr b="0" i="1" lang="en-US" sz="1300" u="none" cap="none" strike="noStrike">
+                <a:solidFill>
+                  <a:srgbClr val="5B6B7A"/>
                 </a:solidFill>
                 <a:latin typeface="Calibri"/>
                 <a:ea typeface="Calibri"/>
                 <a:cs typeface="Calibri"/>
                 <a:sym typeface="Calibri"/>
               </a:rPr>
-              <a:t>Order timestamps are typed and frozen at ingestion, and payments are kept in their own fact table instead of being joined to order lines. That discipline is what keeps the R$13.5M revenue and R$1.16M late-delivery figures accurate instead of inflated.</a:t>
+              <a:t>Avg. review score &amp; dissatisfied-customer rate, by how late the delivery ran</a:t>
             </a:r>
             <a:endParaRPr b="0" i="0" sz="1400" u="none" cap="none" strike="noStrike">
               <a:solidFill>
@@ -19081,204 +18702,14 @@
       </p:sp>
       <p:sp>
         <p:nvSpPr>
-          <p:cNvPr id="299" name="Google Shape;299;p14"/>
-          <p:cNvSpPr/>
-          <p:nvPr/>
-        </p:nvSpPr>
-        <p:spPr>
-          <a:xfrm>
-            <a:off x="4251960" y="1508760"/>
-            <a:ext cx="3529584" cy="3429000"/>
-          </a:xfrm>
-          <a:prstGeom prst="rect">
-            <a:avLst/>
-          </a:prstGeom>
-          <a:solidFill>
-            <a:srgbClr val="FFFFFF"/>
-          </a:solidFill>
-          <a:ln cap="flat" cmpd="sng" w="9525">
-            <a:solidFill>
-              <a:srgbClr val="DDE2E7"/>
-            </a:solidFill>
-            <a:prstDash val="solid"/>
-            <a:round/>
-            <a:headEnd len="sm" w="sm" type="none"/>
-            <a:tailEnd len="sm" w="sm" type="none"/>
-          </a:ln>
-        </p:spPr>
-        <p:txBody>
-          <a:bodyPr anchorCtr="0" anchor="ctr" bIns="45700" lIns="91425" spcFirstLastPara="1" rIns="91425" wrap="square" tIns="45700">
-            <a:noAutofit/>
-          </a:bodyPr>
-          <a:lstStyle/>
-          <a:p>
-            <a:pPr indent="0" lvl="0" marL="0" marR="0" rtl="0" algn="ctr">
-              <a:lnSpc>
-                <a:spcPct val="100000"/>
-              </a:lnSpc>
-              <a:spcBef>
-                <a:spcPts val="0"/>
-              </a:spcBef>
-              <a:spcAft>
-                <a:spcPts val="0"/>
-              </a:spcAft>
-              <a:buClr>
-                <a:srgbClr val="000000"/>
-              </a:buClr>
-              <a:buSzPts val="1800"/>
-              <a:buFont typeface="Arial"/>
-              <a:buNone/>
-            </a:pPr>
-            <a:r>
-              <a:t/>
-            </a:r>
-            <a:endParaRPr b="0" i="0" sz="1800" u="none" cap="none" strike="noStrike">
-              <a:solidFill>
-                <a:schemeClr val="dk1"/>
-              </a:solidFill>
-              <a:latin typeface="Calibri"/>
-              <a:ea typeface="Calibri"/>
-              <a:cs typeface="Calibri"/>
-              <a:sym typeface="Calibri"/>
-            </a:endParaRPr>
-          </a:p>
-        </p:txBody>
-      </p:sp>
-      <p:sp>
-        <p:nvSpPr>
-          <p:cNvPr id="300" name="Google Shape;300;p14"/>
-          <p:cNvSpPr/>
-          <p:nvPr/>
-        </p:nvSpPr>
-        <p:spPr>
-          <a:xfrm>
-            <a:off x="4251960" y="1508760"/>
-            <a:ext cx="3529584" cy="566928"/>
-          </a:xfrm>
-          <a:prstGeom prst="rect">
-            <a:avLst/>
-          </a:prstGeom>
-          <a:solidFill>
-            <a:srgbClr val="14304D"/>
-          </a:solidFill>
-          <a:ln>
-            <a:noFill/>
-          </a:ln>
-        </p:spPr>
-        <p:txBody>
-          <a:bodyPr anchorCtr="0" anchor="ctr" bIns="45700" lIns="91425" spcFirstLastPara="1" rIns="91425" wrap="square" tIns="45700">
-            <a:noAutofit/>
-          </a:bodyPr>
-          <a:lstStyle/>
-          <a:p>
-            <a:pPr indent="0" lvl="0" marL="0" marR="0" rtl="0" algn="ctr">
-              <a:lnSpc>
-                <a:spcPct val="100000"/>
-              </a:lnSpc>
-              <a:spcBef>
-                <a:spcPts val="0"/>
-              </a:spcBef>
-              <a:spcAft>
-                <a:spcPts val="0"/>
-              </a:spcAft>
-              <a:buClr>
-                <a:srgbClr val="000000"/>
-              </a:buClr>
-              <a:buSzPts val="1800"/>
-              <a:buFont typeface="Arial"/>
-              <a:buNone/>
-            </a:pPr>
-            <a:r>
-              <a:t/>
-            </a:r>
-            <a:endParaRPr b="0" i="0" sz="1800" u="none" cap="none" strike="noStrike">
-              <a:solidFill>
-                <a:schemeClr val="dk1"/>
-              </a:solidFill>
-              <a:latin typeface="Calibri"/>
-              <a:ea typeface="Calibri"/>
-              <a:cs typeface="Calibri"/>
-              <a:sym typeface="Calibri"/>
-            </a:endParaRPr>
-          </a:p>
-        </p:txBody>
-      </p:sp>
-      <p:sp>
-        <p:nvSpPr>
-          <p:cNvPr id="301" name="Google Shape;301;p14"/>
+          <p:cNvPr id="288" name="Google Shape;288;p6"/>
           <p:cNvSpPr txBox="1"/>
           <p:nvPr/>
         </p:nvSpPr>
         <p:spPr>
           <a:xfrm>
-            <a:off x="4453128" y="1508760"/>
-            <a:ext cx="3127248" cy="566928"/>
-          </a:xfrm>
-          <a:prstGeom prst="rect">
-            <a:avLst/>
-          </a:prstGeom>
-          <a:noFill/>
-          <a:ln>
-            <a:noFill/>
-          </a:ln>
-        </p:spPr>
-        <p:txBody>
-          <a:bodyPr anchorCtr="0" anchor="ctr" bIns="0" lIns="0" spcFirstLastPara="1" rIns="0" wrap="square" tIns="0">
-            <a:spAutoFit/>
-          </a:bodyPr>
-          <a:lstStyle/>
-          <a:p>
-            <a:pPr indent="0" lvl="0" marL="0" marR="0" rtl="0" algn="l">
-              <a:lnSpc>
-                <a:spcPct val="100000"/>
-              </a:lnSpc>
-              <a:spcBef>
-                <a:spcPts val="0"/>
-              </a:spcBef>
-              <a:spcAft>
-                <a:spcPts val="0"/>
-              </a:spcAft>
-              <a:buClr>
-                <a:srgbClr val="000000"/>
-              </a:buClr>
-              <a:buSzPts val="1700"/>
-              <a:buFont typeface="Arial"/>
-              <a:buNone/>
-            </a:pPr>
-            <a:r>
-              <a:rPr b="1" i="0" lang="en-US" sz="1700" u="none" cap="none" strike="noStrike">
-                <a:solidFill>
-                  <a:srgbClr val="FFFFFF"/>
-                </a:solidFill>
-                <a:latin typeface="Calibri"/>
-                <a:ea typeface="Calibri"/>
-                <a:cs typeface="Calibri"/>
-                <a:sym typeface="Calibri"/>
-              </a:rPr>
-              <a:t>Retention</a:t>
-            </a:r>
-            <a:endParaRPr b="0" i="0" sz="1400" u="none" cap="none" strike="noStrike">
-              <a:solidFill>
-                <a:srgbClr val="000000"/>
-              </a:solidFill>
-              <a:latin typeface="Arial"/>
-              <a:ea typeface="Arial"/>
-              <a:cs typeface="Arial"/>
-              <a:sym typeface="Arial"/>
-            </a:endParaRPr>
-          </a:p>
-        </p:txBody>
-      </p:sp>
-      <p:sp>
-        <p:nvSpPr>
-          <p:cNvPr id="302" name="Google Shape;302;p14"/>
-          <p:cNvSpPr txBox="1"/>
-          <p:nvPr/>
-        </p:nvSpPr>
-        <p:spPr>
-          <a:xfrm>
-            <a:off x="4507992" y="2286000"/>
-            <a:ext cx="3017520" cy="2423160"/>
+            <a:off x="6975229" y="2250364"/>
+            <a:ext cx="4800600" cy="856773"/>
           </a:xfrm>
           <a:prstGeom prst="rect">
             <a:avLst/>
@@ -19296,7 +18727,7 @@
           <a:p>
             <a:pPr indent="0" lvl="0" marL="0" marR="0" rtl="0" algn="l">
               <a:lnSpc>
-                <a:spcPct val="124000"/>
+                <a:spcPct val="116000"/>
               </a:lnSpc>
               <a:spcBef>
                 <a:spcPts val="0"/>
@@ -19312,16 +18743,40 @@
               <a:buNone/>
             </a:pPr>
             <a:r>
-              <a:rPr b="0" i="0" lang="en-US" sz="1600" u="none" cap="none" strike="noStrike">
-                <a:solidFill>
-                  <a:srgbClr val="222C37"/>
+              <a:rPr b="1" i="0" lang="en-US" sz="1600" u="none" cap="none" strike="noStrike">
+                <a:solidFill>
+                  <a:srgbClr val="E0793A"/>
                 </a:solidFill>
                 <a:latin typeface="Calibri"/>
                 <a:ea typeface="Calibri"/>
                 <a:cs typeface="Calibri"/>
                 <a:sym typeface="Calibri"/>
               </a:rPr>
-              <a:t>dim_customer is keyed on customer_unique_id, not the per-order customer_id every raw table uses. Get that key wrong and Olist looks like it has zero repeat customers — this one modeling decision is what makes the 3.1% repeat rate visible at all.</a:t>
+              <a:t>›  </a:t>
+            </a:r>
+            <a:r>
+              <a:rPr b="1" i="0" lang="en-US" sz="1600" u="none" cap="none" strike="noStrike">
+                <a:solidFill>
+                  <a:srgbClr val="1B3A5C"/>
+                </a:solidFill>
+                <a:latin typeface="Calibri"/>
+                <a:ea typeface="Calibri"/>
+                <a:cs typeface="Calibri"/>
+                <a:sym typeface="Calibri"/>
+              </a:rPr>
+              <a:t>Reviews collapse fast. </a:t>
+            </a:r>
+            <a:r>
+              <a:rPr b="0" i="0" lang="en-US" sz="1600" u="none" cap="none" strike="noStrike">
+                <a:solidFill>
+                  <a:srgbClr val="222C37"/>
+                </a:solidFill>
+                <a:latin typeface="Calibri"/>
+                <a:ea typeface="Calibri"/>
+                <a:cs typeface="Calibri"/>
+                <a:sym typeface="Calibri"/>
+              </a:rPr>
+              <a:t>4–7 days late is enough to flip 68% of buyers into dissatisfied customers (1–2★); beyond ~8 days the score simply floors near 1.7 — no worse.</a:t>
             </a:r>
             <a:endParaRPr b="0" i="0" sz="1400" u="none" cap="none" strike="noStrike">
               <a:solidFill>
@@ -19337,204 +18792,14 @@
       </p:sp>
       <p:sp>
         <p:nvSpPr>
-          <p:cNvPr id="303" name="Google Shape;303;p14"/>
-          <p:cNvSpPr/>
-          <p:nvPr/>
-        </p:nvSpPr>
-        <p:spPr>
-          <a:xfrm>
-            <a:off x="8001000" y="1508760"/>
-            <a:ext cx="3529584" cy="3429000"/>
-          </a:xfrm>
-          <a:prstGeom prst="rect">
-            <a:avLst/>
-          </a:prstGeom>
-          <a:solidFill>
-            <a:srgbClr val="FFFFFF"/>
-          </a:solidFill>
-          <a:ln cap="flat" cmpd="sng" w="9525">
-            <a:solidFill>
-              <a:srgbClr val="DDE2E7"/>
-            </a:solidFill>
-            <a:prstDash val="solid"/>
-            <a:round/>
-            <a:headEnd len="sm" w="sm" type="none"/>
-            <a:tailEnd len="sm" w="sm" type="none"/>
-          </a:ln>
-        </p:spPr>
-        <p:txBody>
-          <a:bodyPr anchorCtr="0" anchor="ctr" bIns="45700" lIns="91425" spcFirstLastPara="1" rIns="91425" wrap="square" tIns="45700">
-            <a:noAutofit/>
-          </a:bodyPr>
-          <a:lstStyle/>
-          <a:p>
-            <a:pPr indent="0" lvl="0" marL="0" marR="0" rtl="0" algn="ctr">
-              <a:lnSpc>
-                <a:spcPct val="100000"/>
-              </a:lnSpc>
-              <a:spcBef>
-                <a:spcPts val="0"/>
-              </a:spcBef>
-              <a:spcAft>
-                <a:spcPts val="0"/>
-              </a:spcAft>
-              <a:buClr>
-                <a:srgbClr val="000000"/>
-              </a:buClr>
-              <a:buSzPts val="1800"/>
-              <a:buFont typeface="Arial"/>
-              <a:buNone/>
-            </a:pPr>
-            <a:r>
-              <a:t/>
-            </a:r>
-            <a:endParaRPr b="0" i="0" sz="1800" u="none" cap="none" strike="noStrike">
-              <a:solidFill>
-                <a:schemeClr val="dk1"/>
-              </a:solidFill>
-              <a:latin typeface="Calibri"/>
-              <a:ea typeface="Calibri"/>
-              <a:cs typeface="Calibri"/>
-              <a:sym typeface="Calibri"/>
-            </a:endParaRPr>
-          </a:p>
-        </p:txBody>
-      </p:sp>
-      <p:sp>
-        <p:nvSpPr>
-          <p:cNvPr id="304" name="Google Shape;304;p14"/>
-          <p:cNvSpPr/>
-          <p:nvPr/>
-        </p:nvSpPr>
-        <p:spPr>
-          <a:xfrm>
-            <a:off x="8001000" y="1508760"/>
-            <a:ext cx="3529584" cy="566928"/>
-          </a:xfrm>
-          <a:prstGeom prst="rect">
-            <a:avLst/>
-          </a:prstGeom>
-          <a:solidFill>
-            <a:srgbClr val="14304D"/>
-          </a:solidFill>
-          <a:ln>
-            <a:noFill/>
-          </a:ln>
-        </p:spPr>
-        <p:txBody>
-          <a:bodyPr anchorCtr="0" anchor="ctr" bIns="45700" lIns="91425" spcFirstLastPara="1" rIns="91425" wrap="square" tIns="45700">
-            <a:noAutofit/>
-          </a:bodyPr>
-          <a:lstStyle/>
-          <a:p>
-            <a:pPr indent="0" lvl="0" marL="0" marR="0" rtl="0" algn="ctr">
-              <a:lnSpc>
-                <a:spcPct val="100000"/>
-              </a:lnSpc>
-              <a:spcBef>
-                <a:spcPts val="0"/>
-              </a:spcBef>
-              <a:spcAft>
-                <a:spcPts val="0"/>
-              </a:spcAft>
-              <a:buClr>
-                <a:srgbClr val="000000"/>
-              </a:buClr>
-              <a:buSzPts val="1800"/>
-              <a:buFont typeface="Arial"/>
-              <a:buNone/>
-            </a:pPr>
-            <a:r>
-              <a:t/>
-            </a:r>
-            <a:endParaRPr b="0" i="0" sz="1800" u="none" cap="none" strike="noStrike">
-              <a:solidFill>
-                <a:schemeClr val="dk1"/>
-              </a:solidFill>
-              <a:latin typeface="Calibri"/>
-              <a:ea typeface="Calibri"/>
-              <a:cs typeface="Calibri"/>
-              <a:sym typeface="Calibri"/>
-            </a:endParaRPr>
-          </a:p>
-        </p:txBody>
-      </p:sp>
-      <p:sp>
-        <p:nvSpPr>
-          <p:cNvPr id="305" name="Google Shape;305;p14"/>
+          <p:cNvPr id="289" name="Google Shape;289;p6"/>
           <p:cNvSpPr txBox="1"/>
           <p:nvPr/>
         </p:nvSpPr>
         <p:spPr>
           <a:xfrm>
-            <a:off x="8202168" y="1508760"/>
-            <a:ext cx="3127248" cy="566928"/>
-          </a:xfrm>
-          <a:prstGeom prst="rect">
-            <a:avLst/>
-          </a:prstGeom>
-          <a:noFill/>
-          <a:ln>
-            <a:noFill/>
-          </a:ln>
-        </p:spPr>
-        <p:txBody>
-          <a:bodyPr anchorCtr="0" anchor="ctr" bIns="0" lIns="0" spcFirstLastPara="1" rIns="0" wrap="square" tIns="0">
-            <a:spAutoFit/>
-          </a:bodyPr>
-          <a:lstStyle/>
-          <a:p>
-            <a:pPr indent="0" lvl="0" marL="0" marR="0" rtl="0" algn="l">
-              <a:lnSpc>
-                <a:spcPct val="100000"/>
-              </a:lnSpc>
-              <a:spcBef>
-                <a:spcPts val="0"/>
-              </a:spcBef>
-              <a:spcAft>
-                <a:spcPts val="0"/>
-              </a:spcAft>
-              <a:buClr>
-                <a:srgbClr val="000000"/>
-              </a:buClr>
-              <a:buSzPts val="1700"/>
-              <a:buFont typeface="Arial"/>
-              <a:buNone/>
-            </a:pPr>
-            <a:r>
-              <a:rPr b="1" i="0" lang="en-US" sz="1700" u="none" cap="none" strike="noStrike">
-                <a:solidFill>
-                  <a:srgbClr val="FFFFFF"/>
-                </a:solidFill>
-                <a:latin typeface="Calibri"/>
-                <a:ea typeface="Calibri"/>
-                <a:cs typeface="Calibri"/>
-                <a:sym typeface="Calibri"/>
-              </a:rPr>
-              <a:t>Geography</a:t>
-            </a:r>
-            <a:endParaRPr b="0" i="0" sz="1400" u="none" cap="none" strike="noStrike">
-              <a:solidFill>
-                <a:srgbClr val="000000"/>
-              </a:solidFill>
-              <a:latin typeface="Arial"/>
-              <a:ea typeface="Arial"/>
-              <a:cs typeface="Arial"/>
-              <a:sym typeface="Arial"/>
-            </a:endParaRPr>
-          </a:p>
-        </p:txBody>
-      </p:sp>
-      <p:sp>
-        <p:nvSpPr>
-          <p:cNvPr id="306" name="Google Shape;306;p14"/>
-          <p:cNvSpPr txBox="1"/>
-          <p:nvPr/>
-        </p:nvSpPr>
-        <p:spPr>
-          <a:xfrm>
-            <a:off x="8257032" y="2286000"/>
-            <a:ext cx="3017520" cy="2423160"/>
+            <a:off x="502920" y="6519672"/>
+            <a:ext cx="8686800" cy="274320"/>
           </a:xfrm>
           <a:prstGeom prst="rect">
             <a:avLst/>
@@ -19552,32 +18817,32 @@
           <a:p>
             <a:pPr indent="0" lvl="0" marL="0" marR="0" rtl="0" algn="l">
               <a:lnSpc>
-                <a:spcPct val="124000"/>
-              </a:lnSpc>
-              <a:spcBef>
-                <a:spcPts val="0"/>
-              </a:spcBef>
-              <a:spcAft>
-                <a:spcPts val="0"/>
-              </a:spcAft>
-              <a:buClr>
-                <a:srgbClr val="000000"/>
-              </a:buClr>
-              <a:buSzPts val="1600"/>
+                <a:spcPct val="100000"/>
+              </a:lnSpc>
+              <a:spcBef>
+                <a:spcPts val="0"/>
+              </a:spcBef>
+              <a:spcAft>
+                <a:spcPts val="0"/>
+              </a:spcAft>
+              <a:buClr>
+                <a:srgbClr val="000000"/>
+              </a:buClr>
+              <a:buSzPts val="1050"/>
               <a:buFont typeface="Arial"/>
               <a:buNone/>
             </a:pPr>
             <a:r>
-              <a:rPr b="0" i="0" lang="en-US" sz="1600" u="none" cap="none" strike="noStrike">
-                <a:solidFill>
-                  <a:srgbClr val="222C37"/>
+              <a:rPr b="0" i="0" lang="en-US" sz="1050" u="none" cap="none" strike="noStrike">
+                <a:solidFill>
+                  <a:srgbClr val="5B6B7A"/>
                 </a:solidFill>
                 <a:latin typeface="Calibri"/>
                 <a:ea typeface="Calibri"/>
                 <a:cs typeface="Calibri"/>
                 <a:sym typeface="Calibri"/>
               </a:rPr>
-              <a:t>int_geolocation_deduped collapses ~1M raw coordinate rows to one reliable point per zip code before it reaches dim_customer. Skip that step and city/state revenue totals double-count, and the 3-state concentration finding becomes noise.</a:t>
+              <a:t>Olist marketplace analysis  ·  olist_marts (BigQuery)  ·  99,441 orders, Sep 2016 – Oct 2018</a:t>
             </a:r>
             <a:endParaRPr b="0" i="0" sz="1400" u="none" cap="none" strike="noStrike">
               <a:solidFill>
@@ -19593,204 +18858,7 @@
       </p:sp>
       <p:sp>
         <p:nvSpPr>
-          <p:cNvPr id="307" name="Google Shape;307;p14"/>
-          <p:cNvSpPr/>
-          <p:nvPr/>
-        </p:nvSpPr>
-        <p:spPr>
-          <a:xfrm>
-            <a:off x="502920" y="5166360"/>
-            <a:ext cx="11183112" cy="1051560"/>
-          </a:xfrm>
-          <a:prstGeom prst="rect">
-            <a:avLst/>
-          </a:prstGeom>
-          <a:solidFill>
-            <a:srgbClr val="F7F8FA"/>
-          </a:solidFill>
-          <a:ln cap="flat" cmpd="sng" w="15875">
-            <a:solidFill>
-              <a:srgbClr val="E0793A"/>
-            </a:solidFill>
-            <a:prstDash val="solid"/>
-            <a:round/>
-            <a:headEnd len="sm" w="sm" type="none"/>
-            <a:tailEnd len="sm" w="sm" type="none"/>
-          </a:ln>
-        </p:spPr>
-        <p:txBody>
-          <a:bodyPr anchorCtr="0" anchor="ctr" bIns="45700" lIns="91425" spcFirstLastPara="1" rIns="91425" wrap="square" tIns="45700">
-            <a:noAutofit/>
-          </a:bodyPr>
-          <a:lstStyle/>
-          <a:p>
-            <a:pPr indent="0" lvl="0" marL="0" marR="0" rtl="0" algn="ctr">
-              <a:lnSpc>
-                <a:spcPct val="100000"/>
-              </a:lnSpc>
-              <a:spcBef>
-                <a:spcPts val="0"/>
-              </a:spcBef>
-              <a:spcAft>
-                <a:spcPts val="0"/>
-              </a:spcAft>
-              <a:buClr>
-                <a:srgbClr val="000000"/>
-              </a:buClr>
-              <a:buSzPts val="1800"/>
-              <a:buFont typeface="Arial"/>
-              <a:buNone/>
-            </a:pPr>
-            <a:r>
-              <a:t/>
-            </a:r>
-            <a:endParaRPr b="0" i="0" sz="1800" u="none" cap="none" strike="noStrike">
-              <a:solidFill>
-                <a:schemeClr val="dk1"/>
-              </a:solidFill>
-              <a:latin typeface="Calibri"/>
-              <a:ea typeface="Calibri"/>
-              <a:cs typeface="Calibri"/>
-              <a:sym typeface="Calibri"/>
-            </a:endParaRPr>
-          </a:p>
-        </p:txBody>
-      </p:sp>
-      <p:sp>
-        <p:nvSpPr>
-          <p:cNvPr id="308" name="Google Shape;308;p14"/>
-          <p:cNvSpPr txBox="1"/>
-          <p:nvPr/>
-        </p:nvSpPr>
-        <p:spPr>
-          <a:xfrm>
-            <a:off x="777240" y="5303520"/>
-            <a:ext cx="10607040" cy="822960"/>
-          </a:xfrm>
-          <a:prstGeom prst="rect">
-            <a:avLst/>
-          </a:prstGeom>
-          <a:noFill/>
-          <a:ln>
-            <a:noFill/>
-          </a:ln>
-        </p:spPr>
-        <p:txBody>
-          <a:bodyPr anchorCtr="0" anchor="ctr" bIns="0" lIns="0" spcFirstLastPara="1" rIns="0" wrap="square" tIns="0">
-            <a:spAutoFit/>
-          </a:bodyPr>
-          <a:lstStyle/>
-          <a:p>
-            <a:pPr indent="0" lvl="0" marL="0" marR="0" rtl="0" algn="l">
-              <a:lnSpc>
-                <a:spcPct val="120000"/>
-              </a:lnSpc>
-              <a:spcBef>
-                <a:spcPts val="0"/>
-              </a:spcBef>
-              <a:spcAft>
-                <a:spcPts val="0"/>
-              </a:spcAft>
-              <a:buClr>
-                <a:srgbClr val="000000"/>
-              </a:buClr>
-              <a:buSzPts val="1650"/>
-              <a:buFont typeface="Arial"/>
-              <a:buNone/>
-            </a:pPr>
-            <a:r>
-              <a:rPr b="1" i="0" lang="en-US" sz="1650" u="none" cap="none" strike="noStrike">
-                <a:solidFill>
-                  <a:srgbClr val="14304D"/>
-                </a:solidFill>
-                <a:latin typeface="Calibri"/>
-                <a:ea typeface="Calibri"/>
-                <a:cs typeface="Calibri"/>
-                <a:sym typeface="Calibri"/>
-              </a:rPr>
-              <a:t>Bottom line: the marts rebuild themselves the moment new data lands, 79 tests guard them on every build, and non-engineers can already query them directly — this stays a live, self-serve capability, not a one-off report.</a:t>
-            </a:r>
-            <a:endParaRPr b="0" i="0" sz="1400" u="none" cap="none" strike="noStrike">
-              <a:solidFill>
-                <a:srgbClr val="000000"/>
-              </a:solidFill>
-              <a:latin typeface="Arial"/>
-              <a:ea typeface="Arial"/>
-              <a:cs typeface="Arial"/>
-              <a:sym typeface="Arial"/>
-            </a:endParaRPr>
-          </a:p>
-        </p:txBody>
-      </p:sp>
-      <p:sp>
-        <p:nvSpPr>
-          <p:cNvPr id="309" name="Google Shape;309;p14"/>
-          <p:cNvSpPr txBox="1"/>
-          <p:nvPr/>
-        </p:nvSpPr>
-        <p:spPr>
-          <a:xfrm>
-            <a:off x="502920" y="6519672"/>
-            <a:ext cx="8686800" cy="161700"/>
-          </a:xfrm>
-          <a:prstGeom prst="rect">
-            <a:avLst/>
-          </a:prstGeom>
-          <a:noFill/>
-          <a:ln>
-            <a:noFill/>
-          </a:ln>
-        </p:spPr>
-        <p:txBody>
-          <a:bodyPr anchorCtr="0" anchor="t" bIns="0" lIns="0" spcFirstLastPara="1" rIns="0" wrap="square" tIns="0">
-            <a:spAutoFit/>
-          </a:bodyPr>
-          <a:lstStyle/>
-          <a:p>
-            <a:pPr indent="0" lvl="0" marL="0" marR="0" rtl="0" algn="l">
-              <a:lnSpc>
-                <a:spcPct val="100000"/>
-              </a:lnSpc>
-              <a:spcBef>
-                <a:spcPts val="0"/>
-              </a:spcBef>
-              <a:spcAft>
-                <a:spcPts val="0"/>
-              </a:spcAft>
-              <a:buClr>
-                <a:srgbClr val="000000"/>
-              </a:buClr>
-              <a:buSzPts val="1050"/>
-              <a:buFont typeface="Arial"/>
-              <a:buNone/>
-            </a:pPr>
-            <a:r>
-              <a:rPr b="0" i="0" lang="en-US" sz="1050" u="none" cap="none" strike="noStrike">
-                <a:solidFill>
-                  <a:srgbClr val="5B6B7A"/>
-                </a:solidFill>
-                <a:latin typeface="Calibri"/>
-                <a:ea typeface="Calibri"/>
-                <a:cs typeface="Calibri"/>
-                <a:sym typeface="Calibri"/>
-              </a:rPr>
-              <a:t>Olist marketplace analysis  ·  olist_marts (BigQuery)  ·  99,441 orders, Sep 2016 – Oct 2018</a:t>
-            </a:r>
-            <a:endParaRPr b="0" i="0" sz="1400" u="none" cap="none" strike="noStrike">
-              <a:solidFill>
-                <a:srgbClr val="000000"/>
-              </a:solidFill>
-              <a:latin typeface="Arial"/>
-              <a:ea typeface="Arial"/>
-              <a:cs typeface="Arial"/>
-              <a:sym typeface="Arial"/>
-            </a:endParaRPr>
-          </a:p>
-        </p:txBody>
-      </p:sp>
-      <p:sp>
-        <p:nvSpPr>
-          <p:cNvPr id="310" name="Google Shape;310;p14"/>
+          <p:cNvPr id="290" name="Google Shape;290;p6"/>
           <p:cNvSpPr txBox="1"/>
           <p:nvPr/>
         </p:nvSpPr>
@@ -19840,11 +18908,163 @@
                 <a:cs typeface="Calibri"/>
                 <a:sym typeface="Calibri"/>
               </a:rPr>
-              <a:t>13</a:t>
+              <a:t>15</a:t>
             </a:r>
             <a:endParaRPr b="0" i="0" sz="1400" u="none" cap="none" strike="noStrike">
               <a:solidFill>
                 <a:srgbClr val="000000"/>
+              </a:solidFill>
+              <a:latin typeface="Arial"/>
+              <a:ea typeface="Arial"/>
+              <a:cs typeface="Arial"/>
+              <a:sym typeface="Arial"/>
+            </a:endParaRPr>
+          </a:p>
+        </p:txBody>
+      </p:sp>
+      <p:sp>
+        <p:nvSpPr>
+          <p:cNvPr id="291" name="Google Shape;291;p6"/>
+          <p:cNvSpPr txBox="1"/>
+          <p:nvPr/>
+        </p:nvSpPr>
+        <p:spPr>
+          <a:xfrm>
+            <a:off x="779277" y="5008639"/>
+            <a:ext cx="11155680" cy="886397"/>
+          </a:xfrm>
+          <a:prstGeom prst="rect">
+            <a:avLst/>
+          </a:prstGeom>
+          <a:noFill/>
+          <a:ln>
+            <a:noFill/>
+          </a:ln>
+        </p:spPr>
+        <p:txBody>
+          <a:bodyPr anchorCtr="0" anchor="t" bIns="0" lIns="0" spcFirstLastPara="1" rIns="0" wrap="square" tIns="0">
+            <a:spAutoFit/>
+          </a:bodyPr>
+          <a:lstStyle/>
+          <a:p>
+            <a:pPr indent="0" lvl="0" marL="0" marR="0" rtl="0" algn="l">
+              <a:lnSpc>
+                <a:spcPct val="120000"/>
+              </a:lnSpc>
+              <a:spcBef>
+                <a:spcPts val="0"/>
+              </a:spcBef>
+              <a:spcAft>
+                <a:spcPts val="0"/>
+              </a:spcAft>
+              <a:buClr>
+                <a:srgbClr val="000000"/>
+              </a:buClr>
+              <a:buSzPts val="2400"/>
+              <a:buFont typeface="Arial"/>
+              <a:buNone/>
+            </a:pPr>
+            <a:r>
+              <a:rPr b="1" i="0" lang="en-US" sz="2400" u="none" cap="none" strike="noStrike">
+                <a:solidFill>
+                  <a:srgbClr val="14304D"/>
+                </a:solidFill>
+                <a:latin typeface="Calibri"/>
+                <a:ea typeface="Calibri"/>
+                <a:cs typeface="Calibri"/>
+                <a:sym typeface="Calibri"/>
+              </a:rPr>
+              <a:t>It is crucial to deliver items on-time, or at least within 3 days late, as this can have</a:t>
+            </a:r>
+            <a:br>
+              <a:rPr b="1" i="0" lang="en-US" sz="2400" u="none" cap="none" strike="noStrike">
+                <a:solidFill>
+                  <a:srgbClr val="14304D"/>
+                </a:solidFill>
+                <a:latin typeface="Calibri"/>
+                <a:ea typeface="Calibri"/>
+                <a:cs typeface="Calibri"/>
+                <a:sym typeface="Calibri"/>
+              </a:rPr>
+            </a:br>
+            <a:r>
+              <a:rPr b="1" i="0" lang="en-US" sz="2400" u="none" cap="none" strike="noStrike">
+                <a:solidFill>
+                  <a:srgbClr val="14304D"/>
+                </a:solidFill>
+                <a:latin typeface="Calibri"/>
+                <a:ea typeface="Calibri"/>
+                <a:cs typeface="Calibri"/>
+                <a:sym typeface="Calibri"/>
+              </a:rPr>
+              <a:t>a significant impact on review scores and hence the reputation of Olist.</a:t>
+            </a:r>
+            <a:endParaRPr b="1" i="0" sz="2400" u="none" cap="none" strike="noStrike">
+              <a:solidFill>
+                <a:srgbClr val="FF0000"/>
+              </a:solidFill>
+              <a:latin typeface="Arial"/>
+              <a:ea typeface="Arial"/>
+              <a:cs typeface="Arial"/>
+              <a:sym typeface="Arial"/>
+            </a:endParaRPr>
+          </a:p>
+        </p:txBody>
+      </p:sp>
+      <p:sp>
+        <p:nvSpPr>
+          <p:cNvPr id="292" name="Google Shape;292;p6"/>
+          <p:cNvSpPr/>
+          <p:nvPr/>
+        </p:nvSpPr>
+        <p:spPr>
+          <a:xfrm>
+            <a:off x="551157" y="5063829"/>
+            <a:ext cx="11383800" cy="886397"/>
+          </a:xfrm>
+          <a:prstGeom prst="rect">
+            <a:avLst/>
+          </a:prstGeom>
+          <a:noFill/>
+          <a:ln cap="flat" cmpd="sng" w="47625">
+            <a:solidFill>
+              <a:srgbClr val="21364F"/>
+            </a:solidFill>
+            <a:prstDash val="solid"/>
+            <a:round/>
+            <a:headEnd len="sm" w="sm" type="none"/>
+            <a:tailEnd len="sm" w="sm" type="none"/>
+          </a:ln>
+        </p:spPr>
+        <p:txBody>
+          <a:bodyPr anchorCtr="0" anchor="ctr" bIns="45700" lIns="91425" spcFirstLastPara="1" rIns="91425" wrap="square" tIns="45700">
+            <a:noAutofit/>
+          </a:bodyPr>
+          <a:lstStyle/>
+          <a:p>
+            <a:pPr indent="0" lvl="0" marL="0" marR="0" rtl="0" algn="ctr">
+              <a:lnSpc>
+                <a:spcPct val="100000"/>
+              </a:lnSpc>
+              <a:spcBef>
+                <a:spcPts val="0"/>
+              </a:spcBef>
+              <a:spcAft>
+                <a:spcPts val="0"/>
+              </a:spcAft>
+              <a:buClr>
+                <a:srgbClr val="000000"/>
+              </a:buClr>
+              <a:buSzPts val="1400"/>
+              <a:buFont typeface="Arial"/>
+              <a:buNone/>
+            </a:pPr>
+            <a:r>
+              <a:t/>
+            </a:r>
+            <a:endParaRPr b="0" i="0" sz="1400" u="none" cap="none" strike="noStrike">
+              <a:solidFill>
+                <a:schemeClr val="lt1"/>
               </a:solidFill>
               <a:latin typeface="Arial"/>
               <a:ea typeface="Arial"/>
@@ -19874,7 +19094,7 @@
     </p:bg>
     <p:spTree>
       <p:nvGrpSpPr>
-        <p:cNvPr id="314" name="Shape 314"/>
+        <p:cNvPr id="296" name="Shape 296"/>
         <p:cNvGrpSpPr/>
         <p:nvPr/>
       </p:nvGrpSpPr>
@@ -19888,13 +19108,13 @@
       </p:grpSpPr>
       <p:sp>
         <p:nvSpPr>
-          <p:cNvPr id="315" name="Google Shape;315;p6"/>
+          <p:cNvPr id="297" name="Google Shape;297;p8"/>
           <p:cNvSpPr txBox="1"/>
           <p:nvPr/>
         </p:nvSpPr>
         <p:spPr>
           <a:xfrm>
-            <a:off x="502920" y="139773"/>
+            <a:off x="502920" y="292608"/>
             <a:ext cx="8229600" cy="200055"/>
           </a:xfrm>
           <a:prstGeom prst="rect">
@@ -19938,7 +19158,7 @@
                 <a:cs typeface="Calibri"/>
                 <a:sym typeface="Calibri"/>
               </a:rPr>
-              <a:t>BUSINESS VALUE  ·  DRIVER 1 OF 2</a:t>
+              <a:t>BUSINESS VALUE  ·  DRIVER 2 OF 2</a:t>
             </a:r>
             <a:endParaRPr b="0" i="0" sz="1400" u="none" cap="none" strike="noStrike">
               <a:solidFill>
@@ -19954,14 +19174,14 @@
       </p:sp>
       <p:sp>
         <p:nvSpPr>
-          <p:cNvPr id="316" name="Google Shape;316;p6"/>
+          <p:cNvPr id="298" name="Google Shape;298;p8"/>
           <p:cNvSpPr txBox="1"/>
           <p:nvPr/>
         </p:nvSpPr>
         <p:spPr>
           <a:xfrm>
             <a:off x="484632" y="548640"/>
-            <a:ext cx="10515600" cy="415498"/>
+            <a:ext cx="10515600" cy="384721"/>
           </a:xfrm>
           <a:prstGeom prst="rect">
             <a:avLst/>
@@ -19990,12 +19210,12 @@
               <a:buClr>
                 <a:srgbClr val="000000"/>
               </a:buClr>
-              <a:buSzPts val="2700"/>
+              <a:buSzPts val="2500"/>
               <a:buFont typeface="Arial"/>
               <a:buNone/>
             </a:pPr>
             <a:r>
-              <a:rPr b="1" i="0" lang="en-US" sz="2700" u="none" cap="none" strike="noStrike">
+              <a:rPr b="1" i="0" lang="en-US" sz="2500" u="none" cap="none" strike="noStrike">
                 <a:solidFill>
                   <a:srgbClr val="14304D"/>
                 </a:solidFill>
@@ -20004,7 +19224,7 @@
                 <a:cs typeface="Calibri"/>
                 <a:sym typeface="Calibri"/>
               </a:rPr>
-              <a:t>Delivery Reliability to safeguard Olist’s reputation</a:t>
+              <a:t>Informed strategy for board: Revenue Is Concentrated in the Southeast… </a:t>
             </a:r>
             <a:endParaRPr b="0" i="0" sz="1400" u="none" cap="none" strike="noStrike">
               <a:solidFill>
@@ -20020,7 +19240,7 @@
       </p:sp>
       <p:sp>
         <p:nvSpPr>
-          <p:cNvPr id="317" name="Google Shape;317;p6"/>
+          <p:cNvPr id="299" name="Google Shape;299;p8"/>
           <p:cNvSpPr/>
           <p:nvPr/>
         </p:nvSpPr>
@@ -20077,192 +19297,9 @@
           </a:p>
         </p:txBody>
       </p:sp>
-      <p:pic>
-        <p:nvPicPr>
-          <p:cNvPr descr="chart_delivery_reviews.png" id="318" name="Google Shape;318;p6"/>
-          <p:cNvPicPr preferRelativeResize="0"/>
-          <p:nvPr/>
-        </p:nvPicPr>
-        <p:blipFill rotWithShape="1">
-          <a:blip r:embed="rId3">
-            <a:alphaModFix/>
-          </a:blip>
-          <a:srcRect b="0" l="0" r="0" t="0"/>
-          <a:stretch/>
-        </p:blipFill>
-        <p:spPr>
-          <a:xfrm>
-            <a:off x="214686" y="1322251"/>
-            <a:ext cx="6263640" cy="2998361"/>
-          </a:xfrm>
-          <a:prstGeom prst="rect">
-            <a:avLst/>
-          </a:prstGeom>
-          <a:noFill/>
-          <a:ln>
-            <a:noFill/>
-          </a:ln>
-        </p:spPr>
-      </p:pic>
       <p:sp>
         <p:nvSpPr>
-          <p:cNvPr id="319" name="Google Shape;319;p6"/>
-          <p:cNvSpPr txBox="1"/>
-          <p:nvPr/>
-        </p:nvSpPr>
-        <p:spPr>
-          <a:xfrm>
-            <a:off x="502920" y="4334256"/>
-            <a:ext cx="6035040" cy="365760"/>
-          </a:xfrm>
-          <a:prstGeom prst="rect">
-            <a:avLst/>
-          </a:prstGeom>
-          <a:noFill/>
-          <a:ln>
-            <a:noFill/>
-          </a:ln>
-        </p:spPr>
-        <p:txBody>
-          <a:bodyPr anchorCtr="0" anchor="t" bIns="0" lIns="0" spcFirstLastPara="1" rIns="0" wrap="square" tIns="0">
-            <a:spAutoFit/>
-          </a:bodyPr>
-          <a:lstStyle/>
-          <a:p>
-            <a:pPr indent="0" lvl="0" marL="0" marR="0" rtl="0" algn="l">
-              <a:lnSpc>
-                <a:spcPct val="100000"/>
-              </a:lnSpc>
-              <a:spcBef>
-                <a:spcPts val="0"/>
-              </a:spcBef>
-              <a:spcAft>
-                <a:spcPts val="0"/>
-              </a:spcAft>
-              <a:buClr>
-                <a:srgbClr val="000000"/>
-              </a:buClr>
-              <a:buSzPts val="1300"/>
-              <a:buFont typeface="Arial"/>
-              <a:buNone/>
-            </a:pPr>
-            <a:r>
-              <a:rPr b="0" i="1" lang="en-US" sz="1300" u="none" cap="none" strike="noStrike">
-                <a:solidFill>
-                  <a:srgbClr val="5B6B7A"/>
-                </a:solidFill>
-                <a:latin typeface="Calibri"/>
-                <a:ea typeface="Calibri"/>
-                <a:cs typeface="Calibri"/>
-                <a:sym typeface="Calibri"/>
-              </a:rPr>
-              <a:t>Avg. review score &amp; dissatisfied-customer rate, by how late the delivery ran</a:t>
-            </a:r>
-            <a:endParaRPr b="0" i="0" sz="1400" u="none" cap="none" strike="noStrike">
-              <a:solidFill>
-                <a:srgbClr val="000000"/>
-              </a:solidFill>
-              <a:latin typeface="Arial"/>
-              <a:ea typeface="Arial"/>
-              <a:cs typeface="Arial"/>
-              <a:sym typeface="Arial"/>
-            </a:endParaRPr>
-          </a:p>
-        </p:txBody>
-      </p:sp>
-      <p:sp>
-        <p:nvSpPr>
-          <p:cNvPr id="320" name="Google Shape;320;p6"/>
-          <p:cNvSpPr txBox="1"/>
-          <p:nvPr/>
-        </p:nvSpPr>
-        <p:spPr>
-          <a:xfrm>
-            <a:off x="6975229" y="2250364"/>
-            <a:ext cx="4800600" cy="856773"/>
-          </a:xfrm>
-          <a:prstGeom prst="rect">
-            <a:avLst/>
-          </a:prstGeom>
-          <a:noFill/>
-          <a:ln>
-            <a:noFill/>
-          </a:ln>
-        </p:spPr>
-        <p:txBody>
-          <a:bodyPr anchorCtr="0" anchor="t" bIns="0" lIns="0" spcFirstLastPara="1" rIns="0" wrap="square" tIns="0">
-            <a:spAutoFit/>
-          </a:bodyPr>
-          <a:lstStyle/>
-          <a:p>
-            <a:pPr indent="0" lvl="0" marL="0" marR="0" rtl="0" algn="l">
-              <a:lnSpc>
-                <a:spcPct val="116000"/>
-              </a:lnSpc>
-              <a:spcBef>
-                <a:spcPts val="0"/>
-              </a:spcBef>
-              <a:spcAft>
-                <a:spcPts val="0"/>
-              </a:spcAft>
-              <a:buClr>
-                <a:srgbClr val="000000"/>
-              </a:buClr>
-              <a:buSzPts val="1600"/>
-              <a:buFont typeface="Arial"/>
-              <a:buNone/>
-            </a:pPr>
-            <a:r>
-              <a:rPr b="1" i="0" lang="en-US" sz="1600" u="none" cap="none" strike="noStrike">
-                <a:solidFill>
-                  <a:srgbClr val="E0793A"/>
-                </a:solidFill>
-                <a:latin typeface="Calibri"/>
-                <a:ea typeface="Calibri"/>
-                <a:cs typeface="Calibri"/>
-                <a:sym typeface="Calibri"/>
-              </a:rPr>
-              <a:t>›  </a:t>
-            </a:r>
-            <a:r>
-              <a:rPr b="1" i="0" lang="en-US" sz="1600" u="none" cap="none" strike="noStrike">
-                <a:solidFill>
-                  <a:srgbClr val="1B3A5C"/>
-                </a:solidFill>
-                <a:latin typeface="Calibri"/>
-                <a:ea typeface="Calibri"/>
-                <a:cs typeface="Calibri"/>
-                <a:sym typeface="Calibri"/>
-              </a:rPr>
-              <a:t>Reviews collapse fast. </a:t>
-            </a:r>
-            <a:r>
-              <a:rPr b="0" i="0" lang="en-US" sz="1600" u="none" cap="none" strike="noStrike">
-                <a:solidFill>
-                  <a:srgbClr val="222C37"/>
-                </a:solidFill>
-                <a:latin typeface="Calibri"/>
-                <a:ea typeface="Calibri"/>
-                <a:cs typeface="Calibri"/>
-                <a:sym typeface="Calibri"/>
-              </a:rPr>
-              <a:t>4–7 days late is enough to flip 68% of buyers into dissatisfied customers (1–2★); beyond ~8 days the score simply floors near 1.7 — no worse.</a:t>
-            </a:r>
-            <a:endParaRPr b="0" i="0" sz="1400" u="none" cap="none" strike="noStrike">
-              <a:solidFill>
-                <a:srgbClr val="000000"/>
-              </a:solidFill>
-              <a:latin typeface="Arial"/>
-              <a:ea typeface="Arial"/>
-              <a:cs typeface="Arial"/>
-              <a:sym typeface="Arial"/>
-            </a:endParaRPr>
-          </a:p>
-        </p:txBody>
-      </p:sp>
-      <p:sp>
-        <p:nvSpPr>
-          <p:cNvPr id="321" name="Google Shape;321;p6"/>
+          <p:cNvPr id="300" name="Google Shape;300;p8"/>
           <p:cNvSpPr txBox="1"/>
           <p:nvPr/>
         </p:nvSpPr>
@@ -20328,7 +19365,7 @@
       </p:sp>
       <p:sp>
         <p:nvSpPr>
-          <p:cNvPr id="322" name="Google Shape;322;p6"/>
+          <p:cNvPr id="301" name="Google Shape;301;p8"/>
           <p:cNvSpPr txBox="1"/>
           <p:nvPr/>
         </p:nvSpPr>
@@ -20378,7 +19415,7 @@
                 <a:cs typeface="Calibri"/>
                 <a:sym typeface="Calibri"/>
               </a:rPr>
-              <a:t>15</a:t>
+              <a:t>17</a:t>
             </a:r>
             <a:endParaRPr b="0" i="0" sz="1400" u="none" cap="none" strike="noStrike">
               <a:solidFill>
@@ -20394,849 +19431,7 @@
       </p:sp>
       <p:sp>
         <p:nvSpPr>
-          <p:cNvPr id="323" name="Google Shape;323;p6"/>
-          <p:cNvSpPr txBox="1"/>
-          <p:nvPr/>
-        </p:nvSpPr>
-        <p:spPr>
-          <a:xfrm>
-            <a:off x="779277" y="5008639"/>
-            <a:ext cx="11155680" cy="886397"/>
-          </a:xfrm>
-          <a:prstGeom prst="rect">
-            <a:avLst/>
-          </a:prstGeom>
-          <a:noFill/>
-          <a:ln>
-            <a:noFill/>
-          </a:ln>
-        </p:spPr>
-        <p:txBody>
-          <a:bodyPr anchorCtr="0" anchor="t" bIns="0" lIns="0" spcFirstLastPara="1" rIns="0" wrap="square" tIns="0">
-            <a:spAutoFit/>
-          </a:bodyPr>
-          <a:lstStyle/>
-          <a:p>
-            <a:pPr indent="0" lvl="0" marL="0" marR="0" rtl="0" algn="l">
-              <a:lnSpc>
-                <a:spcPct val="120000"/>
-              </a:lnSpc>
-              <a:spcBef>
-                <a:spcPts val="0"/>
-              </a:spcBef>
-              <a:spcAft>
-                <a:spcPts val="0"/>
-              </a:spcAft>
-              <a:buClr>
-                <a:srgbClr val="000000"/>
-              </a:buClr>
-              <a:buSzPts val="2400"/>
-              <a:buFont typeface="Arial"/>
-              <a:buNone/>
-            </a:pPr>
-            <a:r>
-              <a:rPr b="1" i="0" lang="en-US" sz="2400" u="none" cap="none" strike="noStrike">
-                <a:solidFill>
-                  <a:srgbClr val="14304D"/>
-                </a:solidFill>
-                <a:latin typeface="Calibri"/>
-                <a:ea typeface="Calibri"/>
-                <a:cs typeface="Calibri"/>
-                <a:sym typeface="Calibri"/>
-              </a:rPr>
-              <a:t>It is crucial to deliver items on-time, or at least within 3 days late, as this can have</a:t>
-            </a:r>
-            <a:br>
-              <a:rPr b="1" i="0" lang="en-US" sz="2400" u="none" cap="none" strike="noStrike">
-                <a:solidFill>
-                  <a:srgbClr val="14304D"/>
-                </a:solidFill>
-                <a:latin typeface="Calibri"/>
-                <a:ea typeface="Calibri"/>
-                <a:cs typeface="Calibri"/>
-                <a:sym typeface="Calibri"/>
-              </a:rPr>
-            </a:br>
-            <a:r>
-              <a:rPr b="1" i="0" lang="en-US" sz="2400" u="none" cap="none" strike="noStrike">
-                <a:solidFill>
-                  <a:srgbClr val="14304D"/>
-                </a:solidFill>
-                <a:latin typeface="Calibri"/>
-                <a:ea typeface="Calibri"/>
-                <a:cs typeface="Calibri"/>
-                <a:sym typeface="Calibri"/>
-              </a:rPr>
-              <a:t>a significant impact on review scores and hence the reputation of Olist.</a:t>
-            </a:r>
-            <a:endParaRPr b="1" i="0" sz="2400" u="none" cap="none" strike="noStrike">
-              <a:solidFill>
-                <a:srgbClr val="FF0000"/>
-              </a:solidFill>
-              <a:latin typeface="Arial"/>
-              <a:ea typeface="Arial"/>
-              <a:cs typeface="Arial"/>
-              <a:sym typeface="Arial"/>
-            </a:endParaRPr>
-          </a:p>
-        </p:txBody>
-      </p:sp>
-      <p:sp>
-        <p:nvSpPr>
-          <p:cNvPr id="324" name="Google Shape;324;p6"/>
-          <p:cNvSpPr/>
-          <p:nvPr/>
-        </p:nvSpPr>
-        <p:spPr>
-          <a:xfrm>
-            <a:off x="551157" y="5063829"/>
-            <a:ext cx="11383800" cy="886397"/>
-          </a:xfrm>
-          <a:prstGeom prst="rect">
-            <a:avLst/>
-          </a:prstGeom>
-          <a:noFill/>
-          <a:ln cap="flat" cmpd="sng" w="47625">
-            <a:solidFill>
-              <a:srgbClr val="21364F"/>
-            </a:solidFill>
-            <a:prstDash val="solid"/>
-            <a:round/>
-            <a:headEnd len="sm" w="sm" type="none"/>
-            <a:tailEnd len="sm" w="sm" type="none"/>
-          </a:ln>
-        </p:spPr>
-        <p:txBody>
-          <a:bodyPr anchorCtr="0" anchor="ctr" bIns="45700" lIns="91425" spcFirstLastPara="1" rIns="91425" wrap="square" tIns="45700">
-            <a:noAutofit/>
-          </a:bodyPr>
-          <a:lstStyle/>
-          <a:p>
-            <a:pPr indent="0" lvl="0" marL="0" marR="0" rtl="0" algn="ctr">
-              <a:lnSpc>
-                <a:spcPct val="100000"/>
-              </a:lnSpc>
-              <a:spcBef>
-                <a:spcPts val="0"/>
-              </a:spcBef>
-              <a:spcAft>
-                <a:spcPts val="0"/>
-              </a:spcAft>
-              <a:buClr>
-                <a:srgbClr val="000000"/>
-              </a:buClr>
-              <a:buSzPts val="1400"/>
-              <a:buFont typeface="Arial"/>
-              <a:buNone/>
-            </a:pPr>
-            <a:r>
-              <a:t/>
-            </a:r>
-            <a:endParaRPr b="0" i="0" sz="1400" u="none" cap="none" strike="noStrike">
-              <a:solidFill>
-                <a:schemeClr val="lt1"/>
-              </a:solidFill>
-              <a:latin typeface="Arial"/>
-              <a:ea typeface="Arial"/>
-              <a:cs typeface="Arial"/>
-              <a:sym typeface="Arial"/>
-            </a:endParaRPr>
-          </a:p>
-        </p:txBody>
-      </p:sp>
-    </p:spTree>
-  </p:cSld>
-  <p:clrMapOvr>
-    <a:masterClrMapping/>
-  </p:clrMapOvr>
-</p:sld>
-</file>
-
-<file path=ppt/slides/slide13.xml><?xml version="1.0" encoding="utf-8"?>
-<p:sld xmlns:a="http://schemas.openxmlformats.org/drawingml/2006/main" xmlns:r="http://schemas.openxmlformats.org/officeDocument/2006/relationships" xmlns:mc="http://schemas.openxmlformats.org/markup-compatibility/2006" xmlns:mv="urn:schemas-microsoft-com:mac:vml" xmlns:p="http://schemas.openxmlformats.org/presentationml/2006/main" xmlns:c="http://schemas.openxmlformats.org/drawingml/2006/chart" xmlns:dgm="http://schemas.openxmlformats.org/drawingml/2006/diagram" xmlns:o="urn:schemas-microsoft-com:office:office" xmlns:v="urn:schemas-microsoft-com:vml" xmlns:pvml="urn:schemas-microsoft-com:office:powerpoint" xmlns:com="http://schemas.openxmlformats.org/drawingml/2006/compatibility" xmlns:p14="http://schemas.microsoft.com/office/powerpoint/2010/main" xmlns:p15="http://schemas.microsoft.com/office/powerpoint/2012/main" xmlns:ahyp="http://schemas.microsoft.com/office/drawing/2018/hyperlinkcolor">
-  <p:cSld>
-    <p:bg>
-      <p:bgPr>
-        <a:solidFill>
-          <a:srgbClr val="F7F8FA"/>
-        </a:solidFill>
-      </p:bgPr>
-    </p:bg>
-    <p:spTree>
-      <p:nvGrpSpPr>
-        <p:cNvPr id="328" name="Shape 328"/>
-        <p:cNvGrpSpPr/>
-        <p:nvPr/>
-      </p:nvGrpSpPr>
-      <p:grpSpPr>
-        <a:xfrm>
-          <a:off x="0" y="0"/>
-          <a:ext cx="0" cy="0"/>
-          <a:chOff x="0" y="0"/>
-          <a:chExt cx="0" cy="0"/>
-        </a:xfrm>
-      </p:grpSpPr>
-      <p:sp>
-        <p:nvSpPr>
-          <p:cNvPr id="329" name="Google Shape;329;p8"/>
-          <p:cNvSpPr txBox="1"/>
-          <p:nvPr/>
-        </p:nvSpPr>
-        <p:spPr>
-          <a:xfrm>
-            <a:off x="502920" y="292608"/>
-            <a:ext cx="8229600" cy="200055"/>
-          </a:xfrm>
-          <a:prstGeom prst="rect">
-            <a:avLst/>
-          </a:prstGeom>
-          <a:noFill/>
-          <a:ln>
-            <a:noFill/>
-          </a:ln>
-        </p:spPr>
-        <p:txBody>
-          <a:bodyPr anchorCtr="0" anchor="t" bIns="0" lIns="0" spcFirstLastPara="1" rIns="0" wrap="square" tIns="0">
-            <a:spAutoFit/>
-          </a:bodyPr>
-          <a:lstStyle/>
-          <a:p>
-            <a:pPr indent="0" lvl="0" marL="0" marR="0" rtl="0" algn="l">
-              <a:lnSpc>
-                <a:spcPct val="100000"/>
-              </a:lnSpc>
-              <a:spcBef>
-                <a:spcPts val="0"/>
-              </a:spcBef>
-              <a:spcAft>
-                <a:spcPts val="0"/>
-              </a:spcAft>
-              <a:buClr>
-                <a:srgbClr val="000000"/>
-              </a:buClr>
-              <a:buSzPts val="1300"/>
-              <a:buFont typeface="Arial"/>
-              <a:buNone/>
-            </a:pPr>
-            <a:r>
-              <a:rPr b="1" i="0" lang="en-US" sz="1300" u="none" cap="none" strike="noStrike">
-                <a:solidFill>
-                  <a:srgbClr val="E0793A"/>
-                </a:solidFill>
-                <a:latin typeface="Calibri"/>
-                <a:ea typeface="Calibri"/>
-                <a:cs typeface="Calibri"/>
-                <a:sym typeface="Calibri"/>
-              </a:rPr>
-              <a:t>BUSINESS VALUE  ·  DRIVER 2 OF 2</a:t>
-            </a:r>
-            <a:endParaRPr b="0" i="0" sz="1400" u="none" cap="none" strike="noStrike">
-              <a:solidFill>
-                <a:srgbClr val="000000"/>
-              </a:solidFill>
-              <a:latin typeface="Arial"/>
-              <a:ea typeface="Arial"/>
-              <a:cs typeface="Arial"/>
-              <a:sym typeface="Arial"/>
-            </a:endParaRPr>
-          </a:p>
-        </p:txBody>
-      </p:sp>
-      <p:sp>
-        <p:nvSpPr>
-          <p:cNvPr id="330" name="Google Shape;330;p8"/>
-          <p:cNvSpPr txBox="1"/>
-          <p:nvPr/>
-        </p:nvSpPr>
-        <p:spPr>
-          <a:xfrm>
-            <a:off x="484632" y="548640"/>
-            <a:ext cx="10515600" cy="384721"/>
-          </a:xfrm>
-          <a:prstGeom prst="rect">
-            <a:avLst/>
-          </a:prstGeom>
-          <a:noFill/>
-          <a:ln>
-            <a:noFill/>
-          </a:ln>
-        </p:spPr>
-        <p:txBody>
-          <a:bodyPr anchorCtr="0" anchor="t" bIns="0" lIns="0" spcFirstLastPara="1" rIns="0" wrap="square" tIns="0">
-            <a:spAutoFit/>
-          </a:bodyPr>
-          <a:lstStyle/>
-          <a:p>
-            <a:pPr indent="0" lvl="0" marL="0" marR="0" rtl="0" algn="l">
-              <a:lnSpc>
-                <a:spcPct val="100000"/>
-              </a:lnSpc>
-              <a:spcBef>
-                <a:spcPts val="0"/>
-              </a:spcBef>
-              <a:spcAft>
-                <a:spcPts val="0"/>
-              </a:spcAft>
-              <a:buClr>
-                <a:srgbClr val="000000"/>
-              </a:buClr>
-              <a:buSzPts val="2500"/>
-              <a:buFont typeface="Arial"/>
-              <a:buNone/>
-            </a:pPr>
-            <a:r>
-              <a:rPr b="1" i="0" lang="en-US" sz="2500" u="none" cap="none" strike="noStrike">
-                <a:solidFill>
-                  <a:srgbClr val="14304D"/>
-                </a:solidFill>
-                <a:latin typeface="Calibri"/>
-                <a:ea typeface="Calibri"/>
-                <a:cs typeface="Calibri"/>
-                <a:sym typeface="Calibri"/>
-              </a:rPr>
-              <a:t>Informed strategy for board: Revenue Is Concentrated in the Southeast… </a:t>
-            </a:r>
-            <a:endParaRPr b="0" i="0" sz="1400" u="none" cap="none" strike="noStrike">
-              <a:solidFill>
-                <a:srgbClr val="000000"/>
-              </a:solidFill>
-              <a:latin typeface="Arial"/>
-              <a:ea typeface="Arial"/>
-              <a:cs typeface="Arial"/>
-              <a:sym typeface="Arial"/>
-            </a:endParaRPr>
-          </a:p>
-        </p:txBody>
-      </p:sp>
-      <p:sp>
-        <p:nvSpPr>
-          <p:cNvPr id="331" name="Google Shape;331;p8"/>
-          <p:cNvSpPr/>
-          <p:nvPr/>
-        </p:nvSpPr>
-        <p:spPr>
-          <a:xfrm>
-            <a:off x="502920" y="1207008"/>
-            <a:ext cx="960120" cy="50800"/>
-          </a:xfrm>
-          <a:prstGeom prst="rect">
-            <a:avLst/>
-          </a:prstGeom>
-          <a:solidFill>
-            <a:srgbClr val="E0793A"/>
-          </a:solidFill>
-          <a:ln>
-            <a:noFill/>
-          </a:ln>
-        </p:spPr>
-        <p:txBody>
-          <a:bodyPr anchorCtr="0" anchor="ctr" bIns="45700" lIns="91425" spcFirstLastPara="1" rIns="91425" wrap="square" tIns="45700">
-            <a:noAutofit/>
-          </a:bodyPr>
-          <a:lstStyle/>
-          <a:p>
-            <a:pPr indent="0" lvl="0" marL="0" marR="0" rtl="0" algn="ctr">
-              <a:lnSpc>
-                <a:spcPct val="100000"/>
-              </a:lnSpc>
-              <a:spcBef>
-                <a:spcPts val="0"/>
-              </a:spcBef>
-              <a:spcAft>
-                <a:spcPts val="0"/>
-              </a:spcAft>
-              <a:buClr>
-                <a:srgbClr val="000000"/>
-              </a:buClr>
-              <a:buSzPts val="1800"/>
-              <a:buFont typeface="Arial"/>
-              <a:buNone/>
-            </a:pPr>
-            <a:r>
-              <a:t/>
-            </a:r>
-            <a:endParaRPr b="0" i="0" sz="1800" u="none" cap="none" strike="noStrike">
-              <a:solidFill>
-                <a:schemeClr val="dk1"/>
-              </a:solidFill>
-              <a:latin typeface="Calibri"/>
-              <a:ea typeface="Calibri"/>
-              <a:cs typeface="Calibri"/>
-              <a:sym typeface="Calibri"/>
-            </a:endParaRPr>
-          </a:p>
-        </p:txBody>
-      </p:sp>
-      <p:pic>
-        <p:nvPicPr>
-          <p:cNvPr descr="chart_geo_concentration.png" id="332" name="Google Shape;332;p8"/>
-          <p:cNvPicPr preferRelativeResize="0"/>
-          <p:nvPr/>
-        </p:nvPicPr>
-        <p:blipFill rotWithShape="1">
-          <a:blip r:embed="rId3">
-            <a:alphaModFix/>
-          </a:blip>
-          <a:srcRect b="0" l="0" r="0" t="0"/>
-          <a:stretch/>
-        </p:blipFill>
-        <p:spPr>
-          <a:xfrm>
-            <a:off x="280946" y="1617809"/>
-            <a:ext cx="6263640" cy="2998361"/>
-          </a:xfrm>
-          <a:prstGeom prst="rect">
-            <a:avLst/>
-          </a:prstGeom>
-          <a:noFill/>
-          <a:ln>
-            <a:noFill/>
-          </a:ln>
-        </p:spPr>
-      </p:pic>
-      <p:sp>
-        <p:nvSpPr>
-          <p:cNvPr id="333" name="Google Shape;333;p8"/>
-          <p:cNvSpPr txBox="1"/>
-          <p:nvPr/>
-        </p:nvSpPr>
-        <p:spPr>
-          <a:xfrm>
-            <a:off x="1119146" y="4616171"/>
-            <a:ext cx="6035040" cy="365760"/>
-          </a:xfrm>
-          <a:prstGeom prst="rect">
-            <a:avLst/>
-          </a:prstGeom>
-          <a:noFill/>
-          <a:ln>
-            <a:noFill/>
-          </a:ln>
-        </p:spPr>
-        <p:txBody>
-          <a:bodyPr anchorCtr="0" anchor="t" bIns="0" lIns="0" spcFirstLastPara="1" rIns="0" wrap="square" tIns="0">
-            <a:spAutoFit/>
-          </a:bodyPr>
-          <a:lstStyle/>
-          <a:p>
-            <a:pPr indent="0" lvl="0" marL="0" marR="0" rtl="0" algn="l">
-              <a:lnSpc>
-                <a:spcPct val="100000"/>
-              </a:lnSpc>
-              <a:spcBef>
-                <a:spcPts val="0"/>
-              </a:spcBef>
-              <a:spcAft>
-                <a:spcPts val="0"/>
-              </a:spcAft>
-              <a:buClr>
-                <a:srgbClr val="000000"/>
-              </a:buClr>
-              <a:buSzPts val="1300"/>
-              <a:buFont typeface="Arial"/>
-              <a:buNone/>
-            </a:pPr>
-            <a:r>
-              <a:rPr b="0" i="1" lang="en-US" sz="1300" u="none" cap="none" strike="noStrike">
-                <a:solidFill>
-                  <a:srgbClr val="5B6B7A"/>
-                </a:solidFill>
-                <a:latin typeface="Calibri"/>
-                <a:ea typeface="Calibri"/>
-                <a:cs typeface="Calibri"/>
-                <a:sym typeface="Calibri"/>
-              </a:rPr>
-              <a:t>% of total revenue and cumulative share, top 7 states</a:t>
-            </a:r>
-            <a:endParaRPr b="0" i="0" sz="1400" u="none" cap="none" strike="noStrike">
-              <a:solidFill>
-                <a:srgbClr val="000000"/>
-              </a:solidFill>
-              <a:latin typeface="Arial"/>
-              <a:ea typeface="Arial"/>
-              <a:cs typeface="Arial"/>
-              <a:sym typeface="Arial"/>
-            </a:endParaRPr>
-          </a:p>
-        </p:txBody>
-      </p:sp>
-      <p:sp>
-        <p:nvSpPr>
-          <p:cNvPr id="334" name="Google Shape;334;p8"/>
-          <p:cNvSpPr txBox="1"/>
-          <p:nvPr/>
-        </p:nvSpPr>
-        <p:spPr>
-          <a:xfrm>
-            <a:off x="6858000" y="1482377"/>
-            <a:ext cx="4800600" cy="2929392"/>
-          </a:xfrm>
-          <a:prstGeom prst="rect">
-            <a:avLst/>
-          </a:prstGeom>
-          <a:noFill/>
-          <a:ln>
-            <a:noFill/>
-          </a:ln>
-        </p:spPr>
-        <p:txBody>
-          <a:bodyPr anchorCtr="0" anchor="t" bIns="0" lIns="0" spcFirstLastPara="1" rIns="0" wrap="square" tIns="0">
-            <a:spAutoFit/>
-          </a:bodyPr>
-          <a:lstStyle/>
-          <a:p>
-            <a:pPr indent="0" lvl="0" marL="0" marR="0" rtl="0" algn="l">
-              <a:lnSpc>
-                <a:spcPct val="116000"/>
-              </a:lnSpc>
-              <a:spcBef>
-                <a:spcPts val="0"/>
-              </a:spcBef>
-              <a:spcAft>
-                <a:spcPts val="0"/>
-              </a:spcAft>
-              <a:buClr>
-                <a:srgbClr val="000000"/>
-              </a:buClr>
-              <a:buSzPts val="1600"/>
-              <a:buFont typeface="Arial"/>
-              <a:buNone/>
-            </a:pPr>
-            <a:r>
-              <a:rPr b="1" i="0" lang="en-US" sz="1600" u="none" cap="none" strike="noStrike">
-                <a:solidFill>
-                  <a:srgbClr val="E0793A"/>
-                </a:solidFill>
-                <a:latin typeface="Calibri"/>
-                <a:ea typeface="Calibri"/>
-                <a:cs typeface="Calibri"/>
-                <a:sym typeface="Calibri"/>
-              </a:rPr>
-              <a:t>›  </a:t>
-            </a:r>
-            <a:r>
-              <a:rPr b="1" i="0" lang="en-US" sz="1600" u="none" cap="none" strike="noStrike">
-                <a:solidFill>
-                  <a:srgbClr val="1B3A5C"/>
-                </a:solidFill>
-                <a:latin typeface="Calibri"/>
-                <a:ea typeface="Calibri"/>
-                <a:cs typeface="Calibri"/>
-                <a:sym typeface="Calibri"/>
-              </a:rPr>
-              <a:t>Three states, most of the revenue. </a:t>
-            </a:r>
-            <a:r>
-              <a:rPr b="0" i="0" lang="en-US" sz="1600" u="none" cap="none" strike="noStrike">
-                <a:solidFill>
-                  <a:srgbClr val="222C37"/>
-                </a:solidFill>
-                <a:latin typeface="Calibri"/>
-                <a:ea typeface="Calibri"/>
-                <a:cs typeface="Calibri"/>
-                <a:sym typeface="Calibri"/>
-              </a:rPr>
-              <a:t>São Paulo alone is 38%; SP + RJ + MG together are 63%; the top 7 states reach 82%. All three states are in the </a:t>
-            </a:r>
-            <a:r>
-              <a:rPr b="1" i="0" lang="en-US" sz="1600" u="sng" cap="none" strike="noStrike">
-                <a:solidFill>
-                  <a:srgbClr val="222C37"/>
-                </a:solidFill>
-                <a:latin typeface="Calibri"/>
-                <a:ea typeface="Calibri"/>
-                <a:cs typeface="Calibri"/>
-                <a:sym typeface="Calibri"/>
-              </a:rPr>
-              <a:t>Southeast region</a:t>
-            </a:r>
-            <a:r>
-              <a:rPr b="0" i="0" lang="en-US" sz="1600" u="none" cap="none" strike="noStrike">
-                <a:solidFill>
-                  <a:srgbClr val="222C37"/>
-                </a:solidFill>
-                <a:latin typeface="Calibri"/>
-                <a:ea typeface="Calibri"/>
-                <a:cs typeface="Calibri"/>
-                <a:sym typeface="Calibri"/>
-              </a:rPr>
-              <a:t>.</a:t>
-            </a:r>
-            <a:endParaRPr b="0" i="0" sz="1400" u="none" cap="none" strike="noStrike">
-              <a:solidFill>
-                <a:srgbClr val="000000"/>
-              </a:solidFill>
-              <a:latin typeface="Arial"/>
-              <a:ea typeface="Arial"/>
-              <a:cs typeface="Arial"/>
-              <a:sym typeface="Arial"/>
-            </a:endParaRPr>
-          </a:p>
-          <a:p>
-            <a:pPr indent="0" lvl="0" marL="0" marR="0" rtl="0" algn="l">
-              <a:lnSpc>
-                <a:spcPct val="116000"/>
-              </a:lnSpc>
-              <a:spcBef>
-                <a:spcPts val="1400"/>
-              </a:spcBef>
-              <a:spcAft>
-                <a:spcPts val="0"/>
-              </a:spcAft>
-              <a:buClr>
-                <a:srgbClr val="000000"/>
-              </a:buClr>
-              <a:buSzPts val="1600"/>
-              <a:buFont typeface="Arial"/>
-              <a:buNone/>
-            </a:pPr>
-            <a:r>
-              <a:rPr b="1" i="0" lang="en-US" sz="1600" u="none" cap="none" strike="noStrike">
-                <a:solidFill>
-                  <a:srgbClr val="E0793A"/>
-                </a:solidFill>
-                <a:latin typeface="Calibri"/>
-                <a:ea typeface="Calibri"/>
-                <a:cs typeface="Calibri"/>
-                <a:sym typeface="Calibri"/>
-              </a:rPr>
-              <a:t>›  </a:t>
-            </a:r>
-            <a:r>
-              <a:rPr b="1" i="0" lang="en-US" sz="1600" u="none" cap="none" strike="noStrike">
-                <a:solidFill>
-                  <a:srgbClr val="1B3A5C"/>
-                </a:solidFill>
-                <a:latin typeface="Calibri"/>
-                <a:ea typeface="Calibri"/>
-                <a:cs typeface="Calibri"/>
-                <a:sym typeface="Calibri"/>
-              </a:rPr>
-              <a:t>The long tail is real but thin. </a:t>
-            </a:r>
-            <a:r>
-              <a:rPr b="0" i="0" lang="en-US" sz="1600" u="none" cap="none" strike="noStrike">
-                <a:solidFill>
-                  <a:srgbClr val="222C37"/>
-                </a:solidFill>
-                <a:latin typeface="Calibri"/>
-                <a:ea typeface="Calibri"/>
-                <a:cs typeface="Calibri"/>
-                <a:sym typeface="Calibri"/>
-              </a:rPr>
-              <a:t>~4,200 smaller cities share the remaining ~39%; 2,905 of them have ≤5 orders each — only ~7% of revenue combined.</a:t>
-            </a:r>
-            <a:endParaRPr b="0" i="0" sz="1400" u="none" cap="none" strike="noStrike">
-              <a:solidFill>
-                <a:srgbClr val="000000"/>
-              </a:solidFill>
-              <a:latin typeface="Arial"/>
-              <a:ea typeface="Arial"/>
-              <a:cs typeface="Arial"/>
-              <a:sym typeface="Arial"/>
-            </a:endParaRPr>
-          </a:p>
-          <a:p>
-            <a:pPr indent="0" lvl="0" marL="0" marR="0" rtl="0" algn="l">
-              <a:lnSpc>
-                <a:spcPct val="116000"/>
-              </a:lnSpc>
-              <a:spcBef>
-                <a:spcPts val="1400"/>
-              </a:spcBef>
-              <a:spcAft>
-                <a:spcPts val="0"/>
-              </a:spcAft>
-              <a:buClr>
-                <a:srgbClr val="000000"/>
-              </a:buClr>
-              <a:buSzPts val="1600"/>
-              <a:buFont typeface="Arial"/>
-              <a:buNone/>
-            </a:pPr>
-            <a:r>
-              <a:rPr b="1" i="0" lang="en-US" sz="1600" u="none" cap="none" strike="noStrike">
-                <a:solidFill>
-                  <a:srgbClr val="E0793A"/>
-                </a:solidFill>
-                <a:latin typeface="Calibri"/>
-                <a:ea typeface="Calibri"/>
-                <a:cs typeface="Calibri"/>
-                <a:sym typeface="Calibri"/>
-              </a:rPr>
-              <a:t>›  </a:t>
-            </a:r>
-            <a:r>
-              <a:rPr b="1" i="0" lang="en-US" sz="1600" u="none" cap="none" strike="noStrike">
-                <a:solidFill>
-                  <a:srgbClr val="1B3A5C"/>
-                </a:solidFill>
-                <a:latin typeface="Calibri"/>
-                <a:ea typeface="Calibri"/>
-                <a:cs typeface="Calibri"/>
-                <a:sym typeface="Calibri"/>
-              </a:rPr>
-              <a:t>Distance changes behaviour, not loyalty. </a:t>
-            </a:r>
-            <a:r>
-              <a:rPr b="0" i="0" lang="en-US" sz="1600" u="none" cap="none" strike="noStrike">
-                <a:solidFill>
-                  <a:srgbClr val="222C37"/>
-                </a:solidFill>
-                <a:latin typeface="Calibri"/>
-                <a:ea typeface="Calibri"/>
-                <a:cs typeface="Calibri"/>
-                <a:sym typeface="Calibri"/>
-              </a:rPr>
-              <a:t>Northeast customers (CE, PE, BA) order less often but bigger — avg. order value R$150–171 vs R$126 in SP.</a:t>
-            </a:r>
-            <a:endParaRPr b="0" i="0" sz="1400" u="none" cap="none" strike="noStrike">
-              <a:solidFill>
-                <a:srgbClr val="000000"/>
-              </a:solidFill>
-              <a:latin typeface="Arial"/>
-              <a:ea typeface="Arial"/>
-              <a:cs typeface="Arial"/>
-              <a:sym typeface="Arial"/>
-            </a:endParaRPr>
-          </a:p>
-        </p:txBody>
-      </p:sp>
-      <p:sp>
-        <p:nvSpPr>
-          <p:cNvPr id="335" name="Google Shape;335;p8"/>
-          <p:cNvSpPr txBox="1"/>
-          <p:nvPr/>
-        </p:nvSpPr>
-        <p:spPr>
-          <a:xfrm>
-            <a:off x="502920" y="6519672"/>
-            <a:ext cx="8686800" cy="274320"/>
-          </a:xfrm>
-          <a:prstGeom prst="rect">
-            <a:avLst/>
-          </a:prstGeom>
-          <a:noFill/>
-          <a:ln>
-            <a:noFill/>
-          </a:ln>
-        </p:spPr>
-        <p:txBody>
-          <a:bodyPr anchorCtr="0" anchor="t" bIns="0" lIns="0" spcFirstLastPara="1" rIns="0" wrap="square" tIns="0">
-            <a:spAutoFit/>
-          </a:bodyPr>
-          <a:lstStyle/>
-          <a:p>
-            <a:pPr indent="0" lvl="0" marL="0" marR="0" rtl="0" algn="l">
-              <a:lnSpc>
-                <a:spcPct val="100000"/>
-              </a:lnSpc>
-              <a:spcBef>
-                <a:spcPts val="0"/>
-              </a:spcBef>
-              <a:spcAft>
-                <a:spcPts val="0"/>
-              </a:spcAft>
-              <a:buClr>
-                <a:srgbClr val="000000"/>
-              </a:buClr>
-              <a:buSzPts val="1050"/>
-              <a:buFont typeface="Arial"/>
-              <a:buNone/>
-            </a:pPr>
-            <a:r>
-              <a:rPr b="0" i="0" lang="en-US" sz="1050" u="none" cap="none" strike="noStrike">
-                <a:solidFill>
-                  <a:srgbClr val="5B6B7A"/>
-                </a:solidFill>
-                <a:latin typeface="Calibri"/>
-                <a:ea typeface="Calibri"/>
-                <a:cs typeface="Calibri"/>
-                <a:sym typeface="Calibri"/>
-              </a:rPr>
-              <a:t>Olist marketplace analysis  ·  olist_marts (BigQuery)  ·  99,441 orders, Sep 2016 – Oct 2018</a:t>
-            </a:r>
-            <a:endParaRPr b="0" i="0" sz="1400" u="none" cap="none" strike="noStrike">
-              <a:solidFill>
-                <a:srgbClr val="000000"/>
-              </a:solidFill>
-              <a:latin typeface="Arial"/>
-              <a:ea typeface="Arial"/>
-              <a:cs typeface="Arial"/>
-              <a:sym typeface="Arial"/>
-            </a:endParaRPr>
-          </a:p>
-        </p:txBody>
-      </p:sp>
-      <p:sp>
-        <p:nvSpPr>
-          <p:cNvPr id="336" name="Google Shape;336;p8"/>
-          <p:cNvSpPr txBox="1"/>
-          <p:nvPr/>
-        </p:nvSpPr>
-        <p:spPr>
-          <a:xfrm>
-            <a:off x="11475720" y="6519672"/>
-            <a:ext cx="365760" cy="274320"/>
-          </a:xfrm>
-          <a:prstGeom prst="rect">
-            <a:avLst/>
-          </a:prstGeom>
-          <a:noFill/>
-          <a:ln>
-            <a:noFill/>
-          </a:ln>
-        </p:spPr>
-        <p:txBody>
-          <a:bodyPr anchorCtr="0" anchor="t" bIns="0" lIns="0" spcFirstLastPara="1" rIns="0" wrap="square" tIns="0">
-            <a:spAutoFit/>
-          </a:bodyPr>
-          <a:lstStyle/>
-          <a:p>
-            <a:pPr indent="0" lvl="0" marL="0" marR="0" rtl="0" algn="r">
-              <a:lnSpc>
-                <a:spcPct val="100000"/>
-              </a:lnSpc>
-              <a:spcBef>
-                <a:spcPts val="0"/>
-              </a:spcBef>
-              <a:spcAft>
-                <a:spcPts val="0"/>
-              </a:spcAft>
-              <a:buClr>
-                <a:srgbClr val="000000"/>
-              </a:buClr>
-              <a:buSzPts val="1050"/>
-              <a:buFont typeface="Arial"/>
-              <a:buNone/>
-            </a:pPr>
-            <a:r>
-              <a:rPr b="0" i="0" lang="en-US" sz="1050" u="none" cap="none" strike="noStrike">
-                <a:solidFill>
-                  <a:srgbClr val="5B6B7A"/>
-                </a:solidFill>
-                <a:latin typeface="Calibri"/>
-                <a:ea typeface="Calibri"/>
-                <a:cs typeface="Calibri"/>
-                <a:sym typeface="Calibri"/>
-              </a:rPr>
-              <a:t>17</a:t>
-            </a:r>
-            <a:endParaRPr b="0" i="0" sz="1400" u="none" cap="none" strike="noStrike">
-              <a:solidFill>
-                <a:srgbClr val="000000"/>
-              </a:solidFill>
-              <a:latin typeface="Arial"/>
-              <a:ea typeface="Arial"/>
-              <a:cs typeface="Arial"/>
-              <a:sym typeface="Arial"/>
-            </a:endParaRPr>
-          </a:p>
-        </p:txBody>
-      </p:sp>
-      <p:sp>
-        <p:nvSpPr>
-          <p:cNvPr id="337" name="Google Shape;337;p8"/>
+          <p:cNvPr id="302" name="Google Shape;302;p8"/>
           <p:cNvSpPr txBox="1"/>
           <p:nvPr/>
         </p:nvSpPr>
@@ -21302,7 +19497,7 @@
       </p:sp>
       <p:sp>
         <p:nvSpPr>
-          <p:cNvPr id="338" name="Google Shape;338;p8"/>
+          <p:cNvPr id="303" name="Google Shape;303;p8"/>
           <p:cNvSpPr/>
           <p:nvPr/>
         </p:nvSpPr>
@@ -21363,6 +19558,1308 @@
           </a:p>
         </p:txBody>
       </p:sp>
+      <p:pic>
+        <p:nvPicPr>
+          <p:cNvPr descr="chart_a_top20_cities.png" id="304" name="Google Shape;304;p8"/>
+          <p:cNvPicPr preferRelativeResize="0"/>
+          <p:nvPr/>
+        </p:nvPicPr>
+        <p:blipFill rotWithShape="1">
+          <a:blip r:embed="rId3">
+            <a:alphaModFix/>
+          </a:blip>
+          <a:srcRect b="0" l="0" r="0" t="0"/>
+          <a:stretch/>
+        </p:blipFill>
+        <p:spPr>
+          <a:xfrm>
+            <a:off x="502920" y="1325880"/>
+            <a:ext cx="5653735" cy="2950768"/>
+          </a:xfrm>
+          <a:prstGeom prst="rect">
+            <a:avLst/>
+          </a:prstGeom>
+          <a:noFill/>
+          <a:ln>
+            <a:noFill/>
+          </a:ln>
+        </p:spPr>
+      </p:pic>
+      <p:pic>
+        <p:nvPicPr>
+          <p:cNvPr descr="chart_b_orders_vs_aov.png" id="305" name="Google Shape;305;p8"/>
+          <p:cNvPicPr preferRelativeResize="0"/>
+          <p:nvPr/>
+        </p:nvPicPr>
+        <p:blipFill rotWithShape="1">
+          <a:blip r:embed="rId4">
+            <a:alphaModFix/>
+          </a:blip>
+          <a:srcRect b="0" l="0" r="0" t="0"/>
+          <a:stretch/>
+        </p:blipFill>
+        <p:spPr>
+          <a:xfrm>
+            <a:off x="6385255" y="1325880"/>
+            <a:ext cx="5306263" cy="2950768"/>
+          </a:xfrm>
+          <a:prstGeom prst="rect">
+            <a:avLst/>
+          </a:prstGeom>
+          <a:noFill/>
+          <a:ln>
+            <a:noFill/>
+          </a:ln>
+        </p:spPr>
+      </p:pic>
+      <p:sp>
+        <p:nvSpPr>
+          <p:cNvPr id="306" name="Google Shape;306;p8"/>
+          <p:cNvSpPr txBox="1"/>
+          <p:nvPr/>
+        </p:nvSpPr>
+        <p:spPr>
+          <a:xfrm>
+            <a:off x="502920" y="4315968"/>
+            <a:ext cx="11155680" cy="292608"/>
+          </a:xfrm>
+          <a:prstGeom prst="rect">
+            <a:avLst/>
+          </a:prstGeom>
+          <a:noFill/>
+          <a:ln>
+            <a:noFill/>
+          </a:ln>
+        </p:spPr>
+        <p:txBody>
+          <a:bodyPr anchorCtr="0" anchor="t" bIns="45700" lIns="91425" spcFirstLastPara="1" rIns="91425" wrap="square" tIns="45700">
+            <a:spAutoFit/>
+          </a:bodyPr>
+          <a:lstStyle/>
+          <a:p>
+            <a:pPr indent="0" lvl="0" marL="0" marR="0" rtl="0" algn="l">
+              <a:lnSpc>
+                <a:spcPct val="100000"/>
+              </a:lnSpc>
+              <a:spcBef>
+                <a:spcPts val="0"/>
+              </a:spcBef>
+              <a:spcAft>
+                <a:spcPts val="0"/>
+              </a:spcAft>
+              <a:buClr>
+                <a:srgbClr val="000000"/>
+              </a:buClr>
+              <a:buSzPts val="1100"/>
+              <a:buFont typeface="Arial"/>
+              <a:buNone/>
+            </a:pPr>
+            <a:r>
+              <a:rPr b="0" i="1" lang="en-US" sz="1100" u="none" cap="none" strike="noStrike">
+                <a:solidFill>
+                  <a:srgbClr val="5B6B7A"/>
+                </a:solidFill>
+                <a:latin typeface="Calibri"/>
+                <a:ea typeface="Calibri"/>
+                <a:cs typeface="Calibri"/>
+                <a:sym typeface="Calibri"/>
+              </a:rPr>
+              <a:t>Note: geography above is the customer's (delivery) location, not the seller's — Olist sellers ship nationally regardless of where the customer is.</a:t>
+            </a:r>
+            <a:endParaRPr b="0" i="0" sz="1400" u="none" cap="none" strike="noStrike">
+              <a:solidFill>
+                <a:srgbClr val="000000"/>
+              </a:solidFill>
+              <a:latin typeface="Arial"/>
+              <a:ea typeface="Arial"/>
+              <a:cs typeface="Arial"/>
+              <a:sym typeface="Arial"/>
+            </a:endParaRPr>
+          </a:p>
+        </p:txBody>
+      </p:sp>
+    </p:spTree>
+  </p:cSld>
+  <p:clrMapOvr>
+    <a:masterClrMapping/>
+  </p:clrMapOvr>
+</p:sld>
+</file>
+
+<file path=ppt/slides/slide13.xml><?xml version="1.0" encoding="utf-8"?>
+<p:sld xmlns:a="http://schemas.openxmlformats.org/drawingml/2006/main" xmlns:r="http://schemas.openxmlformats.org/officeDocument/2006/relationships" xmlns:mc="http://schemas.openxmlformats.org/markup-compatibility/2006" xmlns:mv="urn:schemas-microsoft-com:mac:vml" xmlns:p="http://schemas.openxmlformats.org/presentationml/2006/main" xmlns:c="http://schemas.openxmlformats.org/drawingml/2006/chart" xmlns:dgm="http://schemas.openxmlformats.org/drawingml/2006/diagram" xmlns:o="urn:schemas-microsoft-com:office:office" xmlns:v="urn:schemas-microsoft-com:vml" xmlns:pvml="urn:schemas-microsoft-com:office:powerpoint" xmlns:com="http://schemas.openxmlformats.org/drawingml/2006/compatibility" xmlns:p14="http://schemas.microsoft.com/office/powerpoint/2010/main" xmlns:p15="http://schemas.microsoft.com/office/powerpoint/2012/main" xmlns:ahyp="http://schemas.microsoft.com/office/drawing/2018/hyperlinkcolor">
+  <p:cSld>
+    <p:spTree>
+      <p:nvGrpSpPr>
+        <p:cNvPr id="310" name="Shape 310"/>
+        <p:cNvGrpSpPr/>
+        <p:nvPr/>
+      </p:nvGrpSpPr>
+      <p:grpSpPr>
+        <a:xfrm>
+          <a:off x="0" y="0"/>
+          <a:ext cx="0" cy="0"/>
+          <a:chOff x="0" y="0"/>
+          <a:chExt cx="0" cy="0"/>
+        </a:xfrm>
+      </p:grpSpPr>
+      <p:sp>
+        <p:nvSpPr>
+          <p:cNvPr id="311" name="Google Shape;311;p3"/>
+          <p:cNvSpPr txBox="1"/>
+          <p:nvPr/>
+        </p:nvSpPr>
+        <p:spPr>
+          <a:xfrm>
+            <a:off x="502920" y="292608"/>
+            <a:ext cx="8229600" cy="200055"/>
+          </a:xfrm>
+          <a:prstGeom prst="rect">
+            <a:avLst/>
+          </a:prstGeom>
+          <a:noFill/>
+          <a:ln>
+            <a:noFill/>
+          </a:ln>
+        </p:spPr>
+        <p:txBody>
+          <a:bodyPr anchorCtr="0" anchor="t" bIns="0" lIns="0" spcFirstLastPara="1" rIns="0" wrap="square" tIns="0">
+            <a:spAutoFit/>
+          </a:bodyPr>
+          <a:lstStyle/>
+          <a:p>
+            <a:pPr indent="0" lvl="0" marL="0" marR="0" rtl="0" algn="l">
+              <a:lnSpc>
+                <a:spcPct val="100000"/>
+              </a:lnSpc>
+              <a:spcBef>
+                <a:spcPts val="0"/>
+              </a:spcBef>
+              <a:spcAft>
+                <a:spcPts val="0"/>
+              </a:spcAft>
+              <a:buClr>
+                <a:srgbClr val="000000"/>
+              </a:buClr>
+              <a:buSzPts val="1300"/>
+              <a:buFont typeface="Arial"/>
+              <a:buNone/>
+            </a:pPr>
+            <a:r>
+              <a:rPr b="1" i="0" lang="en-US" sz="1300" u="none" cap="none" strike="noStrike">
+                <a:solidFill>
+                  <a:srgbClr val="E0793A"/>
+                </a:solidFill>
+                <a:latin typeface="Calibri"/>
+                <a:ea typeface="Calibri"/>
+                <a:cs typeface="Calibri"/>
+                <a:sym typeface="Calibri"/>
+              </a:rPr>
+              <a:t>BUSINESS VALUE  ·  SUMMARY</a:t>
+            </a:r>
+            <a:endParaRPr b="0" i="0" sz="1400" u="none" cap="none" strike="noStrike">
+              <a:solidFill>
+                <a:srgbClr val="000000"/>
+              </a:solidFill>
+              <a:latin typeface="Arial"/>
+              <a:ea typeface="Arial"/>
+              <a:cs typeface="Arial"/>
+              <a:sym typeface="Arial"/>
+            </a:endParaRPr>
+          </a:p>
+        </p:txBody>
+      </p:sp>
+      <p:sp>
+        <p:nvSpPr>
+          <p:cNvPr id="312" name="Google Shape;312;p3"/>
+          <p:cNvSpPr txBox="1"/>
+          <p:nvPr/>
+        </p:nvSpPr>
+        <p:spPr>
+          <a:xfrm>
+            <a:off x="484632" y="548640"/>
+            <a:ext cx="10515600" cy="658368"/>
+          </a:xfrm>
+          <a:prstGeom prst="rect">
+            <a:avLst/>
+          </a:prstGeom>
+          <a:noFill/>
+          <a:ln>
+            <a:noFill/>
+          </a:ln>
+        </p:spPr>
+        <p:txBody>
+          <a:bodyPr anchorCtr="0" anchor="t" bIns="0" lIns="0" spcFirstLastPara="1" rIns="0" wrap="square" tIns="0">
+            <a:spAutoFit/>
+          </a:bodyPr>
+          <a:lstStyle/>
+          <a:p>
+            <a:pPr indent="0" lvl="0" marL="0" marR="0" rtl="0" algn="l">
+              <a:lnSpc>
+                <a:spcPct val="100000"/>
+              </a:lnSpc>
+              <a:spcBef>
+                <a:spcPts val="0"/>
+              </a:spcBef>
+              <a:spcAft>
+                <a:spcPts val="0"/>
+              </a:spcAft>
+              <a:buClr>
+                <a:srgbClr val="000000"/>
+              </a:buClr>
+              <a:buSzPts val="2500"/>
+              <a:buFont typeface="Arial"/>
+              <a:buNone/>
+            </a:pPr>
+            <a:r>
+              <a:rPr b="1" i="0" lang="en-US" sz="2500" u="none" cap="none" strike="noStrike">
+                <a:solidFill>
+                  <a:srgbClr val="14304D"/>
+                </a:solidFill>
+                <a:latin typeface="Calibri"/>
+                <a:ea typeface="Calibri"/>
+                <a:cs typeface="Calibri"/>
+                <a:sym typeface="Calibri"/>
+              </a:rPr>
+              <a:t>From Pipeline to Board-Ready Decisions</a:t>
+            </a:r>
+            <a:endParaRPr b="0" i="0" sz="1400" u="none" cap="none" strike="noStrike">
+              <a:solidFill>
+                <a:srgbClr val="000000"/>
+              </a:solidFill>
+              <a:latin typeface="Arial"/>
+              <a:ea typeface="Arial"/>
+              <a:cs typeface="Arial"/>
+              <a:sym typeface="Arial"/>
+            </a:endParaRPr>
+          </a:p>
+        </p:txBody>
+      </p:sp>
+      <p:sp>
+        <p:nvSpPr>
+          <p:cNvPr id="313" name="Google Shape;313;p3"/>
+          <p:cNvSpPr/>
+          <p:nvPr/>
+        </p:nvSpPr>
+        <p:spPr>
+          <a:xfrm>
+            <a:off x="502920" y="1207008"/>
+            <a:ext cx="960120" cy="50800"/>
+          </a:xfrm>
+          <a:prstGeom prst="rect">
+            <a:avLst/>
+          </a:prstGeom>
+          <a:solidFill>
+            <a:srgbClr val="E0793A"/>
+          </a:solidFill>
+          <a:ln>
+            <a:noFill/>
+          </a:ln>
+        </p:spPr>
+        <p:txBody>
+          <a:bodyPr anchorCtr="0" anchor="ctr" bIns="45700" lIns="91425" spcFirstLastPara="1" rIns="91425" wrap="square" tIns="45700">
+            <a:noAutofit/>
+          </a:bodyPr>
+          <a:lstStyle/>
+          <a:p>
+            <a:pPr indent="0" lvl="0" marL="0" marR="0" rtl="0" algn="ctr">
+              <a:lnSpc>
+                <a:spcPct val="100000"/>
+              </a:lnSpc>
+              <a:spcBef>
+                <a:spcPts val="0"/>
+              </a:spcBef>
+              <a:spcAft>
+                <a:spcPts val="0"/>
+              </a:spcAft>
+              <a:buClr>
+                <a:srgbClr val="000000"/>
+              </a:buClr>
+              <a:buSzPts val="1800"/>
+              <a:buFont typeface="Arial"/>
+              <a:buNone/>
+            </a:pPr>
+            <a:r>
+              <a:t/>
+            </a:r>
+            <a:endParaRPr b="0" i="0" sz="1800" u="none" cap="none" strike="noStrike">
+              <a:solidFill>
+                <a:schemeClr val="dk1"/>
+              </a:solidFill>
+              <a:latin typeface="Calibri"/>
+              <a:ea typeface="Calibri"/>
+              <a:cs typeface="Calibri"/>
+              <a:sym typeface="Calibri"/>
+            </a:endParaRPr>
+          </a:p>
+        </p:txBody>
+      </p:sp>
+      <p:sp>
+        <p:nvSpPr>
+          <p:cNvPr id="314" name="Google Shape;314;p3"/>
+          <p:cNvSpPr txBox="1"/>
+          <p:nvPr/>
+        </p:nvSpPr>
+        <p:spPr>
+          <a:xfrm>
+            <a:off x="448056" y="1425000"/>
+            <a:ext cx="11155680" cy="886397"/>
+          </a:xfrm>
+          <a:prstGeom prst="rect">
+            <a:avLst/>
+          </a:prstGeom>
+          <a:noFill/>
+          <a:ln>
+            <a:noFill/>
+          </a:ln>
+        </p:spPr>
+        <p:txBody>
+          <a:bodyPr anchorCtr="0" anchor="t" bIns="0" lIns="0" spcFirstLastPara="1" rIns="0" wrap="square" tIns="0">
+            <a:spAutoFit/>
+          </a:bodyPr>
+          <a:lstStyle/>
+          <a:p>
+            <a:pPr indent="0" lvl="0" marL="0" marR="0" rtl="0" algn="l">
+              <a:lnSpc>
+                <a:spcPct val="120000"/>
+              </a:lnSpc>
+              <a:spcBef>
+                <a:spcPts val="0"/>
+              </a:spcBef>
+              <a:spcAft>
+                <a:spcPts val="0"/>
+              </a:spcAft>
+              <a:buClr>
+                <a:srgbClr val="000000"/>
+              </a:buClr>
+              <a:buSzPts val="2400"/>
+              <a:buFont typeface="Arial"/>
+              <a:buNone/>
+            </a:pPr>
+            <a:r>
+              <a:rPr b="1" i="0" lang="en-US" sz="2400" u="none" cap="none" strike="noStrike">
+                <a:solidFill>
+                  <a:srgbClr val="14304D"/>
+                </a:solidFill>
+                <a:latin typeface="Calibri"/>
+                <a:ea typeface="Calibri"/>
+                <a:cs typeface="Calibri"/>
+                <a:sym typeface="Calibri"/>
+              </a:rPr>
+              <a:t>The dbt-modeled star schema on BigQuery is what makes both drivers above possible — and every future board question answerable the same way.</a:t>
+            </a:r>
+            <a:endParaRPr b="1" i="0" sz="2400" u="none" cap="none" strike="noStrike">
+              <a:solidFill>
+                <a:srgbClr val="FF0000"/>
+              </a:solidFill>
+              <a:latin typeface="Arial"/>
+              <a:ea typeface="Arial"/>
+              <a:cs typeface="Arial"/>
+              <a:sym typeface="Arial"/>
+            </a:endParaRPr>
+          </a:p>
+        </p:txBody>
+      </p:sp>
+      <p:sp>
+        <p:nvSpPr>
+          <p:cNvPr id="315" name="Google Shape;315;p3"/>
+          <p:cNvSpPr txBox="1"/>
+          <p:nvPr/>
+        </p:nvSpPr>
+        <p:spPr>
+          <a:xfrm>
+            <a:off x="502920" y="6519672"/>
+            <a:ext cx="8686800" cy="274320"/>
+          </a:xfrm>
+          <a:prstGeom prst="rect">
+            <a:avLst/>
+          </a:prstGeom>
+          <a:noFill/>
+          <a:ln>
+            <a:noFill/>
+          </a:ln>
+        </p:spPr>
+        <p:txBody>
+          <a:bodyPr anchorCtr="0" anchor="t" bIns="0" lIns="0" spcFirstLastPara="1" rIns="0" wrap="square" tIns="0">
+            <a:spAutoFit/>
+          </a:bodyPr>
+          <a:lstStyle/>
+          <a:p>
+            <a:pPr indent="0" lvl="0" marL="0" marR="0" rtl="0" algn="l">
+              <a:lnSpc>
+                <a:spcPct val="100000"/>
+              </a:lnSpc>
+              <a:spcBef>
+                <a:spcPts val="0"/>
+              </a:spcBef>
+              <a:spcAft>
+                <a:spcPts val="0"/>
+              </a:spcAft>
+              <a:buClr>
+                <a:srgbClr val="000000"/>
+              </a:buClr>
+              <a:buSzPts val="1050"/>
+              <a:buFont typeface="Arial"/>
+              <a:buNone/>
+            </a:pPr>
+            <a:r>
+              <a:rPr b="0" i="0" lang="en-US" sz="1050" u="none" cap="none" strike="noStrike">
+                <a:solidFill>
+                  <a:srgbClr val="5B6B7A"/>
+                </a:solidFill>
+                <a:latin typeface="Calibri"/>
+                <a:ea typeface="Calibri"/>
+                <a:cs typeface="Calibri"/>
+                <a:sym typeface="Calibri"/>
+              </a:rPr>
+              <a:t>Olist marketplace analysis  ·  olist_marts (BigQuery)  ·  99,441 orders, Sep 2016 – Oct 2018</a:t>
+            </a:r>
+            <a:endParaRPr b="0" i="0" sz="1400" u="none" cap="none" strike="noStrike">
+              <a:solidFill>
+                <a:srgbClr val="000000"/>
+              </a:solidFill>
+              <a:latin typeface="Arial"/>
+              <a:ea typeface="Arial"/>
+              <a:cs typeface="Arial"/>
+              <a:sym typeface="Arial"/>
+            </a:endParaRPr>
+          </a:p>
+        </p:txBody>
+      </p:sp>
+      <p:sp>
+        <p:nvSpPr>
+          <p:cNvPr id="316" name="Google Shape;316;p3"/>
+          <p:cNvSpPr txBox="1"/>
+          <p:nvPr/>
+        </p:nvSpPr>
+        <p:spPr>
+          <a:xfrm>
+            <a:off x="11475720" y="6519672"/>
+            <a:ext cx="365760" cy="274320"/>
+          </a:xfrm>
+          <a:prstGeom prst="rect">
+            <a:avLst/>
+          </a:prstGeom>
+          <a:noFill/>
+          <a:ln>
+            <a:noFill/>
+          </a:ln>
+        </p:spPr>
+        <p:txBody>
+          <a:bodyPr anchorCtr="0" anchor="t" bIns="0" lIns="0" spcFirstLastPara="1" rIns="0" wrap="square" tIns="0">
+            <a:spAutoFit/>
+          </a:bodyPr>
+          <a:lstStyle/>
+          <a:p>
+            <a:pPr indent="0" lvl="0" marL="0" marR="0" rtl="0" algn="r">
+              <a:lnSpc>
+                <a:spcPct val="100000"/>
+              </a:lnSpc>
+              <a:spcBef>
+                <a:spcPts val="0"/>
+              </a:spcBef>
+              <a:spcAft>
+                <a:spcPts val="0"/>
+              </a:spcAft>
+              <a:buClr>
+                <a:srgbClr val="000000"/>
+              </a:buClr>
+              <a:buSzPts val="1050"/>
+              <a:buFont typeface="Arial"/>
+              <a:buNone/>
+            </a:pPr>
+            <a:r>
+              <a:rPr b="0" i="0" lang="en-US" sz="1050" u="none" cap="none" strike="noStrike">
+                <a:solidFill>
+                  <a:srgbClr val="5B6B7A"/>
+                </a:solidFill>
+                <a:latin typeface="Calibri"/>
+                <a:ea typeface="Calibri"/>
+                <a:cs typeface="Calibri"/>
+                <a:sym typeface="Calibri"/>
+              </a:rPr>
+              <a:t>18</a:t>
+            </a:r>
+            <a:endParaRPr b="0" i="0" sz="1400" u="none" cap="none" strike="noStrike">
+              <a:solidFill>
+                <a:srgbClr val="000000"/>
+              </a:solidFill>
+              <a:latin typeface="Arial"/>
+              <a:ea typeface="Arial"/>
+              <a:cs typeface="Arial"/>
+              <a:sym typeface="Arial"/>
+            </a:endParaRPr>
+          </a:p>
+        </p:txBody>
+      </p:sp>
+      <p:sp>
+        <p:nvSpPr>
+          <p:cNvPr id="317" name="Google Shape;317;p3"/>
+          <p:cNvSpPr/>
+          <p:nvPr/>
+        </p:nvSpPr>
+        <p:spPr>
+          <a:xfrm>
+            <a:off x="502920" y="3600000"/>
+            <a:ext cx="3545840" cy="2400000"/>
+          </a:xfrm>
+          <a:prstGeom prst="rect">
+            <a:avLst/>
+          </a:prstGeom>
+          <a:solidFill>
+            <a:srgbClr val="FFFFFF"/>
+          </a:solidFill>
+          <a:ln cap="flat" cmpd="sng" w="9525">
+            <a:solidFill>
+              <a:srgbClr val="DDE2E7"/>
+            </a:solidFill>
+            <a:prstDash val="solid"/>
+            <a:round/>
+            <a:headEnd len="sm" w="sm" type="none"/>
+            <a:tailEnd len="sm" w="sm" type="none"/>
+          </a:ln>
+        </p:spPr>
+        <p:txBody>
+          <a:bodyPr anchorCtr="0" anchor="ctr" bIns="45700" lIns="91425" spcFirstLastPara="1" rIns="91425" wrap="square" tIns="45700">
+            <a:noAutofit/>
+          </a:bodyPr>
+          <a:lstStyle/>
+          <a:p>
+            <a:pPr indent="0" lvl="0" marL="0" marR="0" rtl="0" algn="ctr">
+              <a:lnSpc>
+                <a:spcPct val="100000"/>
+              </a:lnSpc>
+              <a:spcBef>
+                <a:spcPts val="0"/>
+              </a:spcBef>
+              <a:spcAft>
+                <a:spcPts val="0"/>
+              </a:spcAft>
+              <a:buClr>
+                <a:srgbClr val="000000"/>
+              </a:buClr>
+              <a:buSzPts val="1600"/>
+              <a:buFont typeface="Arial"/>
+              <a:buNone/>
+            </a:pPr>
+            <a:r>
+              <a:t/>
+            </a:r>
+            <a:endParaRPr b="0" i="0" sz="1600" u="none" cap="none" strike="noStrike">
+              <a:solidFill>
+                <a:schemeClr val="dk1"/>
+              </a:solidFill>
+              <a:latin typeface="Calibri"/>
+              <a:ea typeface="Calibri"/>
+              <a:cs typeface="Calibri"/>
+              <a:sym typeface="Calibri"/>
+            </a:endParaRPr>
+          </a:p>
+        </p:txBody>
+      </p:sp>
+      <p:sp>
+        <p:nvSpPr>
+          <p:cNvPr id="318" name="Google Shape;318;p3"/>
+          <p:cNvSpPr/>
+          <p:nvPr/>
+        </p:nvSpPr>
+        <p:spPr>
+          <a:xfrm>
+            <a:off x="502920" y="3600000"/>
+            <a:ext cx="82296" cy="2400000"/>
+          </a:xfrm>
+          <a:prstGeom prst="rect">
+            <a:avLst/>
+          </a:prstGeom>
+          <a:solidFill>
+            <a:srgbClr val="E0793A"/>
+          </a:solidFill>
+          <a:ln>
+            <a:noFill/>
+          </a:ln>
+        </p:spPr>
+        <p:txBody>
+          <a:bodyPr anchorCtr="0" anchor="ctr" bIns="45700" lIns="91425" spcFirstLastPara="1" rIns="91425" wrap="square" tIns="45700">
+            <a:noAutofit/>
+          </a:bodyPr>
+          <a:lstStyle/>
+          <a:p>
+            <a:pPr indent="0" lvl="0" marL="0" marR="0" rtl="0" algn="ctr">
+              <a:lnSpc>
+                <a:spcPct val="100000"/>
+              </a:lnSpc>
+              <a:spcBef>
+                <a:spcPts val="0"/>
+              </a:spcBef>
+              <a:spcAft>
+                <a:spcPts val="0"/>
+              </a:spcAft>
+              <a:buClr>
+                <a:srgbClr val="000000"/>
+              </a:buClr>
+              <a:buSzPts val="1600"/>
+              <a:buFont typeface="Arial"/>
+              <a:buNone/>
+            </a:pPr>
+            <a:r>
+              <a:t/>
+            </a:r>
+            <a:endParaRPr b="0" i="0" sz="1600" u="none" cap="none" strike="noStrike">
+              <a:solidFill>
+                <a:schemeClr val="dk1"/>
+              </a:solidFill>
+              <a:latin typeface="Calibri"/>
+              <a:ea typeface="Calibri"/>
+              <a:cs typeface="Calibri"/>
+              <a:sym typeface="Calibri"/>
+            </a:endParaRPr>
+          </a:p>
+        </p:txBody>
+      </p:sp>
+      <p:sp>
+        <p:nvSpPr>
+          <p:cNvPr id="319" name="Google Shape;319;p3"/>
+          <p:cNvSpPr txBox="1"/>
+          <p:nvPr/>
+        </p:nvSpPr>
+        <p:spPr>
+          <a:xfrm>
+            <a:off x="777240" y="3801168"/>
+            <a:ext cx="3145840" cy="246221"/>
+          </a:xfrm>
+          <a:prstGeom prst="rect">
+            <a:avLst/>
+          </a:prstGeom>
+          <a:noFill/>
+          <a:ln>
+            <a:noFill/>
+          </a:ln>
+        </p:spPr>
+        <p:txBody>
+          <a:bodyPr anchorCtr="0" anchor="t" bIns="0" lIns="0" spcFirstLastPara="1" rIns="0" wrap="square" tIns="0">
+            <a:spAutoFit/>
+          </a:bodyPr>
+          <a:lstStyle/>
+          <a:p>
+            <a:pPr indent="0" lvl="0" marL="0" marR="0" rtl="0" algn="l">
+              <a:lnSpc>
+                <a:spcPct val="100000"/>
+              </a:lnSpc>
+              <a:spcBef>
+                <a:spcPts val="0"/>
+              </a:spcBef>
+              <a:spcAft>
+                <a:spcPts val="0"/>
+              </a:spcAft>
+              <a:buClr>
+                <a:srgbClr val="000000"/>
+              </a:buClr>
+              <a:buSzPts val="1600"/>
+              <a:buFont typeface="Arial"/>
+              <a:buNone/>
+            </a:pPr>
+            <a:r>
+              <a:rPr b="1" i="0" lang="en-US" sz="1600" u="none" cap="none" strike="noStrike">
+                <a:solidFill>
+                  <a:srgbClr val="14304D"/>
+                </a:solidFill>
+                <a:latin typeface="Calibri"/>
+                <a:ea typeface="Calibri"/>
+                <a:cs typeface="Calibri"/>
+                <a:sym typeface="Calibri"/>
+              </a:rPr>
+              <a:t>Single Source of Truth</a:t>
+            </a:r>
+            <a:endParaRPr b="0" i="0" sz="1600" u="none" cap="none" strike="noStrike">
+              <a:solidFill>
+                <a:srgbClr val="000000"/>
+              </a:solidFill>
+              <a:latin typeface="Arial"/>
+              <a:ea typeface="Arial"/>
+              <a:cs typeface="Arial"/>
+              <a:sym typeface="Arial"/>
+            </a:endParaRPr>
+          </a:p>
+        </p:txBody>
+      </p:sp>
+      <p:sp>
+        <p:nvSpPr>
+          <p:cNvPr id="320" name="Google Shape;320;p3"/>
+          <p:cNvSpPr txBox="1"/>
+          <p:nvPr/>
+        </p:nvSpPr>
+        <p:spPr>
+          <a:xfrm>
+            <a:off x="777240" y="4313232"/>
+            <a:ext cx="3145840" cy="1500000"/>
+          </a:xfrm>
+          <a:prstGeom prst="rect">
+            <a:avLst/>
+          </a:prstGeom>
+          <a:noFill/>
+          <a:ln>
+            <a:noFill/>
+          </a:ln>
+        </p:spPr>
+        <p:txBody>
+          <a:bodyPr anchorCtr="0" anchor="t" bIns="0" lIns="0" spcFirstLastPara="1" rIns="0" wrap="square" tIns="0">
+            <a:spAutoFit/>
+          </a:bodyPr>
+          <a:lstStyle/>
+          <a:p>
+            <a:pPr indent="0" lvl="0" marL="0" marR="0" rtl="0" algn="l">
+              <a:lnSpc>
+                <a:spcPct val="122000"/>
+              </a:lnSpc>
+              <a:spcBef>
+                <a:spcPts val="0"/>
+              </a:spcBef>
+              <a:spcAft>
+                <a:spcPts val="0"/>
+              </a:spcAft>
+              <a:buClr>
+                <a:srgbClr val="000000"/>
+              </a:buClr>
+              <a:buSzPts val="1600"/>
+              <a:buFont typeface="Arial"/>
+              <a:buNone/>
+            </a:pPr>
+            <a:r>
+              <a:rPr b="0" i="0" lang="en-US" sz="1600" u="none" cap="none" strike="noStrike">
+                <a:solidFill>
+                  <a:srgbClr val="222C37"/>
+                </a:solidFill>
+                <a:latin typeface="Calibri"/>
+                <a:ea typeface="Calibri"/>
+                <a:cs typeface="Calibri"/>
+                <a:sym typeface="Calibri"/>
+              </a:rPr>
+              <a:t>olist_marts star schema on BigQuery gives every team the same numbers — no more dueling spreadsheets.</a:t>
+            </a:r>
+            <a:endParaRPr b="0" i="0" sz="1600" u="none" cap="none" strike="noStrike">
+              <a:solidFill>
+                <a:srgbClr val="000000"/>
+              </a:solidFill>
+              <a:latin typeface="Arial"/>
+              <a:ea typeface="Arial"/>
+              <a:cs typeface="Arial"/>
+              <a:sym typeface="Arial"/>
+            </a:endParaRPr>
+          </a:p>
+        </p:txBody>
+      </p:sp>
+      <p:sp>
+        <p:nvSpPr>
+          <p:cNvPr id="321" name="Google Shape;321;p3"/>
+          <p:cNvSpPr/>
+          <p:nvPr/>
+        </p:nvSpPr>
+        <p:spPr>
+          <a:xfrm>
+            <a:off x="4323080" y="3600000"/>
+            <a:ext cx="3545840" cy="2400000"/>
+          </a:xfrm>
+          <a:prstGeom prst="rect">
+            <a:avLst/>
+          </a:prstGeom>
+          <a:solidFill>
+            <a:srgbClr val="FFFFFF"/>
+          </a:solidFill>
+          <a:ln cap="flat" cmpd="sng" w="9525">
+            <a:solidFill>
+              <a:srgbClr val="DDE2E7"/>
+            </a:solidFill>
+            <a:prstDash val="solid"/>
+            <a:round/>
+            <a:headEnd len="sm" w="sm" type="none"/>
+            <a:tailEnd len="sm" w="sm" type="none"/>
+          </a:ln>
+        </p:spPr>
+        <p:txBody>
+          <a:bodyPr anchorCtr="0" anchor="ctr" bIns="45700" lIns="91425" spcFirstLastPara="1" rIns="91425" wrap="square" tIns="45700">
+            <a:noAutofit/>
+          </a:bodyPr>
+          <a:lstStyle/>
+          <a:p>
+            <a:pPr indent="0" lvl="0" marL="0" marR="0" rtl="0" algn="ctr">
+              <a:lnSpc>
+                <a:spcPct val="100000"/>
+              </a:lnSpc>
+              <a:spcBef>
+                <a:spcPts val="0"/>
+              </a:spcBef>
+              <a:spcAft>
+                <a:spcPts val="0"/>
+              </a:spcAft>
+              <a:buClr>
+                <a:srgbClr val="000000"/>
+              </a:buClr>
+              <a:buSzPts val="1600"/>
+              <a:buFont typeface="Arial"/>
+              <a:buNone/>
+            </a:pPr>
+            <a:r>
+              <a:t/>
+            </a:r>
+            <a:endParaRPr b="0" i="0" sz="1600" u="none" cap="none" strike="noStrike">
+              <a:solidFill>
+                <a:schemeClr val="dk1"/>
+              </a:solidFill>
+              <a:latin typeface="Calibri"/>
+              <a:ea typeface="Calibri"/>
+              <a:cs typeface="Calibri"/>
+              <a:sym typeface="Calibri"/>
+            </a:endParaRPr>
+          </a:p>
+        </p:txBody>
+      </p:sp>
+      <p:sp>
+        <p:nvSpPr>
+          <p:cNvPr id="322" name="Google Shape;322;p3"/>
+          <p:cNvSpPr/>
+          <p:nvPr/>
+        </p:nvSpPr>
+        <p:spPr>
+          <a:xfrm>
+            <a:off x="4323080" y="3600000"/>
+            <a:ext cx="82296" cy="2400000"/>
+          </a:xfrm>
+          <a:prstGeom prst="rect">
+            <a:avLst/>
+          </a:prstGeom>
+          <a:solidFill>
+            <a:srgbClr val="E0793A"/>
+          </a:solidFill>
+          <a:ln>
+            <a:noFill/>
+          </a:ln>
+        </p:spPr>
+        <p:txBody>
+          <a:bodyPr anchorCtr="0" anchor="ctr" bIns="45700" lIns="91425" spcFirstLastPara="1" rIns="91425" wrap="square" tIns="45700">
+            <a:noAutofit/>
+          </a:bodyPr>
+          <a:lstStyle/>
+          <a:p>
+            <a:pPr indent="0" lvl="0" marL="0" marR="0" rtl="0" algn="ctr">
+              <a:lnSpc>
+                <a:spcPct val="100000"/>
+              </a:lnSpc>
+              <a:spcBef>
+                <a:spcPts val="0"/>
+              </a:spcBef>
+              <a:spcAft>
+                <a:spcPts val="0"/>
+              </a:spcAft>
+              <a:buClr>
+                <a:srgbClr val="000000"/>
+              </a:buClr>
+              <a:buSzPts val="1600"/>
+              <a:buFont typeface="Arial"/>
+              <a:buNone/>
+            </a:pPr>
+            <a:r>
+              <a:t/>
+            </a:r>
+            <a:endParaRPr b="0" i="0" sz="1600" u="none" cap="none" strike="noStrike">
+              <a:solidFill>
+                <a:schemeClr val="dk1"/>
+              </a:solidFill>
+              <a:latin typeface="Calibri"/>
+              <a:ea typeface="Calibri"/>
+              <a:cs typeface="Calibri"/>
+              <a:sym typeface="Calibri"/>
+            </a:endParaRPr>
+          </a:p>
+        </p:txBody>
+      </p:sp>
+      <p:sp>
+        <p:nvSpPr>
+          <p:cNvPr id="323" name="Google Shape;323;p3"/>
+          <p:cNvSpPr txBox="1"/>
+          <p:nvPr/>
+        </p:nvSpPr>
+        <p:spPr>
+          <a:xfrm>
+            <a:off x="4597400" y="3801168"/>
+            <a:ext cx="3145840" cy="246221"/>
+          </a:xfrm>
+          <a:prstGeom prst="rect">
+            <a:avLst/>
+          </a:prstGeom>
+          <a:noFill/>
+          <a:ln>
+            <a:noFill/>
+          </a:ln>
+        </p:spPr>
+        <p:txBody>
+          <a:bodyPr anchorCtr="0" anchor="t" bIns="0" lIns="0" spcFirstLastPara="1" rIns="0" wrap="square" tIns="0">
+            <a:spAutoFit/>
+          </a:bodyPr>
+          <a:lstStyle/>
+          <a:p>
+            <a:pPr indent="0" lvl="0" marL="0" marR="0" rtl="0" algn="l">
+              <a:lnSpc>
+                <a:spcPct val="100000"/>
+              </a:lnSpc>
+              <a:spcBef>
+                <a:spcPts val="0"/>
+              </a:spcBef>
+              <a:spcAft>
+                <a:spcPts val="0"/>
+              </a:spcAft>
+              <a:buClr>
+                <a:srgbClr val="000000"/>
+              </a:buClr>
+              <a:buSzPts val="1600"/>
+              <a:buFont typeface="Arial"/>
+              <a:buNone/>
+            </a:pPr>
+            <a:r>
+              <a:rPr b="1" i="0" lang="en-US" sz="1600" u="none" cap="none" strike="noStrike">
+                <a:solidFill>
+                  <a:srgbClr val="14304D"/>
+                </a:solidFill>
+                <a:latin typeface="Calibri"/>
+                <a:ea typeface="Calibri"/>
+                <a:cs typeface="Calibri"/>
+                <a:sym typeface="Calibri"/>
+              </a:rPr>
+              <a:t>Tested, Automated Pipeline</a:t>
+            </a:r>
+            <a:endParaRPr b="0" i="0" sz="1600" u="none" cap="none" strike="noStrike">
+              <a:solidFill>
+                <a:srgbClr val="000000"/>
+              </a:solidFill>
+              <a:latin typeface="Arial"/>
+              <a:ea typeface="Arial"/>
+              <a:cs typeface="Arial"/>
+              <a:sym typeface="Arial"/>
+            </a:endParaRPr>
+          </a:p>
+        </p:txBody>
+      </p:sp>
+      <p:sp>
+        <p:nvSpPr>
+          <p:cNvPr id="324" name="Google Shape;324;p3"/>
+          <p:cNvSpPr txBox="1"/>
+          <p:nvPr/>
+        </p:nvSpPr>
+        <p:spPr>
+          <a:xfrm>
+            <a:off x="4597400" y="4313232"/>
+            <a:ext cx="3145840" cy="1500000"/>
+          </a:xfrm>
+          <a:prstGeom prst="rect">
+            <a:avLst/>
+          </a:prstGeom>
+          <a:noFill/>
+          <a:ln>
+            <a:noFill/>
+          </a:ln>
+        </p:spPr>
+        <p:txBody>
+          <a:bodyPr anchorCtr="0" anchor="t" bIns="0" lIns="0" spcFirstLastPara="1" rIns="0" wrap="square" tIns="0">
+            <a:spAutoFit/>
+          </a:bodyPr>
+          <a:lstStyle/>
+          <a:p>
+            <a:pPr indent="0" lvl="0" marL="0" marR="0" rtl="0" algn="l">
+              <a:lnSpc>
+                <a:spcPct val="122000"/>
+              </a:lnSpc>
+              <a:spcBef>
+                <a:spcPts val="0"/>
+              </a:spcBef>
+              <a:spcAft>
+                <a:spcPts val="0"/>
+              </a:spcAft>
+              <a:buClr>
+                <a:srgbClr val="000000"/>
+              </a:buClr>
+              <a:buSzPts val="1600"/>
+              <a:buFont typeface="Arial"/>
+              <a:buNone/>
+            </a:pPr>
+            <a:r>
+              <a:rPr b="0" i="0" lang="en-US" sz="1600" u="none" cap="none" strike="noStrike">
+                <a:solidFill>
+                  <a:srgbClr val="222C37"/>
+                </a:solidFill>
+                <a:latin typeface="Calibri"/>
+                <a:ea typeface="Calibri"/>
+                <a:cs typeface="Calibri"/>
+                <a:sym typeface="Calibri"/>
+              </a:rPr>
+              <a:t>dbt tests and scheduled refreshes catch errors before they ever reach a board deck.</a:t>
+            </a:r>
+            <a:endParaRPr b="0" i="0" sz="1600" u="none" cap="none" strike="noStrike">
+              <a:solidFill>
+                <a:srgbClr val="000000"/>
+              </a:solidFill>
+              <a:latin typeface="Arial"/>
+              <a:ea typeface="Arial"/>
+              <a:cs typeface="Arial"/>
+              <a:sym typeface="Arial"/>
+            </a:endParaRPr>
+          </a:p>
+        </p:txBody>
+      </p:sp>
+      <p:sp>
+        <p:nvSpPr>
+          <p:cNvPr id="325" name="Google Shape;325;p3"/>
+          <p:cNvSpPr/>
+          <p:nvPr/>
+        </p:nvSpPr>
+        <p:spPr>
+          <a:xfrm>
+            <a:off x="8143240" y="3600000"/>
+            <a:ext cx="3545840" cy="2400000"/>
+          </a:xfrm>
+          <a:prstGeom prst="rect">
+            <a:avLst/>
+          </a:prstGeom>
+          <a:solidFill>
+            <a:srgbClr val="FFFFFF"/>
+          </a:solidFill>
+          <a:ln cap="flat" cmpd="sng" w="9525">
+            <a:solidFill>
+              <a:srgbClr val="DDE2E7"/>
+            </a:solidFill>
+            <a:prstDash val="solid"/>
+            <a:round/>
+            <a:headEnd len="sm" w="sm" type="none"/>
+            <a:tailEnd len="sm" w="sm" type="none"/>
+          </a:ln>
+        </p:spPr>
+        <p:txBody>
+          <a:bodyPr anchorCtr="0" anchor="ctr" bIns="45700" lIns="91425" spcFirstLastPara="1" rIns="91425" wrap="square" tIns="45700">
+            <a:noAutofit/>
+          </a:bodyPr>
+          <a:lstStyle/>
+          <a:p>
+            <a:pPr indent="0" lvl="0" marL="0" marR="0" rtl="0" algn="ctr">
+              <a:lnSpc>
+                <a:spcPct val="100000"/>
+              </a:lnSpc>
+              <a:spcBef>
+                <a:spcPts val="0"/>
+              </a:spcBef>
+              <a:spcAft>
+                <a:spcPts val="0"/>
+              </a:spcAft>
+              <a:buClr>
+                <a:srgbClr val="000000"/>
+              </a:buClr>
+              <a:buSzPts val="1600"/>
+              <a:buFont typeface="Arial"/>
+              <a:buNone/>
+            </a:pPr>
+            <a:r>
+              <a:t/>
+            </a:r>
+            <a:endParaRPr b="0" i="0" sz="1600" u="none" cap="none" strike="noStrike">
+              <a:solidFill>
+                <a:schemeClr val="dk1"/>
+              </a:solidFill>
+              <a:latin typeface="Calibri"/>
+              <a:ea typeface="Calibri"/>
+              <a:cs typeface="Calibri"/>
+              <a:sym typeface="Calibri"/>
+            </a:endParaRPr>
+          </a:p>
+        </p:txBody>
+      </p:sp>
+      <p:sp>
+        <p:nvSpPr>
+          <p:cNvPr id="326" name="Google Shape;326;p3"/>
+          <p:cNvSpPr/>
+          <p:nvPr/>
+        </p:nvSpPr>
+        <p:spPr>
+          <a:xfrm>
+            <a:off x="8143240" y="3600000"/>
+            <a:ext cx="82296" cy="2400000"/>
+          </a:xfrm>
+          <a:prstGeom prst="rect">
+            <a:avLst/>
+          </a:prstGeom>
+          <a:solidFill>
+            <a:srgbClr val="E0793A"/>
+          </a:solidFill>
+          <a:ln>
+            <a:noFill/>
+          </a:ln>
+        </p:spPr>
+        <p:txBody>
+          <a:bodyPr anchorCtr="0" anchor="ctr" bIns="45700" lIns="91425" spcFirstLastPara="1" rIns="91425" wrap="square" tIns="45700">
+            <a:noAutofit/>
+          </a:bodyPr>
+          <a:lstStyle/>
+          <a:p>
+            <a:pPr indent="0" lvl="0" marL="0" marR="0" rtl="0" algn="ctr">
+              <a:lnSpc>
+                <a:spcPct val="100000"/>
+              </a:lnSpc>
+              <a:spcBef>
+                <a:spcPts val="0"/>
+              </a:spcBef>
+              <a:spcAft>
+                <a:spcPts val="0"/>
+              </a:spcAft>
+              <a:buClr>
+                <a:srgbClr val="000000"/>
+              </a:buClr>
+              <a:buSzPts val="1600"/>
+              <a:buFont typeface="Arial"/>
+              <a:buNone/>
+            </a:pPr>
+            <a:r>
+              <a:t/>
+            </a:r>
+            <a:endParaRPr b="0" i="0" sz="1600" u="none" cap="none" strike="noStrike">
+              <a:solidFill>
+                <a:schemeClr val="dk1"/>
+              </a:solidFill>
+              <a:latin typeface="Calibri"/>
+              <a:ea typeface="Calibri"/>
+              <a:cs typeface="Calibri"/>
+              <a:sym typeface="Calibri"/>
+            </a:endParaRPr>
+          </a:p>
+        </p:txBody>
+      </p:sp>
+      <p:sp>
+        <p:nvSpPr>
+          <p:cNvPr id="327" name="Google Shape;327;p3"/>
+          <p:cNvSpPr txBox="1"/>
+          <p:nvPr/>
+        </p:nvSpPr>
+        <p:spPr>
+          <a:xfrm>
+            <a:off x="8417560" y="3801168"/>
+            <a:ext cx="3145840" cy="246221"/>
+          </a:xfrm>
+          <a:prstGeom prst="rect">
+            <a:avLst/>
+          </a:prstGeom>
+          <a:noFill/>
+          <a:ln>
+            <a:noFill/>
+          </a:ln>
+        </p:spPr>
+        <p:txBody>
+          <a:bodyPr anchorCtr="0" anchor="t" bIns="0" lIns="0" spcFirstLastPara="1" rIns="0" wrap="square" tIns="0">
+            <a:spAutoFit/>
+          </a:bodyPr>
+          <a:lstStyle/>
+          <a:p>
+            <a:pPr indent="0" lvl="0" marL="0" marR="0" rtl="0" algn="l">
+              <a:lnSpc>
+                <a:spcPct val="100000"/>
+              </a:lnSpc>
+              <a:spcBef>
+                <a:spcPts val="0"/>
+              </a:spcBef>
+              <a:spcAft>
+                <a:spcPts val="0"/>
+              </a:spcAft>
+              <a:buClr>
+                <a:srgbClr val="000000"/>
+              </a:buClr>
+              <a:buSzPts val="1600"/>
+              <a:buFont typeface="Arial"/>
+              <a:buNone/>
+            </a:pPr>
+            <a:r>
+              <a:rPr b="1" i="0" lang="en-US" sz="1600" u="none" cap="none" strike="noStrike">
+                <a:solidFill>
+                  <a:srgbClr val="14304D"/>
+                </a:solidFill>
+                <a:latin typeface="Calibri"/>
+                <a:ea typeface="Calibri"/>
+                <a:cs typeface="Calibri"/>
+                <a:sym typeface="Calibri"/>
+              </a:rPr>
+              <a:t>One Warehouse, Any Question</a:t>
+            </a:r>
+            <a:endParaRPr b="0" i="0" sz="1600" u="none" cap="none" strike="noStrike">
+              <a:solidFill>
+                <a:srgbClr val="000000"/>
+              </a:solidFill>
+              <a:latin typeface="Arial"/>
+              <a:ea typeface="Arial"/>
+              <a:cs typeface="Arial"/>
+              <a:sym typeface="Arial"/>
+            </a:endParaRPr>
+          </a:p>
+        </p:txBody>
+      </p:sp>
+      <p:sp>
+        <p:nvSpPr>
+          <p:cNvPr id="328" name="Google Shape;328;p3"/>
+          <p:cNvSpPr txBox="1"/>
+          <p:nvPr/>
+        </p:nvSpPr>
+        <p:spPr>
+          <a:xfrm>
+            <a:off x="8417560" y="4313232"/>
+            <a:ext cx="3145840" cy="1500000"/>
+          </a:xfrm>
+          <a:prstGeom prst="rect">
+            <a:avLst/>
+          </a:prstGeom>
+          <a:noFill/>
+          <a:ln>
+            <a:noFill/>
+          </a:ln>
+        </p:spPr>
+        <p:txBody>
+          <a:bodyPr anchorCtr="0" anchor="t" bIns="0" lIns="0" spcFirstLastPara="1" rIns="0" wrap="square" tIns="0">
+            <a:spAutoFit/>
+          </a:bodyPr>
+          <a:lstStyle/>
+          <a:p>
+            <a:pPr indent="0" lvl="0" marL="0" marR="0" rtl="0" algn="l">
+              <a:lnSpc>
+                <a:spcPct val="122000"/>
+              </a:lnSpc>
+              <a:spcBef>
+                <a:spcPts val="0"/>
+              </a:spcBef>
+              <a:spcAft>
+                <a:spcPts val="0"/>
+              </a:spcAft>
+              <a:buClr>
+                <a:srgbClr val="000000"/>
+              </a:buClr>
+              <a:buSzPts val="1600"/>
+              <a:buFont typeface="Arial"/>
+              <a:buNone/>
+            </a:pPr>
+            <a:r>
+              <a:rPr b="0" i="0" lang="en-US" sz="1600" u="none" cap="none" strike="noStrike">
+                <a:solidFill>
+                  <a:srgbClr val="222C37"/>
+                </a:solidFill>
+                <a:latin typeface="Calibri"/>
+                <a:ea typeface="Calibri"/>
+                <a:cs typeface="Calibri"/>
+                <a:sym typeface="Calibri"/>
+              </a:rPr>
+              <a:t>The same warehouse powered both drivers above — and can answer the board's next question just as fast.</a:t>
+            </a:r>
+            <a:endParaRPr b="0" i="0" sz="1600" u="none" cap="none" strike="noStrike">
+              <a:solidFill>
+                <a:srgbClr val="000000"/>
+              </a:solidFill>
+              <a:latin typeface="Arial"/>
+              <a:ea typeface="Arial"/>
+              <a:cs typeface="Arial"/>
+              <a:sym typeface="Arial"/>
+            </a:endParaRPr>
+          </a:p>
+        </p:txBody>
+      </p:sp>
     </p:spTree>
   </p:cSld>
   <p:clrMapOvr>
@@ -21376,7 +20873,7 @@
   <p:cSld>
     <p:spTree>
       <p:nvGrpSpPr>
-        <p:cNvPr id="342" name="Shape 342"/>
+        <p:cNvPr id="332" name="Shape 332"/>
         <p:cNvGrpSpPr/>
         <p:nvPr/>
       </p:nvGrpSpPr>
@@ -21390,7 +20887,7 @@
       </p:grpSpPr>
       <p:sp>
         <p:nvSpPr>
-          <p:cNvPr id="343" name="Google Shape;343;g3faa39e91dc_0_0"/>
+          <p:cNvPr id="333" name="Google Shape;333;g3faa39e91dc_0_0"/>
           <p:cNvSpPr txBox="1"/>
           <p:nvPr/>
         </p:nvSpPr>
@@ -21456,7 +20953,7 @@
       </p:sp>
       <p:sp>
         <p:nvSpPr>
-          <p:cNvPr id="344" name="Google Shape;344;g3faa39e91dc_0_0"/>
+          <p:cNvPr id="334" name="Google Shape;334;g3faa39e91dc_0_0"/>
           <p:cNvSpPr txBox="1"/>
           <p:nvPr/>
         </p:nvSpPr>
@@ -21522,7 +21019,7 @@
       </p:sp>
       <p:pic>
         <p:nvPicPr>
-          <p:cNvPr id="345" name="Google Shape;345;g3faa39e91dc_0_0"/>
+          <p:cNvPr id="335" name="Google Shape;335;g3faa39e91dc_0_0"/>
           <p:cNvPicPr preferRelativeResize="0"/>
           <p:nvPr/>
         </p:nvPicPr>
@@ -21560,7 +21057,7 @@
   <p:cSld>
     <p:spTree>
       <p:nvGrpSpPr>
-        <p:cNvPr id="349" name="Shape 349"/>
+        <p:cNvPr id="339" name="Shape 339"/>
         <p:cNvGrpSpPr/>
         <p:nvPr/>
       </p:nvGrpSpPr>
@@ -21574,7 +21071,7 @@
       </p:grpSpPr>
       <p:sp>
         <p:nvSpPr>
-          <p:cNvPr id="350" name="Google Shape;350;g409df0ac948_0_12"/>
+          <p:cNvPr id="340" name="Google Shape;340;g409df0ac948_0_12"/>
           <p:cNvSpPr txBox="1"/>
           <p:nvPr/>
         </p:nvSpPr>
@@ -21640,7 +21137,7 @@
       </p:sp>
       <p:sp>
         <p:nvSpPr>
-          <p:cNvPr id="351" name="Google Shape;351;g409df0ac948_0_12"/>
+          <p:cNvPr id="341" name="Google Shape;341;g409df0ac948_0_12"/>
           <p:cNvSpPr txBox="1"/>
           <p:nvPr/>
         </p:nvSpPr>
@@ -21690,19 +21187,7 @@
                 <a:cs typeface="Calibri"/>
                 <a:sym typeface="Calibri"/>
               </a:rPr>
-              <a:t>Customer </a:t>
-            </a:r>
-            <a:r>
-              <a:rPr b="1" lang="en-US" sz="2500">
-                <a:solidFill>
-                  <a:srgbClr val="14304D"/>
-                </a:solidFill>
-                <a:latin typeface="Calibri"/>
-                <a:ea typeface="Calibri"/>
-                <a:cs typeface="Calibri"/>
-                <a:sym typeface="Calibri"/>
-              </a:rPr>
-              <a:t>&amp; Seller Geography</a:t>
+              <a:t>Customer &amp; Seller Geography</a:t>
             </a:r>
             <a:endParaRPr b="0" i="0" sz="1400" u="none" cap="none" strike="noStrike">
               <a:solidFill>
@@ -21718,17 +21203,16 @@
       </p:sp>
       <p:pic>
         <p:nvPicPr>
-          <p:cNvPr id="352" name="Google Shape;352;g409df0ac948_0_12"/>
+          <p:cNvPr id="342" name="Google Shape;342;g409df0ac948_0_12"/>
           <p:cNvPicPr preferRelativeResize="0"/>
           <p:nvPr/>
         </p:nvPicPr>
-        <p:blipFill>
+        <p:blipFill rotWithShape="1">
           <a:blip r:embed="rId3">
             <a:alphaModFix/>
           </a:blip>
-          <a:stretch>
-            <a:fillRect/>
-          </a:stretch>
+          <a:srcRect b="0" l="0" r="0" t="0"/>
+          <a:stretch/>
         </p:blipFill>
         <p:spPr>
           <a:xfrm>
@@ -21757,7 +21241,7 @@
   <p:cSld>
     <p:spTree>
       <p:nvGrpSpPr>
-        <p:cNvPr id="356" name="Shape 356"/>
+        <p:cNvPr id="346" name="Shape 346"/>
         <p:cNvGrpSpPr/>
         <p:nvPr/>
       </p:nvGrpSpPr>
@@ -21771,7 +21255,7 @@
       </p:grpSpPr>
       <p:sp>
         <p:nvSpPr>
-          <p:cNvPr id="357" name="Google Shape;357;g3fb723d6469_0_0"/>
+          <p:cNvPr id="347" name="Google Shape;347;g3fb723d6469_0_0"/>
           <p:cNvSpPr txBox="1"/>
           <p:nvPr/>
         </p:nvSpPr>
@@ -21837,7 +21321,7 @@
       </p:sp>
       <p:sp>
         <p:nvSpPr>
-          <p:cNvPr id="358" name="Google Shape;358;g3fb723d6469_0_0"/>
+          <p:cNvPr id="348" name="Google Shape;348;g3fb723d6469_0_0"/>
           <p:cNvSpPr txBox="1"/>
           <p:nvPr/>
         </p:nvSpPr>
@@ -21903,7 +21387,7 @@
       </p:sp>
       <p:pic>
         <p:nvPicPr>
-          <p:cNvPr id="359" name="Google Shape;359;g3fb723d6469_0_0"/>
+          <p:cNvPr id="349" name="Google Shape;349;g3fb723d6469_0_0"/>
           <p:cNvPicPr preferRelativeResize="0"/>
           <p:nvPr/>
         </p:nvPicPr>
@@ -21941,7 +21425,7 @@
   <p:cSld>
     <p:spTree>
       <p:nvGrpSpPr>
-        <p:cNvPr id="363" name="Shape 363"/>
+        <p:cNvPr id="353" name="Shape 353"/>
         <p:cNvGrpSpPr/>
         <p:nvPr/>
       </p:nvGrpSpPr>
@@ -21955,7 +21439,7 @@
       </p:grpSpPr>
       <p:sp>
         <p:nvSpPr>
-          <p:cNvPr id="364" name="Google Shape;364;g409df0ac948_0_19"/>
+          <p:cNvPr id="354" name="Google Shape;354;g409df0ac948_0_19"/>
           <p:cNvSpPr txBox="1"/>
           <p:nvPr/>
         </p:nvSpPr>
@@ -22021,7 +21505,7 @@
       </p:sp>
       <p:sp>
         <p:nvSpPr>
-          <p:cNvPr id="365" name="Google Shape;365;g409df0ac948_0_19"/>
+          <p:cNvPr id="355" name="Google Shape;355;g409df0ac948_0_19"/>
           <p:cNvSpPr txBox="1"/>
           <p:nvPr/>
         </p:nvSpPr>
@@ -22087,7 +21571,7 @@
       </p:sp>
       <p:pic>
         <p:nvPicPr>
-          <p:cNvPr id="366" name="Google Shape;366;g409df0ac948_0_19"/>
+          <p:cNvPr id="356" name="Google Shape;356;g409df0ac948_0_19"/>
           <p:cNvPicPr preferRelativeResize="0"/>
           <p:nvPr/>
         </p:nvPicPr>
@@ -22125,7 +21609,7 @@
   <p:cSld>
     <p:spTree>
       <p:nvGrpSpPr>
-        <p:cNvPr id="370" name="Shape 370"/>
+        <p:cNvPr id="360" name="Shape 360"/>
         <p:cNvGrpSpPr/>
         <p:nvPr/>
       </p:nvGrpSpPr>
@@ -22139,7 +21623,7 @@
       </p:grpSpPr>
       <p:sp>
         <p:nvSpPr>
-          <p:cNvPr id="371" name="Google Shape;371;g409df0ac948_0_26"/>
+          <p:cNvPr id="361" name="Google Shape;361;g409df0ac948_0_26"/>
           <p:cNvSpPr txBox="1"/>
           <p:nvPr/>
         </p:nvSpPr>
@@ -22205,7 +21689,7 @@
       </p:sp>
       <p:sp>
         <p:nvSpPr>
-          <p:cNvPr id="372" name="Google Shape;372;g409df0ac948_0_26"/>
+          <p:cNvPr id="362" name="Google Shape;362;g409df0ac948_0_26"/>
           <p:cNvSpPr txBox="1"/>
           <p:nvPr/>
         </p:nvSpPr>
@@ -22271,7 +21755,7 @@
       </p:sp>
       <p:pic>
         <p:nvPicPr>
-          <p:cNvPr id="373" name="Google Shape;373;g409df0ac948_0_26"/>
+          <p:cNvPr id="363" name="Google Shape;363;g409df0ac948_0_26"/>
           <p:cNvPicPr preferRelativeResize="0"/>
           <p:nvPr/>
         </p:nvPicPr>
@@ -22309,7 +21793,7 @@
   <p:cSld>
     <p:spTree>
       <p:nvGrpSpPr>
-        <p:cNvPr id="377" name="Shape 377"/>
+        <p:cNvPr id="367" name="Shape 367"/>
         <p:cNvGrpSpPr/>
         <p:nvPr/>
       </p:nvGrpSpPr>
@@ -22323,7 +21807,7 @@
       </p:grpSpPr>
       <p:sp>
         <p:nvSpPr>
-          <p:cNvPr id="378" name="Google Shape;378;g3fb723d6469_0_7"/>
+          <p:cNvPr id="368" name="Google Shape;368;g3fb723d6469_0_7"/>
           <p:cNvSpPr txBox="1"/>
           <p:nvPr/>
         </p:nvSpPr>
@@ -22389,7 +21873,7 @@
       </p:sp>
       <p:sp>
         <p:nvSpPr>
-          <p:cNvPr id="379" name="Google Shape;379;g3fb723d6469_0_7"/>
+          <p:cNvPr id="369" name="Google Shape;369;g3fb723d6469_0_7"/>
           <p:cNvSpPr txBox="1"/>
           <p:nvPr/>
         </p:nvSpPr>
@@ -22430,7 +21914,7 @@
               <a:buNone/>
             </a:pPr>
             <a:r>
-              <a:rPr b="1" lang="en-US" sz="2500">
+              <a:rPr b="1" i="0" lang="en-US" sz="2500" u="none" cap="none" strike="noStrike">
                 <a:solidFill>
                   <a:srgbClr val="14304D"/>
                 </a:solidFill>
@@ -22455,17 +21939,16 @@
       </p:sp>
       <p:pic>
         <p:nvPicPr>
-          <p:cNvPr id="380" name="Google Shape;380;g3fb723d6469_0_7"/>
+          <p:cNvPr id="370" name="Google Shape;370;g3fb723d6469_0_7"/>
           <p:cNvPicPr preferRelativeResize="0"/>
           <p:nvPr/>
         </p:nvPicPr>
-        <p:blipFill>
+        <p:blipFill rotWithShape="1">
           <a:blip r:embed="rId3">
             <a:alphaModFix/>
           </a:blip>
-          <a:stretch>
-            <a:fillRect/>
-          </a:stretch>
+          <a:srcRect b="0" l="0" r="0" t="0"/>
+          <a:stretch/>
         </p:blipFill>
         <p:spPr>
           <a:xfrm>
@@ -22624,7 +22107,7 @@
                 <a:cs typeface="Calibri"/>
                 <a:sym typeface="Calibri"/>
               </a:rPr>
-              <a:t>The Numbers War – Board and investor accountability</a:t>
+              <a:t>Board and investor accountability</a:t>
             </a:r>
             <a:endParaRPr b="1" i="0" sz="3000" u="none" cap="none" strike="noStrike">
               <a:solidFill>
@@ -22706,7 +22189,7 @@
         <p:spPr>
           <a:xfrm>
             <a:off x="502920" y="1417320"/>
-            <a:ext cx="11155680" cy="760000"/>
+            <a:ext cx="11155680" cy="566309"/>
           </a:xfrm>
           <a:prstGeom prst="rect">
             <a:avLst/>
@@ -22749,7 +22232,7 @@
                 <a:cs typeface="Calibri"/>
                 <a:sym typeface="Calibri"/>
               </a:rPr>
-              <a:t>Olist just closed a Series C. The board wants one number for delivery, margins, and growth — but with no single source of truth, three teams pulled the same orders into three spreadsheets and got three different truths.</a:t>
+              <a:t>Olist just closed a Series C. The board wants one number for delivery, margins, and growth — but with no single source of truth readily available, manual data cleaning and manipulation resulted in many low value-add man-hours devoted to generate performance report.</a:t>
             </a:r>
             <a:endParaRPr b="0" i="0" sz="1400" u="none" cap="none" strike="noStrike">
               <a:solidFill>
@@ -22838,7 +22321,7 @@
         <p:spPr>
           <a:xfrm>
             <a:off x="502920" y="2620000"/>
-            <a:ext cx="3529584" cy="2414344"/>
+            <a:ext cx="3529500" cy="2414400"/>
           </a:xfrm>
           <a:prstGeom prst="rect">
             <a:avLst/>
@@ -22961,7 +22444,7 @@
         </p:nvSpPr>
         <p:spPr>
           <a:xfrm>
-            <a:off x="777240" y="2821168"/>
+            <a:off x="773508" y="2686995"/>
             <a:ext cx="3026664" cy="457200"/>
           </a:xfrm>
           <a:prstGeom prst="rect">
@@ -23027,8 +22510,8 @@
         </p:nvSpPr>
         <p:spPr>
           <a:xfrm>
-            <a:off x="777240" y="3333232"/>
-            <a:ext cx="3026664" cy="1350000"/>
+            <a:off x="718644" y="3112574"/>
+            <a:ext cx="3304716" cy="1625060"/>
           </a:xfrm>
           <a:prstGeom prst="rect">
             <a:avLst/>
@@ -23064,23 +22547,23 @@
             <a:r>
               <a:rPr b="0" i="0" lang="en-US" sz="1600" u="none" cap="none" strike="noStrike">
                 <a:solidFill>
-                  <a:srgbClr val="222C37"/>
+                  <a:srgbClr val="000000"/>
                 </a:solidFill>
                 <a:latin typeface="Calibri"/>
                 <a:ea typeface="Calibri"/>
                 <a:cs typeface="Calibri"/>
                 <a:sym typeface="Calibri"/>
               </a:rPr>
-              <a:t>Marketing counted R$13.5M in sales. Ops counted R$15.7M with freight. Finance booked R$16.0M in payments, fulfilled or not. Same orders, three answers — no single source of truth.</a:t>
+              <a:t>No automated data pipeline exists to generate Olist's performance reports. As a result, report generation relies heavily on manual effort, consuming significant man-hours that could be redirected toward higher-value work.</a:t>
             </a:r>
-            <a:endParaRPr b="0" i="0" sz="1400" u="none" cap="none" strike="noStrike">
+            <a:endParaRPr b="0" i="0" sz="1600" u="none" cap="none" strike="noStrike">
               <a:solidFill>
                 <a:srgbClr val="000000"/>
               </a:solidFill>
-              <a:latin typeface="Arial"/>
-              <a:ea typeface="Arial"/>
-              <a:cs typeface="Arial"/>
-              <a:sym typeface="Arial"/>
+              <a:latin typeface="Calibri"/>
+              <a:ea typeface="Calibri"/>
+              <a:cs typeface="Calibri"/>
+              <a:sym typeface="Calibri"/>
             </a:endParaRPr>
           </a:p>
         </p:txBody>
@@ -23093,7 +22576,7 @@
         </p:nvSpPr>
         <p:spPr>
           <a:xfrm>
-            <a:off x="4251960" y="2620000"/>
+            <a:off x="4224444" y="2605707"/>
             <a:ext cx="3529584" cy="2414344"/>
           </a:xfrm>
           <a:prstGeom prst="rect">
@@ -23217,7 +22700,7 @@
         </p:nvSpPr>
         <p:spPr>
           <a:xfrm>
-            <a:off x="4526280" y="2821168"/>
+            <a:off x="4544568" y="2703680"/>
             <a:ext cx="3026664" cy="457200"/>
           </a:xfrm>
           <a:prstGeom prst="rect">
@@ -23283,8 +22766,8 @@
         </p:nvSpPr>
         <p:spPr>
           <a:xfrm>
-            <a:off x="4526280" y="3333232"/>
-            <a:ext cx="3026664" cy="1350000"/>
+            <a:off x="4522584" y="3174337"/>
+            <a:ext cx="3026664" cy="1083374"/>
           </a:xfrm>
           <a:prstGeom prst="rect">
             <a:avLst/>
@@ -23327,7 +22810,7 @@
                 <a:cs typeface="Calibri"/>
                 <a:sym typeface="Calibri"/>
               </a:rPr>
-              <a:t>The CEO's verdict: one warehouse, one tested set of business rules, refreshed every morning before the leadership stand-up — owned by a lean data team based in Singapore.</a:t>
+              <a:t>The CEO's verdict: one warehouse, one tested set of business rules, refreshed every morning before the leadership stand-up.</a:t>
             </a:r>
             <a:endParaRPr b="0" i="0" sz="1400" u="none" cap="none" strike="noStrike">
               <a:solidFill>
@@ -23473,7 +22956,7 @@
         </p:nvSpPr>
         <p:spPr>
           <a:xfrm>
-            <a:off x="8275320" y="2821168"/>
+            <a:off x="8275320" y="2705725"/>
             <a:ext cx="3026664" cy="457200"/>
           </a:xfrm>
           <a:prstGeom prst="rect">
@@ -23539,7 +23022,7 @@
         </p:nvSpPr>
         <p:spPr>
           <a:xfrm>
-            <a:off x="8275320" y="3333232"/>
+            <a:off x="8233296" y="3148069"/>
             <a:ext cx="3026664" cy="1350000"/>
           </a:xfrm>
           <a:prstGeom prst="rect">
@@ -24234,7 +23717,7 @@
   <p:cSld>
     <p:spTree>
       <p:nvGrpSpPr>
-        <p:cNvPr id="384" name="Shape 384"/>
+        <p:cNvPr id="374" name="Shape 374"/>
         <p:cNvGrpSpPr/>
         <p:nvPr/>
       </p:nvGrpSpPr>
@@ -24248,7 +23731,7 @@
       </p:grpSpPr>
       <p:sp>
         <p:nvSpPr>
-          <p:cNvPr id="385" name="Google Shape;385;g409df0ac948_0_33"/>
+          <p:cNvPr id="375" name="Google Shape;375;g409df0ac948_0_33"/>
           <p:cNvSpPr txBox="1"/>
           <p:nvPr/>
         </p:nvSpPr>
@@ -24314,7 +23797,7 @@
       </p:sp>
       <p:sp>
         <p:nvSpPr>
-          <p:cNvPr id="386" name="Google Shape;386;g409df0ac948_0_33"/>
+          <p:cNvPr id="376" name="Google Shape;376;g409df0ac948_0_33"/>
           <p:cNvSpPr txBox="1"/>
           <p:nvPr/>
         </p:nvSpPr>
@@ -24380,7 +23863,7 @@
       </p:sp>
       <p:pic>
         <p:nvPicPr>
-          <p:cNvPr id="387" name="Google Shape;387;g409df0ac948_0_33"/>
+          <p:cNvPr id="377" name="Google Shape;377;g409df0ac948_0_33"/>
           <p:cNvPicPr preferRelativeResize="0"/>
           <p:nvPr/>
         </p:nvPicPr>
@@ -24418,7 +23901,7 @@
   <p:cSld>
     <p:spTree>
       <p:nvGrpSpPr>
-        <p:cNvPr id="391" name="Shape 391"/>
+        <p:cNvPr id="381" name="Shape 381"/>
         <p:cNvGrpSpPr/>
         <p:nvPr/>
       </p:nvGrpSpPr>
@@ -24432,7 +23915,7 @@
       </p:grpSpPr>
       <p:sp>
         <p:nvSpPr>
-          <p:cNvPr id="392" name="Google Shape;392;g409df0ac948_0_0"/>
+          <p:cNvPr id="382" name="Google Shape;382;g409df0ac948_0_0"/>
           <p:cNvSpPr txBox="1"/>
           <p:nvPr/>
         </p:nvSpPr>
@@ -24498,7 +23981,7 @@
       </p:sp>
       <p:sp>
         <p:nvSpPr>
-          <p:cNvPr id="393" name="Google Shape;393;g409df0ac948_0_0"/>
+          <p:cNvPr id="383" name="Google Shape;383;g409df0ac948_0_0"/>
           <p:cNvSpPr txBox="1"/>
           <p:nvPr/>
         </p:nvSpPr>
@@ -24564,7 +24047,7 @@
       </p:sp>
       <p:sp>
         <p:nvSpPr>
-          <p:cNvPr id="394" name="Google Shape;394;g409df0ac948_0_0"/>
+          <p:cNvPr id="384" name="Google Shape;384;g409df0ac948_0_0"/>
           <p:cNvSpPr/>
           <p:nvPr/>
         </p:nvSpPr>
@@ -24623,7 +24106,7 @@
       </p:sp>
       <p:sp>
         <p:nvSpPr>
-          <p:cNvPr id="395" name="Google Shape;395;g409df0ac948_0_0"/>
+          <p:cNvPr id="385" name="Google Shape;385;g409df0ac948_0_0"/>
           <p:cNvSpPr txBox="1"/>
           <p:nvPr/>
         </p:nvSpPr>
@@ -24689,7 +24172,7 @@
       </p:sp>
       <p:sp>
         <p:nvSpPr>
-          <p:cNvPr id="396" name="Google Shape;396;g409df0ac948_0_0"/>
+          <p:cNvPr id="386" name="Google Shape;386;g409df0ac948_0_0"/>
           <p:cNvSpPr txBox="1"/>
           <p:nvPr/>
         </p:nvSpPr>
@@ -24755,7 +24238,7 @@
       </p:sp>
       <p:sp>
         <p:nvSpPr>
-          <p:cNvPr id="397" name="Google Shape;397;g409df0ac948_0_0"/>
+          <p:cNvPr id="387" name="Google Shape;387;g409df0ac948_0_0"/>
           <p:cNvSpPr txBox="1"/>
           <p:nvPr/>
         </p:nvSpPr>
@@ -24821,7 +24304,7 @@
       </p:sp>
       <p:pic>
         <p:nvPicPr>
-          <p:cNvPr id="398" name="Google Shape;398;g409df0ac948_0_0"/>
+          <p:cNvPr id="388" name="Google Shape;388;g409df0ac948_0_0"/>
           <p:cNvPicPr preferRelativeResize="0"/>
           <p:nvPr/>
         </p:nvPicPr>
@@ -24859,7 +24342,7 @@
   <p:cSld>
     <p:spTree>
       <p:nvGrpSpPr>
-        <p:cNvPr id="402" name="Shape 402"/>
+        <p:cNvPr id="392" name="Shape 392"/>
         <p:cNvGrpSpPr/>
         <p:nvPr/>
       </p:nvGrpSpPr>
@@ -24873,7 +24356,7 @@
       </p:grpSpPr>
       <p:sp>
         <p:nvSpPr>
-          <p:cNvPr id="403" name="Google Shape;403;p10"/>
+          <p:cNvPr id="393" name="Google Shape;393;p10"/>
           <p:cNvSpPr txBox="1"/>
           <p:nvPr/>
         </p:nvSpPr>
@@ -24939,7 +24422,7 @@
       </p:sp>
       <p:sp>
         <p:nvSpPr>
-          <p:cNvPr id="404" name="Google Shape;404;p10"/>
+          <p:cNvPr id="394" name="Google Shape;394;p10"/>
           <p:cNvSpPr txBox="1"/>
           <p:nvPr/>
         </p:nvSpPr>
@@ -25005,7 +24488,7 @@
       </p:sp>
       <p:sp>
         <p:nvSpPr>
-          <p:cNvPr id="405" name="Google Shape;405;p10"/>
+          <p:cNvPr id="395" name="Google Shape;395;p10"/>
           <p:cNvSpPr/>
           <p:nvPr/>
         </p:nvSpPr>
@@ -25064,7 +24547,7 @@
       </p:sp>
       <p:sp>
         <p:nvSpPr>
-          <p:cNvPr id="406" name="Google Shape;406;p10"/>
+          <p:cNvPr id="396" name="Google Shape;396;p10"/>
           <p:cNvSpPr txBox="1"/>
           <p:nvPr/>
         </p:nvSpPr>
@@ -25130,7 +24613,7 @@
       </p:sp>
       <p:graphicFrame>
         <p:nvGraphicFramePr>
-          <p:cNvPr id="407" name="Google Shape;407;p10"/>
+          <p:cNvPr id="397" name="Google Shape;397;p10"/>
           <p:cNvGraphicFramePr/>
           <p:nvPr/>
         </p:nvGraphicFramePr>
@@ -25143,7 +24626,7 @@
             <a:tbl>
               <a:tblPr>
                 <a:noFill/>
-                <a:tableStyleId>{C796153C-F114-4815-A74F-1C015B028501}</a:tableStyleId>
+                <a:tableStyleId>{B9C70205-BEE1-440A-9A42-65389452891D}</a:tableStyleId>
               </a:tblPr>
               <a:tblGrid>
                 <a:gridCol w="760000"/>
@@ -26990,7 +26473,7 @@
       </p:graphicFrame>
       <p:graphicFrame>
         <p:nvGraphicFramePr>
-          <p:cNvPr id="408" name="Google Shape;408;p10"/>
+          <p:cNvPr id="398" name="Google Shape;398;p10"/>
           <p:cNvGraphicFramePr/>
           <p:nvPr/>
         </p:nvGraphicFramePr>
@@ -27003,7 +26486,7 @@
             <a:tbl>
               <a:tblPr>
                 <a:noFill/>
-                <a:tableStyleId>{C796153C-F114-4815-A74F-1C015B028501}</a:tableStyleId>
+                <a:tableStyleId>{B9C70205-BEE1-440A-9A42-65389452891D}</a:tableStyleId>
               </a:tblPr>
               <a:tblGrid>
                 <a:gridCol w="760000"/>
@@ -28981,7 +28464,7 @@
       </p:graphicFrame>
       <p:sp>
         <p:nvSpPr>
-          <p:cNvPr id="409" name="Google Shape;409;p10"/>
+          <p:cNvPr id="399" name="Google Shape;399;p10"/>
           <p:cNvSpPr txBox="1"/>
           <p:nvPr/>
         </p:nvSpPr>
@@ -29047,7 +28530,7 @@
       </p:sp>
       <p:sp>
         <p:nvSpPr>
-          <p:cNvPr id="410" name="Google Shape;410;p10"/>
+          <p:cNvPr id="400" name="Google Shape;400;p10"/>
           <p:cNvSpPr txBox="1"/>
           <p:nvPr/>
         </p:nvSpPr>
@@ -29113,7 +28596,7 @@
       </p:sp>
       <p:sp>
         <p:nvSpPr>
-          <p:cNvPr id="411" name="Google Shape;411;p10"/>
+          <p:cNvPr id="401" name="Google Shape;401;p10"/>
           <p:cNvSpPr txBox="1"/>
           <p:nvPr/>
         </p:nvSpPr>
@@ -29408,8 +28891,8 @@
         </p:nvSpPr>
         <p:spPr>
           <a:xfrm>
-            <a:off x="448056" y="1843401"/>
-            <a:ext cx="11155680" cy="886397"/>
+            <a:off x="448056" y="1765136"/>
+            <a:ext cx="11155680" cy="1181862"/>
           </a:xfrm>
           <a:prstGeom prst="rect">
             <a:avLst/>
@@ -29427,32 +28910,58 @@
           <a:p>
             <a:pPr indent="0" lvl="0" marL="0" marR="0" rtl="0" algn="l">
               <a:lnSpc>
-                <a:spcPct val="120000"/>
-              </a:lnSpc>
-              <a:spcBef>
-                <a:spcPts val="0"/>
-              </a:spcBef>
-              <a:spcAft>
-                <a:spcPts val="0"/>
-              </a:spcAft>
-              <a:buClr>
-                <a:srgbClr val="000000"/>
-              </a:buClr>
-              <a:buSzPts val="2400"/>
-              <a:buFont typeface="Arial"/>
+                <a:spcPct val="100000"/>
+              </a:lnSpc>
+              <a:spcBef>
+                <a:spcPts val="0"/>
+              </a:spcBef>
+              <a:spcAft>
+                <a:spcPts val="0"/>
+              </a:spcAft>
               <a:buNone/>
             </a:pPr>
             <a:r>
               <a:rPr b="1" i="0" lang="en-US" sz="2400" u="none" cap="none" strike="noStrike">
                 <a:solidFill>
-                  <a:srgbClr val="14304D"/>
+                  <a:srgbClr val="0F243E"/>
                 </a:solidFill>
                 <a:latin typeface="Calibri"/>
                 <a:ea typeface="Calibri"/>
                 <a:cs typeface="Calibri"/>
                 <a:sym typeface="Calibri"/>
               </a:rPr>
-              <a:t>Solution: A single source of truth, built to enable the analysis which grow the business and satisfy the board and investors.</a:t>
+              <a:t>Solution: A data engineering pipeline designed to enable the analytics needed to drive business growth and deliver the insights expected by the board and investors.</a:t>
+            </a:r>
+            <a:endParaRPr b="0" i="0" sz="2400" u="none" cap="none" strike="noStrike">
+              <a:solidFill>
+                <a:srgbClr val="0F243E"/>
+              </a:solidFill>
+              <a:latin typeface="Calibri"/>
+              <a:ea typeface="Calibri"/>
+              <a:cs typeface="Calibri"/>
+              <a:sym typeface="Calibri"/>
+            </a:endParaRPr>
+          </a:p>
+          <a:p>
+            <a:pPr indent="0" lvl="0" marL="0" marR="0" rtl="0" algn="l">
+              <a:lnSpc>
+                <a:spcPct val="120000"/>
+              </a:lnSpc>
+              <a:spcBef>
+                <a:spcPts val="0"/>
+              </a:spcBef>
+              <a:spcAft>
+                <a:spcPts val="0"/>
+              </a:spcAft>
+              <a:buClr>
+                <a:srgbClr val="000000"/>
+              </a:buClr>
+              <a:buSzPts val="2400"/>
+              <a:buFont typeface="Arial"/>
+              <a:buNone/>
+            </a:pPr>
+            <a:r>
+              <a:t/>
             </a:r>
             <a:endParaRPr b="1" i="0" sz="2400" u="none" cap="none" strike="noStrike">
               <a:solidFill>
@@ -29664,8 +29173,8 @@
         </p:nvSpPr>
         <p:spPr>
           <a:xfrm>
-            <a:off x="1737360" y="4708816"/>
-            <a:ext cx="3026664" cy="901209"/>
+            <a:off x="1737324" y="4719941"/>
+            <a:ext cx="3026700" cy="600805"/>
           </a:xfrm>
           <a:prstGeom prst="rect">
             <a:avLst/>
@@ -29708,7 +29217,7 @@
                 <a:cs typeface="Calibri"/>
                 <a:sym typeface="Calibri"/>
               </a:rPr>
-              <a:t>Does a late delivery drag down customer reviews — and does that cost revenue?</a:t>
+              <a:t>How does late delivery drag down customer reviews ?</a:t>
             </a:r>
             <a:endParaRPr b="0" i="0" sz="1600" u="none" cap="none" strike="noStrike">
               <a:solidFill>
@@ -29789,8 +29298,8 @@
         </p:nvSpPr>
         <p:spPr>
           <a:xfrm>
-            <a:off x="6391656" y="3918242"/>
-            <a:ext cx="3529584" cy="1965960"/>
+            <a:off x="6391656" y="3995584"/>
+            <a:ext cx="3529584" cy="1888618"/>
           </a:xfrm>
           <a:prstGeom prst="rect">
             <a:avLst/>
@@ -29854,8 +29363,8 @@
         </p:nvSpPr>
         <p:spPr>
           <a:xfrm>
-            <a:off x="6391656" y="3918242"/>
-            <a:ext cx="82296" cy="1965960"/>
+            <a:off x="6391656" y="3995584"/>
+            <a:ext cx="82296" cy="1888618"/>
           </a:xfrm>
           <a:prstGeom prst="rect">
             <a:avLst/>
@@ -29980,7 +29489,7 @@
         <p:spPr>
           <a:xfrm>
             <a:off x="6665976" y="4631474"/>
-            <a:ext cx="3026664" cy="901209"/>
+            <a:ext cx="3026700" cy="901209"/>
           </a:xfrm>
           <a:prstGeom prst="rect">
             <a:avLst/>
@@ -30023,7 +29532,7 @@
                 <a:cs typeface="Calibri"/>
                 <a:sym typeface="Calibri"/>
               </a:rPr>
-              <a:t>Where does revenue actually come from, and how should growth spend follow it?</a:t>
+              <a:t>Where does revenue come from, and how should this affect future investments?</a:t>
             </a:r>
             <a:endParaRPr b="0" i="0" sz="1600" u="none" cap="none" strike="noStrike">
               <a:solidFill>
@@ -30177,8 +29686,8 @@
         </p:nvSpPr>
         <p:spPr>
           <a:xfrm>
-            <a:off x="286113" y="1591459"/>
-            <a:ext cx="11383800" cy="1350600"/>
+            <a:off x="286113" y="1714335"/>
+            <a:ext cx="11383800" cy="843335"/>
           </a:xfrm>
           <a:prstGeom prst="rect">
             <a:avLst/>
@@ -30240,8 +29749,8 @@
         </p:nvSpPr>
         <p:spPr>
           <a:xfrm>
-            <a:off x="448056" y="3517364"/>
-            <a:ext cx="8000000" cy="200055"/>
+            <a:off x="1921240" y="3544037"/>
+            <a:ext cx="8000000" cy="307777"/>
           </a:xfrm>
           <a:prstGeom prst="rect">
             <a:avLst/>
@@ -30257,7 +29766,7 @@
           </a:bodyPr>
           <a:lstStyle/>
           <a:p>
-            <a:pPr indent="0" lvl="0" marL="0" marR="0" rtl="0" algn="l">
+            <a:pPr indent="0" lvl="0" marL="0" marR="0" rtl="0" algn="ctr">
               <a:lnSpc>
                 <a:spcPct val="100000"/>
               </a:lnSpc>
@@ -30275,7 +29784,7 @@
               <a:buNone/>
             </a:pPr>
             <a:r>
-              <a:rPr b="1" i="0" lang="en-US" sz="1300" u="none" cap="none" strike="noStrike">
+              <a:rPr b="1" i="0" lang="en-US" sz="2000" u="none" cap="none" strike="noStrike">
                 <a:solidFill>
                   <a:srgbClr val="E0793A"/>
                 </a:solidFill>
@@ -30286,7 +29795,7 @@
               </a:rPr>
               <a:t>ILLUSTRATIVE USE CASES:</a:t>
             </a:r>
-            <a:endParaRPr b="1" i="0" sz="1300" u="none" cap="none" strike="noStrike">
+            <a:endParaRPr b="1" i="0" sz="2000" u="none" cap="none" strike="noStrike">
               <a:solidFill>
                 <a:srgbClr val="E0793A"/>
               </a:solidFill>
@@ -30339,7 +29848,7 @@
         <p:spPr>
           <a:xfrm>
             <a:off x="502920" y="292608"/>
-            <a:ext cx="8229600" cy="292608"/>
+            <a:ext cx="8229600" cy="200100"/>
           </a:xfrm>
           <a:prstGeom prst="rect">
             <a:avLst/>
@@ -30382,7 +29891,7 @@
                 <a:cs typeface="Calibri"/>
                 <a:sym typeface="Calibri"/>
               </a:rPr>
-              <a:t>TECHNICAL FOUNDATION  ·  1 OF 8</a:t>
+              <a:t>TECHNICAL FOUNDATION  ·  1 OF 7</a:t>
             </a:r>
             <a:endParaRPr b="0" i="0" sz="1400" u="none" cap="none" strike="noStrike">
               <a:solidFill>
@@ -30662,7 +30171,7 @@
         <p:spPr>
           <a:xfrm>
             <a:off x="502920" y="2468880"/>
-            <a:ext cx="2240280" cy="3108960"/>
+            <a:ext cx="2240400" cy="2023500"/>
           </a:xfrm>
           <a:prstGeom prst="rect">
             <a:avLst/>
@@ -30788,28 +30297,7 @@
               <a:buNone/>
             </a:pPr>
             <a:r>
-              <a:rPr b="1" i="0" lang="en-US" sz="1050" u="none" cap="none" strike="noStrike">
-                <a:solidFill>
-                  <a:srgbClr val="E0793A"/>
-                </a:solidFill>
-                <a:latin typeface="Calibri"/>
-                <a:ea typeface="Calibri"/>
-                <a:cs typeface="Calibri"/>
-                <a:sym typeface="Calibri"/>
-              </a:rPr>
-              <a:t>Generated from code: </a:t>
-            </a:r>
-            <a:r>
-              <a:rPr b="0" i="0" lang="en-US" sz="1050" u="none" cap="none" strike="noStrike">
-                <a:solidFill>
-                  <a:srgbClr val="5B6B7A"/>
-                </a:solidFill>
-                <a:latin typeface="Calibri"/>
-                <a:ea typeface="Calibri"/>
-                <a:cs typeface="Calibri"/>
-                <a:sym typeface="Calibri"/>
-              </a:rPr>
-              <a:t>docs/diagrams/generate_diagrams.py, so the picture cannot drift from the pipeline.</a:t>
+              <a:t/>
             </a:r>
             <a:endParaRPr b="0" i="0" sz="1400" u="none" cap="none" strike="noStrike">
               <a:solidFill>
@@ -30891,7 +30379,7 @@
         <p:spPr>
           <a:xfrm>
             <a:off x="502920" y="292608"/>
-            <a:ext cx="8229600" cy="292608"/>
+            <a:ext cx="8229600" cy="200100"/>
           </a:xfrm>
           <a:prstGeom prst="rect">
             <a:avLst/>
@@ -30934,7 +30422,7 @@
                 <a:cs typeface="Calibri"/>
                 <a:sym typeface="Calibri"/>
               </a:rPr>
-              <a:t>TECHNICAL FOUNDATION  ·  2 OF 8</a:t>
+              <a:t>TECHNICAL FOUNDATION  ·  2 OF 7</a:t>
             </a:r>
             <a:endParaRPr b="0" i="0" sz="1400" u="none" cap="none" strike="noStrike">
               <a:solidFill>
@@ -31214,7 +30702,7 @@
         <p:spPr>
           <a:xfrm>
             <a:off x="502920" y="1389888"/>
-            <a:ext cx="11155680" cy="365760"/>
+            <a:ext cx="11155800" cy="231000"/>
           </a:xfrm>
           <a:prstGeom prst="rect">
             <a:avLst/>
@@ -31257,7 +30745,7 @@
                 <a:cs typeface="Calibri"/>
                 <a:sym typeface="Calibri"/>
               </a:rPr>
-              <a:t>The diagram shows the shape of the platform. These are the rules that keep it trustworthy when it runs unattended.</a:t>
+              <a:t>These are the rules that keep it trustworthy when it runs unattended.</a:t>
             </a:r>
             <a:endParaRPr b="0" i="0" sz="1400" u="none" cap="none" strike="noStrike">
               <a:solidFill>
@@ -31788,7 +31276,7 @@
         <p:spPr>
           <a:xfrm>
             <a:off x="777240" y="4681728"/>
-            <a:ext cx="5074920" cy="694944"/>
+            <a:ext cx="5074800" cy="392400"/>
           </a:xfrm>
           <a:prstGeom prst="rect">
             <a:avLst/>
@@ -31871,7 +31359,55 @@
                 <a:cs typeface="Calibri"/>
                 <a:sym typeface="Calibri"/>
               </a:rPr>
-              <a:t>Each cleaning rule lives in the earliest layer with enough context — and only there.</a:t>
+              <a:t>Each cleaning rule lives in </a:t>
+            </a:r>
+            <a:r>
+              <a:rPr lang="en-US" sz="1150">
+                <a:solidFill>
+                  <a:srgbClr val="222C37"/>
+                </a:solidFill>
+                <a:latin typeface="Calibri"/>
+                <a:ea typeface="Calibri"/>
+                <a:cs typeface="Calibri"/>
+                <a:sym typeface="Calibri"/>
+              </a:rPr>
+              <a:t>one layer only</a:t>
+            </a:r>
+            <a:r>
+              <a:rPr b="0" i="0" lang="en-US" sz="1150" u="none" cap="none" strike="noStrike">
+                <a:solidFill>
+                  <a:srgbClr val="222C37"/>
+                </a:solidFill>
+                <a:latin typeface="Calibri"/>
+                <a:ea typeface="Calibri"/>
+                <a:cs typeface="Calibri"/>
+                <a:sym typeface="Calibri"/>
+              </a:rPr>
+              <a:t> — </a:t>
+            </a:r>
+            <a:r>
+              <a:rPr lang="en-US" sz="1150">
+                <a:solidFill>
+                  <a:srgbClr val="222C37"/>
+                </a:solidFill>
+                <a:latin typeface="Calibri"/>
+                <a:ea typeface="Calibri"/>
+                <a:cs typeface="Calibri"/>
+                <a:sym typeface="Calibri"/>
+              </a:rPr>
+              <a:t>so there's no conflicting logic</a:t>
+            </a:r>
+            <a:r>
+              <a:rPr b="0" i="0" lang="en-US" sz="1150" u="none" cap="none" strike="noStrike">
+                <a:solidFill>
+                  <a:srgbClr val="222C37"/>
+                </a:solidFill>
+                <a:latin typeface="Calibri"/>
+                <a:ea typeface="Calibri"/>
+                <a:cs typeface="Calibri"/>
+                <a:sym typeface="Calibri"/>
+              </a:rPr>
+              <a:t>.</a:t>
             </a:r>
             <a:endParaRPr b="0" i="0" sz="1400" u="none" cap="none" strike="noStrike">
               <a:solidFill>
@@ -33146,7 +32682,7 @@
         <p:spPr>
           <a:xfrm>
             <a:off x="502920" y="292608"/>
-            <a:ext cx="8229600" cy="292608"/>
+            <a:ext cx="8229600" cy="200100"/>
           </a:xfrm>
           <a:prstGeom prst="rect">
             <a:avLst/>
@@ -33189,7 +32725,7 @@
                 <a:cs typeface="Calibri"/>
                 <a:sym typeface="Calibri"/>
               </a:rPr>
-              <a:t>TECHNICAL FOUNDATION  ·  3 OF 8</a:t>
+              <a:t>TECHNICAL FOUNDATION  ·  3 OF 7</a:t>
             </a:r>
             <a:endParaRPr b="0" i="0" sz="1400" u="none" cap="none" strike="noStrike">
               <a:solidFill>
@@ -33541,7 +33077,7 @@
             <a:tbl>
               <a:tblPr bandRow="1" firstRow="1">
                 <a:noFill/>
-                <a:tableStyleId>{FEABAEE2-BCA0-415B-86C0-DFA73D7E2789}</a:tableStyleId>
+                <a:tableStyleId>{856239E2-9C70-4757-B94D-CF51BCE4861B}</a:tableStyleId>
               </a:tblPr>
               <a:tblGrid>
                 <a:gridCol w="1600200"/>
@@ -34661,7 +34197,7 @@
         <p:spPr>
           <a:xfrm>
             <a:off x="502920" y="292608"/>
-            <a:ext cx="8229600" cy="292608"/>
+            <a:ext cx="8229600" cy="200100"/>
           </a:xfrm>
           <a:prstGeom prst="rect">
             <a:avLst/>
@@ -34704,7 +34240,7 @@
                 <a:cs typeface="Calibri"/>
                 <a:sym typeface="Calibri"/>
               </a:rPr>
-              <a:t>TECHNICAL FOUNDATION  ·  4 OF 8</a:t>
+              <a:t>TECHNICAL FOUNDATION  ·  4 OF 7</a:t>
             </a:r>
             <a:endParaRPr b="0" i="0" sz="1400" u="none" cap="none" strike="noStrike">
               <a:solidFill>
@@ -35041,370 +34577,23 @@
           </a:p>
         </p:txBody>
       </p:sp>
-      <p:sp>
-        <p:nvSpPr>
-          <p:cNvPr id="206" name="Google Shape;206;p31"/>
-          <p:cNvSpPr txBox="1"/>
-          <p:nvPr/>
-        </p:nvSpPr>
-        <p:spPr>
-          <a:xfrm>
-            <a:off x="7813276" y="2231125"/>
-            <a:ext cx="3872700" cy="4175100"/>
-          </a:xfrm>
-          <a:prstGeom prst="rect">
-            <a:avLst/>
-          </a:prstGeom>
-          <a:noFill/>
-          <a:ln>
-            <a:noFill/>
-          </a:ln>
-        </p:spPr>
-        <p:txBody>
-          <a:bodyPr anchorCtr="0" anchor="t" bIns="0" lIns="0" spcFirstLastPara="1" rIns="0" wrap="square" tIns="0">
-            <a:spAutoFit/>
-          </a:bodyPr>
-          <a:lstStyle/>
-          <a:p>
-            <a:pPr indent="0" lvl="0" marL="0" marR="0" rtl="0" algn="l">
-              <a:lnSpc>
-                <a:spcPct val="122000"/>
-              </a:lnSpc>
-              <a:spcBef>
-                <a:spcPts val="0"/>
-              </a:spcBef>
-              <a:spcAft>
-                <a:spcPts val="0"/>
-              </a:spcAft>
-              <a:buClr>
-                <a:srgbClr val="000000"/>
-              </a:buClr>
-              <a:buSzPts val="1250"/>
-              <a:buFont typeface="Arial"/>
-              <a:buNone/>
-            </a:pPr>
-            <a:r>
-              <a:rPr b="1" i="0" lang="en-US" sz="1250" u="none" cap="none" strike="noStrike">
-                <a:solidFill>
-                  <a:srgbClr val="E0793A"/>
-                </a:solidFill>
-                <a:latin typeface="Calibri"/>
-                <a:ea typeface="Calibri"/>
-                <a:cs typeface="Calibri"/>
-                <a:sym typeface="Calibri"/>
-              </a:rPr>
-              <a:t>›  </a:t>
-            </a:r>
-            <a:r>
-              <a:rPr b="1" i="0" lang="en-US" sz="1250" u="none" cap="none" strike="noStrike">
-                <a:solidFill>
-                  <a:srgbClr val="14304D"/>
-                </a:solidFill>
-                <a:latin typeface="Calibri"/>
-                <a:ea typeface="Calibri"/>
-                <a:cs typeface="Calibri"/>
-                <a:sym typeface="Calibri"/>
-              </a:rPr>
-              <a:t>One order has many items and many payments. </a:t>
-            </a:r>
-            <a:r>
-              <a:rPr b="0" i="0" lang="en-US" sz="1250" u="none" cap="none" strike="noStrike">
-                <a:solidFill>
-                  <a:srgbClr val="222C37"/>
-                </a:solidFill>
-                <a:latin typeface="Calibri"/>
-                <a:ea typeface="Calibri"/>
-                <a:cs typeface="Calibri"/>
-                <a:sym typeface="Calibri"/>
-              </a:rPr>
-              <a:t>Flatten both into a single fact and every payment repeats on every line — revenue inflates silently, and nothing errors.</a:t>
-            </a:r>
-            <a:endParaRPr b="0" i="0" sz="1400" u="none" cap="none" strike="noStrike">
-              <a:solidFill>
-                <a:srgbClr val="000000"/>
-              </a:solidFill>
-              <a:latin typeface="Arial"/>
-              <a:ea typeface="Arial"/>
-              <a:cs typeface="Arial"/>
-              <a:sym typeface="Arial"/>
-            </a:endParaRPr>
-          </a:p>
-          <a:p>
-            <a:pPr indent="0" lvl="0" marL="0" marR="0" rtl="0" algn="l">
-              <a:lnSpc>
-                <a:spcPct val="122000"/>
-              </a:lnSpc>
-              <a:spcBef>
-                <a:spcPts val="900"/>
-              </a:spcBef>
-              <a:spcAft>
-                <a:spcPts val="0"/>
-              </a:spcAft>
-              <a:buClr>
-                <a:srgbClr val="000000"/>
-              </a:buClr>
-              <a:buSzPts val="1250"/>
-              <a:buFont typeface="Arial"/>
-              <a:buNone/>
-            </a:pPr>
-            <a:r>
-              <a:rPr b="1" i="0" lang="en-US" sz="1250" u="none" cap="none" strike="noStrike">
-                <a:solidFill>
-                  <a:srgbClr val="E0793A"/>
-                </a:solidFill>
-                <a:latin typeface="Calibri"/>
-                <a:ea typeface="Calibri"/>
-                <a:cs typeface="Calibri"/>
-                <a:sym typeface="Calibri"/>
-              </a:rPr>
-              <a:t>›  </a:t>
-            </a:r>
-            <a:r>
-              <a:rPr b="1" i="0" lang="en-US" sz="1250" u="none" cap="none" strike="noStrike">
-                <a:solidFill>
-                  <a:srgbClr val="14304D"/>
-                </a:solidFill>
-                <a:latin typeface="Calibri"/>
-                <a:ea typeface="Calibri"/>
-                <a:cs typeface="Calibri"/>
-                <a:sym typeface="Calibri"/>
-              </a:rPr>
-              <a:t>fct_orders is the hub. </a:t>
-            </a:r>
-            <a:r>
-              <a:rPr b="0" i="0" lang="en-US" sz="1250" u="none" cap="none" strike="noStrike">
-                <a:solidFill>
-                  <a:srgbClr val="222C37"/>
-                </a:solidFill>
-                <a:latin typeface="Calibri"/>
-                <a:ea typeface="Calibri"/>
-                <a:cs typeface="Calibri"/>
-                <a:sym typeface="Calibri"/>
-              </a:rPr>
-              <a:t>Delivery lateness, review linkage and reconciled payment-vs-item totals all sit at order grain, so the headline revenue measure is safe to sum.</a:t>
-            </a:r>
-            <a:endParaRPr b="0" i="0" sz="1400" u="none" cap="none" strike="noStrike">
-              <a:solidFill>
-                <a:srgbClr val="000000"/>
-              </a:solidFill>
-              <a:latin typeface="Arial"/>
-              <a:ea typeface="Arial"/>
-              <a:cs typeface="Arial"/>
-              <a:sym typeface="Arial"/>
-            </a:endParaRPr>
-          </a:p>
-          <a:p>
-            <a:pPr indent="0" lvl="0" marL="0" marR="0" rtl="0" algn="l">
-              <a:lnSpc>
-                <a:spcPct val="122000"/>
-              </a:lnSpc>
-              <a:spcBef>
-                <a:spcPts val="900"/>
-              </a:spcBef>
-              <a:spcAft>
-                <a:spcPts val="0"/>
-              </a:spcAft>
-              <a:buClr>
-                <a:srgbClr val="000000"/>
-              </a:buClr>
-              <a:buSzPts val="1250"/>
-              <a:buFont typeface="Arial"/>
-              <a:buNone/>
-            </a:pPr>
-            <a:r>
-              <a:rPr b="1" i="0" lang="en-US" sz="1250" u="none" cap="none" strike="noStrike">
-                <a:solidFill>
-                  <a:srgbClr val="E0793A"/>
-                </a:solidFill>
-                <a:latin typeface="Calibri"/>
-                <a:ea typeface="Calibri"/>
-                <a:cs typeface="Calibri"/>
-                <a:sym typeface="Calibri"/>
-              </a:rPr>
-              <a:t>›  </a:t>
-            </a:r>
-            <a:r>
-              <a:rPr b="1" i="0" lang="en-US" sz="1250" u="none" cap="none" strike="noStrike">
-                <a:solidFill>
-                  <a:srgbClr val="14304D"/>
-                </a:solidFill>
-                <a:latin typeface="Calibri"/>
-                <a:ea typeface="Calibri"/>
-                <a:cs typeface="Calibri"/>
-                <a:sym typeface="Calibri"/>
-              </a:rPr>
-              <a:t>dim_customer is keyed on customer_unique_id. </a:t>
-            </a:r>
-            <a:r>
-              <a:rPr b="0" i="0" lang="en-US" sz="1250" u="none" cap="none" strike="noStrike">
-                <a:solidFill>
-                  <a:srgbClr val="222C37"/>
-                </a:solidFill>
-                <a:latin typeface="Calibri"/>
-                <a:ea typeface="Calibri"/>
-                <a:cs typeface="Calibri"/>
-                <a:sym typeface="Calibri"/>
-              </a:rPr>
-              <a:t>The raw customer_id is a per-order surrogate; keying on it would make every repeat customer look like a new person.</a:t>
-            </a:r>
-            <a:endParaRPr b="0" i="0" sz="1400" u="none" cap="none" strike="noStrike">
-              <a:solidFill>
-                <a:srgbClr val="000000"/>
-              </a:solidFill>
-              <a:latin typeface="Arial"/>
-              <a:ea typeface="Arial"/>
-              <a:cs typeface="Arial"/>
-              <a:sym typeface="Arial"/>
-            </a:endParaRPr>
-          </a:p>
-          <a:p>
-            <a:pPr indent="0" lvl="0" marL="0" marR="0" rtl="0" algn="l">
-              <a:lnSpc>
-                <a:spcPct val="122000"/>
-              </a:lnSpc>
-              <a:spcBef>
-                <a:spcPts val="900"/>
-              </a:spcBef>
-              <a:spcAft>
-                <a:spcPts val="0"/>
-              </a:spcAft>
-              <a:buClr>
-                <a:srgbClr val="000000"/>
-              </a:buClr>
-              <a:buSzPts val="1250"/>
-              <a:buFont typeface="Arial"/>
-              <a:buNone/>
-            </a:pPr>
-            <a:r>
-              <a:rPr b="1" i="0" lang="en-US" sz="1250" u="none" cap="none" strike="noStrike">
-                <a:solidFill>
-                  <a:srgbClr val="E0793A"/>
-                </a:solidFill>
-                <a:latin typeface="Calibri"/>
-                <a:ea typeface="Calibri"/>
-                <a:cs typeface="Calibri"/>
-                <a:sym typeface="Calibri"/>
-              </a:rPr>
-              <a:t>›  </a:t>
-            </a:r>
-            <a:r>
-              <a:rPr b="1" i="0" lang="en-US" sz="1250" u="none" cap="none" strike="noStrike">
-                <a:solidFill>
-                  <a:srgbClr val="14304D"/>
-                </a:solidFill>
-                <a:latin typeface="Calibri"/>
-                <a:ea typeface="Calibri"/>
-                <a:cs typeface="Calibri"/>
-                <a:sym typeface="Calibri"/>
-              </a:rPr>
-              <a:t>Measures are additive only where the grain allows it. </a:t>
-            </a:r>
-            <a:r>
-              <a:rPr b="0" i="0" lang="en-US" sz="1250" u="none" cap="none" strike="noStrike">
-                <a:solidFill>
-                  <a:srgbClr val="222C37"/>
-                </a:solidFill>
-                <a:latin typeface="Calibri"/>
-                <a:ea typeface="Calibri"/>
-                <a:cs typeface="Calibri"/>
-                <a:sym typeface="Calibri"/>
-              </a:rPr>
-              <a:t>Payments sum across payment rows, price and freight across item rows; review scores are analysed, never summed.</a:t>
-            </a:r>
-            <a:endParaRPr b="0" i="0" sz="1400" u="none" cap="none" strike="noStrike">
-              <a:solidFill>
-                <a:srgbClr val="000000"/>
-              </a:solidFill>
-              <a:latin typeface="Arial"/>
-              <a:ea typeface="Arial"/>
-              <a:cs typeface="Arial"/>
-              <a:sym typeface="Arial"/>
-            </a:endParaRPr>
-          </a:p>
-          <a:p>
-            <a:pPr indent="0" lvl="0" marL="0" marR="0" rtl="0" algn="l">
-              <a:lnSpc>
-                <a:spcPct val="122000"/>
-              </a:lnSpc>
-              <a:spcBef>
-                <a:spcPts val="900"/>
-              </a:spcBef>
-              <a:spcAft>
-                <a:spcPts val="0"/>
-              </a:spcAft>
-              <a:buClr>
-                <a:srgbClr val="000000"/>
-              </a:buClr>
-              <a:buSzPts val="1250"/>
-              <a:buFont typeface="Arial"/>
-              <a:buNone/>
-            </a:pPr>
-            <a:r>
-              <a:rPr b="1" i="0" lang="en-US" sz="1250" u="none" cap="none" strike="noStrike">
-                <a:solidFill>
-                  <a:srgbClr val="E0793A"/>
-                </a:solidFill>
-                <a:latin typeface="Calibri"/>
-                <a:ea typeface="Calibri"/>
-                <a:cs typeface="Calibri"/>
-                <a:sym typeface="Calibri"/>
-              </a:rPr>
-              <a:t>›  </a:t>
-            </a:r>
-            <a:r>
-              <a:rPr b="1" i="0" lang="en-US" sz="1250" u="none" cap="none" strike="noStrike">
-                <a:solidFill>
-                  <a:srgbClr val="14304D"/>
-                </a:solidFill>
-                <a:latin typeface="Calibri"/>
-                <a:ea typeface="Calibri"/>
-                <a:cs typeface="Calibri"/>
-                <a:sym typeface="Calibri"/>
-              </a:rPr>
-              <a:t>Physical layout is declared for scale. </a:t>
-            </a:r>
-            <a:r>
-              <a:rPr b="0" i="0" lang="en-US" sz="1250" u="none" cap="none" strike="noStrike">
-                <a:solidFill>
-                  <a:srgbClr val="222C37"/>
-                </a:solidFill>
-                <a:latin typeface="Calibri"/>
-                <a:ea typeface="Calibri"/>
-                <a:cs typeface="Calibri"/>
-                <a:sym typeface="Calibri"/>
-              </a:rPr>
-              <a:t>Facts partition on their date and cluster on the keys they are filtered by — design intent today, measurable speedup at volume.</a:t>
-            </a:r>
-            <a:endParaRPr b="0" i="0" sz="1400" u="none" cap="none" strike="noStrike">
-              <a:solidFill>
-                <a:srgbClr val="000000"/>
-              </a:solidFill>
-              <a:latin typeface="Arial"/>
-              <a:ea typeface="Arial"/>
-              <a:cs typeface="Arial"/>
-              <a:sym typeface="Arial"/>
-            </a:endParaRPr>
-          </a:p>
-        </p:txBody>
-      </p:sp>
       <p:pic>
         <p:nvPicPr>
-          <p:cNvPr id="207" name="Google Shape;207;p31"/>
+          <p:cNvPr id="206" name="Google Shape;206;p31"/>
           <p:cNvPicPr preferRelativeResize="0"/>
           <p:nvPr/>
         </p:nvPicPr>
-        <p:blipFill>
+        <p:blipFill rotWithShape="1">
           <a:blip r:embed="rId3">
             <a:alphaModFix/>
           </a:blip>
-          <a:stretch>
-            <a:fillRect/>
-          </a:stretch>
+          <a:srcRect b="0" l="0" r="0" t="0"/>
+          <a:stretch/>
         </p:blipFill>
         <p:spPr>
           <a:xfrm>
-            <a:off x="152400" y="1414272"/>
-            <a:ext cx="7508483" cy="3754242"/>
+            <a:off x="152400" y="1414276"/>
+            <a:ext cx="10515601" cy="5257817"/>
           </a:xfrm>
           <a:prstGeom prst="rect">
             <a:avLst/>
@@ -35435,7 +34624,7 @@
     </p:bg>
     <p:spTree>
       <p:nvGrpSpPr>
-        <p:cNvPr id="211" name="Shape 211"/>
+        <p:cNvPr id="210" name="Shape 210"/>
         <p:cNvGrpSpPr/>
         <p:nvPr/>
       </p:nvGrpSpPr>
@@ -35449,14 +34638,14 @@
       </p:grpSpPr>
       <p:sp>
         <p:nvSpPr>
-          <p:cNvPr id="212" name="Google Shape;212;p32"/>
+          <p:cNvPr id="211" name="Google Shape;211;p32"/>
           <p:cNvSpPr txBox="1"/>
           <p:nvPr/>
         </p:nvSpPr>
         <p:spPr>
           <a:xfrm>
             <a:off x="502920" y="292608"/>
-            <a:ext cx="8229600" cy="292608"/>
+            <a:ext cx="8229600" cy="200100"/>
           </a:xfrm>
           <a:prstGeom prst="rect">
             <a:avLst/>
@@ -35499,7 +34688,7 @@
                 <a:cs typeface="Calibri"/>
                 <a:sym typeface="Calibri"/>
               </a:rPr>
-              <a:t>TECHNICAL FOUNDATION  ·  5 OF 8</a:t>
+              <a:t>TECHNICAL FOUNDATION  ·  5 OF 7</a:t>
             </a:r>
             <a:endParaRPr b="0" i="0" sz="1400" u="none" cap="none" strike="noStrike">
               <a:solidFill>
@@ -35515,7 +34704,7 @@
       </p:sp>
       <p:sp>
         <p:nvSpPr>
-          <p:cNvPr id="213" name="Google Shape;213;p32"/>
+          <p:cNvPr id="212" name="Google Shape;212;p32"/>
           <p:cNvSpPr txBox="1"/>
           <p:nvPr/>
         </p:nvSpPr>
@@ -35581,7 +34770,7 @@
       </p:sp>
       <p:sp>
         <p:nvSpPr>
-          <p:cNvPr id="214" name="Google Shape;214;p32"/>
+          <p:cNvPr id="213" name="Google Shape;213;p32"/>
           <p:cNvSpPr/>
           <p:nvPr/>
         </p:nvSpPr>
@@ -35640,7 +34829,7 @@
       </p:sp>
       <p:sp>
         <p:nvSpPr>
-          <p:cNvPr id="215" name="Google Shape;215;p32"/>
+          <p:cNvPr id="214" name="Google Shape;214;p32"/>
           <p:cNvSpPr txBox="1"/>
           <p:nvPr/>
         </p:nvSpPr>
@@ -35706,7 +34895,7 @@
       </p:sp>
       <p:sp>
         <p:nvSpPr>
-          <p:cNvPr id="216" name="Google Shape;216;p32"/>
+          <p:cNvPr id="215" name="Google Shape;215;p32"/>
           <p:cNvSpPr txBox="1"/>
           <p:nvPr/>
         </p:nvSpPr>
@@ -35772,7 +34961,7 @@
       </p:sp>
       <p:sp>
         <p:nvSpPr>
-          <p:cNvPr id="217" name="Google Shape;217;p32"/>
+          <p:cNvPr id="216" name="Google Shape;216;p32"/>
           <p:cNvSpPr txBox="1"/>
           <p:nvPr/>
         </p:nvSpPr>
@@ -35838,7 +35027,7 @@
       </p:sp>
       <p:sp>
         <p:nvSpPr>
-          <p:cNvPr id="218" name="Google Shape;218;p32"/>
+          <p:cNvPr id="217" name="Google Shape;217;p32"/>
           <p:cNvSpPr/>
           <p:nvPr/>
         </p:nvSpPr>
@@ -35903,7 +35092,7 @@
       </p:sp>
       <p:sp>
         <p:nvSpPr>
-          <p:cNvPr id="219" name="Google Shape;219;p32"/>
+          <p:cNvPr id="218" name="Google Shape;218;p32"/>
           <p:cNvSpPr/>
           <p:nvPr/>
         </p:nvSpPr>
@@ -35962,7 +35151,7 @@
       </p:sp>
       <p:sp>
         <p:nvSpPr>
-          <p:cNvPr id="220" name="Google Shape;220;p32"/>
+          <p:cNvPr id="219" name="Google Shape;219;p32"/>
           <p:cNvSpPr txBox="1"/>
           <p:nvPr/>
         </p:nvSpPr>
@@ -36028,7 +35217,7 @@
       </p:sp>
       <p:sp>
         <p:nvSpPr>
-          <p:cNvPr id="221" name="Google Shape;221;p32"/>
+          <p:cNvPr id="220" name="Google Shape;220;p32"/>
           <p:cNvSpPr txBox="1"/>
           <p:nvPr/>
         </p:nvSpPr>
@@ -36134,7 +35323,7 @@
       </p:sp>
       <p:sp>
         <p:nvSpPr>
-          <p:cNvPr id="222" name="Google Shape;222;p32"/>
+          <p:cNvPr id="221" name="Google Shape;221;p32"/>
           <p:cNvSpPr txBox="1"/>
           <p:nvPr/>
         </p:nvSpPr>
@@ -36240,7 +35429,7 @@
       </p:sp>
       <p:sp>
         <p:nvSpPr>
-          <p:cNvPr id="223" name="Google Shape;223;p32"/>
+          <p:cNvPr id="222" name="Google Shape;222;p32"/>
           <p:cNvSpPr txBox="1"/>
           <p:nvPr/>
         </p:nvSpPr>
@@ -36346,7 +35535,7 @@
       </p:sp>
       <p:sp>
         <p:nvSpPr>
-          <p:cNvPr id="224" name="Google Shape;224;p32"/>
+          <p:cNvPr id="223" name="Google Shape;223;p32"/>
           <p:cNvSpPr txBox="1"/>
           <p:nvPr/>
         </p:nvSpPr>
@@ -36452,7 +35641,7 @@
       </p:sp>
       <p:sp>
         <p:nvSpPr>
-          <p:cNvPr id="225" name="Google Shape;225;p32"/>
+          <p:cNvPr id="224" name="Google Shape;224;p32"/>
           <p:cNvSpPr txBox="1"/>
           <p:nvPr/>
         </p:nvSpPr>
@@ -36558,7 +35747,7 @@
       </p:sp>
       <p:sp>
         <p:nvSpPr>
-          <p:cNvPr id="226" name="Google Shape;226;p32"/>
+          <p:cNvPr id="225" name="Google Shape;225;p32"/>
           <p:cNvSpPr txBox="1"/>
           <p:nvPr/>
         </p:nvSpPr>
@@ -36636,7 +35825,7 @@
       </p:sp>
       <p:sp>
         <p:nvSpPr>
-          <p:cNvPr id="227" name="Google Shape;227;p32"/>
+          <p:cNvPr id="226" name="Google Shape;226;p32"/>
           <p:cNvSpPr/>
           <p:nvPr/>
         </p:nvSpPr>
@@ -36701,7 +35890,7 @@
       </p:sp>
       <p:sp>
         <p:nvSpPr>
-          <p:cNvPr id="228" name="Google Shape;228;p32"/>
+          <p:cNvPr id="227" name="Google Shape;227;p32"/>
           <p:cNvSpPr/>
           <p:nvPr/>
         </p:nvSpPr>
@@ -36760,7 +35949,7 @@
       </p:sp>
       <p:sp>
         <p:nvSpPr>
-          <p:cNvPr id="229" name="Google Shape;229;p32"/>
+          <p:cNvPr id="228" name="Google Shape;228;p32"/>
           <p:cNvSpPr txBox="1"/>
           <p:nvPr/>
         </p:nvSpPr>
@@ -36826,7 +36015,7 @@
       </p:sp>
       <p:sp>
         <p:nvSpPr>
-          <p:cNvPr id="230" name="Google Shape;230;p32"/>
+          <p:cNvPr id="229" name="Google Shape;229;p32"/>
           <p:cNvSpPr txBox="1"/>
           <p:nvPr/>
         </p:nvSpPr>
@@ -36932,7 +36121,7 @@
       </p:sp>
       <p:sp>
         <p:nvSpPr>
-          <p:cNvPr id="231" name="Google Shape;231;p32"/>
+          <p:cNvPr id="230" name="Google Shape;230;p32"/>
           <p:cNvSpPr txBox="1"/>
           <p:nvPr/>
         </p:nvSpPr>
@@ -37038,7 +36227,7 @@
       </p:sp>
       <p:sp>
         <p:nvSpPr>
-          <p:cNvPr id="232" name="Google Shape;232;p32"/>
+          <p:cNvPr id="231" name="Google Shape;231;p32"/>
           <p:cNvSpPr txBox="1"/>
           <p:nvPr/>
         </p:nvSpPr>
@@ -37144,7 +36333,7 @@
       </p:sp>
       <p:sp>
         <p:nvSpPr>
-          <p:cNvPr id="233" name="Google Shape;233;p32"/>
+          <p:cNvPr id="232" name="Google Shape;232;p32"/>
           <p:cNvSpPr txBox="1"/>
           <p:nvPr/>
         </p:nvSpPr>
@@ -37268,7 +36457,7 @@
     </p:bg>
     <p:spTree>
       <p:nvGrpSpPr>
-        <p:cNvPr id="237" name="Shape 237"/>
+        <p:cNvPr id="236" name="Shape 236"/>
         <p:cNvGrpSpPr/>
         <p:nvPr/>
       </p:nvGrpSpPr>
@@ -37282,14 +36471,14 @@
       </p:grpSpPr>
       <p:sp>
         <p:nvSpPr>
-          <p:cNvPr id="238" name="Google Shape;238;p33"/>
+          <p:cNvPr id="237" name="Google Shape;237;p33"/>
           <p:cNvSpPr txBox="1"/>
           <p:nvPr/>
         </p:nvSpPr>
         <p:spPr>
           <a:xfrm>
             <a:off x="502920" y="292608"/>
-            <a:ext cx="8229600" cy="292608"/>
+            <a:ext cx="8229600" cy="200055"/>
           </a:xfrm>
           <a:prstGeom prst="rect">
             <a:avLst/>
@@ -37332,7 +36521,7 @@
                 <a:cs typeface="Calibri"/>
                 <a:sym typeface="Calibri"/>
               </a:rPr>
-              <a:t>TECHNICAL FOUNDATION  ·  6 OF 8</a:t>
+              <a:t>TECHNICAL FOUNDATION  ·  6 OF 7</a:t>
             </a:r>
             <a:endParaRPr b="0" i="0" sz="1400" u="none" cap="none" strike="noStrike">
               <a:solidFill>
@@ -37348,7 +36537,7 @@
       </p:sp>
       <p:sp>
         <p:nvSpPr>
-          <p:cNvPr id="239" name="Google Shape;239;p33"/>
+          <p:cNvPr id="238" name="Google Shape;238;p33"/>
           <p:cNvSpPr txBox="1"/>
           <p:nvPr/>
         </p:nvSpPr>
@@ -37414,7 +36603,7 @@
       </p:sp>
       <p:sp>
         <p:nvSpPr>
-          <p:cNvPr id="240" name="Google Shape;240;p33"/>
+          <p:cNvPr id="239" name="Google Shape;239;p33"/>
           <p:cNvSpPr/>
           <p:nvPr/>
         </p:nvSpPr>
@@ -37473,7 +36662,7 @@
       </p:sp>
       <p:sp>
         <p:nvSpPr>
-          <p:cNvPr id="241" name="Google Shape;241;p33"/>
+          <p:cNvPr id="240" name="Google Shape;240;p33"/>
           <p:cNvSpPr txBox="1"/>
           <p:nvPr/>
         </p:nvSpPr>
@@ -37539,7 +36728,7 @@
       </p:sp>
       <p:sp>
         <p:nvSpPr>
-          <p:cNvPr id="242" name="Google Shape;242;p33"/>
+          <p:cNvPr id="241" name="Google Shape;241;p33"/>
           <p:cNvSpPr txBox="1"/>
           <p:nvPr/>
         </p:nvSpPr>
@@ -37605,73 +36794,7 @@
       </p:sp>
       <p:sp>
         <p:nvSpPr>
-          <p:cNvPr id="243" name="Google Shape;243;p33"/>
-          <p:cNvSpPr txBox="1"/>
-          <p:nvPr/>
-        </p:nvSpPr>
-        <p:spPr>
-          <a:xfrm>
-            <a:off x="502920" y="1389888"/>
-            <a:ext cx="11155680" cy="365760"/>
-          </a:xfrm>
-          <a:prstGeom prst="rect">
-            <a:avLst/>
-          </a:prstGeom>
-          <a:noFill/>
-          <a:ln>
-            <a:noFill/>
-          </a:ln>
-        </p:spPr>
-        <p:txBody>
-          <a:bodyPr anchorCtr="0" anchor="t" bIns="0" lIns="0" spcFirstLastPara="1" rIns="0" wrap="square" tIns="0">
-            <a:spAutoFit/>
-          </a:bodyPr>
-          <a:lstStyle/>
-          <a:p>
-            <a:pPr indent="0" lvl="0" marL="0" marR="0" rtl="0" algn="l">
-              <a:lnSpc>
-                <a:spcPct val="115000"/>
-              </a:lnSpc>
-              <a:spcBef>
-                <a:spcPts val="0"/>
-              </a:spcBef>
-              <a:spcAft>
-                <a:spcPts val="0"/>
-              </a:spcAft>
-              <a:buClr>
-                <a:srgbClr val="000000"/>
-              </a:buClr>
-              <a:buSzPts val="1500"/>
-              <a:buFont typeface="Arial"/>
-              <a:buNone/>
-            </a:pPr>
-            <a:r>
-              <a:rPr b="0" i="0" lang="en-US" sz="1500" u="none" cap="none" strike="noStrike">
-                <a:solidFill>
-                  <a:srgbClr val="222C37"/>
-                </a:solidFill>
-                <a:latin typeface="Calibri"/>
-                <a:ea typeface="Calibri"/>
-                <a:cs typeface="Calibri"/>
-                <a:sym typeface="Calibri"/>
-              </a:rPr>
-              <a:t>Six things could go wrong. Five are already contained by design; one is an open gap we are naming rather than hiding.</a:t>
-            </a:r>
-            <a:endParaRPr b="0" i="0" sz="1400" u="none" cap="none" strike="noStrike">
-              <a:solidFill>
-                <a:srgbClr val="000000"/>
-              </a:solidFill>
-              <a:latin typeface="Arial"/>
-              <a:ea typeface="Arial"/>
-              <a:cs typeface="Arial"/>
-              <a:sym typeface="Arial"/>
-            </a:endParaRPr>
-          </a:p>
-        </p:txBody>
-      </p:sp>
-      <p:sp>
-        <p:nvSpPr>
-          <p:cNvPr id="244" name="Google Shape;244;p33"/>
+          <p:cNvPr id="242" name="Google Shape;242;p33"/>
           <p:cNvSpPr/>
           <p:nvPr/>
         </p:nvSpPr>
@@ -37736,7 +36859,7 @@
       </p:sp>
       <p:sp>
         <p:nvSpPr>
-          <p:cNvPr id="245" name="Google Shape;245;p33"/>
+          <p:cNvPr id="243" name="Google Shape;243;p33"/>
           <p:cNvSpPr/>
           <p:nvPr/>
         </p:nvSpPr>
@@ -37795,7 +36918,7 @@
       </p:sp>
       <p:sp>
         <p:nvSpPr>
-          <p:cNvPr id="246" name="Google Shape;246;p33"/>
+          <p:cNvPr id="244" name="Google Shape;244;p33"/>
           <p:cNvSpPr txBox="1"/>
           <p:nvPr/>
         </p:nvSpPr>
@@ -37861,7 +36984,7 @@
       </p:sp>
       <p:sp>
         <p:nvSpPr>
-          <p:cNvPr id="247" name="Google Shape;247;p33"/>
+          <p:cNvPr id="245" name="Google Shape;245;p33"/>
           <p:cNvSpPr txBox="1"/>
           <p:nvPr/>
         </p:nvSpPr>
@@ -38007,7 +37130,7 @@
       </p:sp>
       <p:sp>
         <p:nvSpPr>
-          <p:cNvPr id="248" name="Google Shape;248;p33"/>
+          <p:cNvPr id="246" name="Google Shape;246;p33"/>
           <p:cNvSpPr/>
           <p:nvPr/>
         </p:nvSpPr>
@@ -38072,7 +37195,7 @@
       </p:sp>
       <p:sp>
         <p:nvSpPr>
-          <p:cNvPr id="249" name="Google Shape;249;p33"/>
+          <p:cNvPr id="247" name="Google Shape;247;p33"/>
           <p:cNvSpPr/>
           <p:nvPr/>
         </p:nvSpPr>
@@ -38131,7 +37254,7 @@
       </p:sp>
       <p:sp>
         <p:nvSpPr>
-          <p:cNvPr id="250" name="Google Shape;250;p33"/>
+          <p:cNvPr id="248" name="Google Shape;248;p33"/>
           <p:cNvSpPr txBox="1"/>
           <p:nvPr/>
         </p:nvSpPr>
@@ -38197,7 +37320,7 @@
       </p:sp>
       <p:sp>
         <p:nvSpPr>
-          <p:cNvPr id="251" name="Google Shape;251;p33"/>
+          <p:cNvPr id="249" name="Google Shape;249;p33"/>
           <p:cNvSpPr txBox="1"/>
           <p:nvPr/>
         </p:nvSpPr>
@@ -38343,7 +37466,7 @@
       </p:sp>
       <p:sp>
         <p:nvSpPr>
-          <p:cNvPr id="252" name="Google Shape;252;p33"/>
+          <p:cNvPr id="250" name="Google Shape;250;p33"/>
           <p:cNvSpPr/>
           <p:nvPr/>
         </p:nvSpPr>
@@ -38408,7 +37531,7 @@
       </p:sp>
       <p:sp>
         <p:nvSpPr>
-          <p:cNvPr id="253" name="Google Shape;253;p33"/>
+          <p:cNvPr id="251" name="Google Shape;251;p33"/>
           <p:cNvSpPr/>
           <p:nvPr/>
         </p:nvSpPr>
@@ -38467,7 +37590,7 @@
       </p:sp>
       <p:sp>
         <p:nvSpPr>
-          <p:cNvPr id="254" name="Google Shape;254;p33"/>
+          <p:cNvPr id="252" name="Google Shape;252;p33"/>
           <p:cNvSpPr txBox="1"/>
           <p:nvPr/>
         </p:nvSpPr>
@@ -38533,7 +37656,7 @@
       </p:sp>
       <p:sp>
         <p:nvSpPr>
-          <p:cNvPr id="255" name="Google Shape;255;p33"/>
+          <p:cNvPr id="253" name="Google Shape;253;p33"/>
           <p:cNvSpPr txBox="1"/>
           <p:nvPr/>
         </p:nvSpPr>
@@ -38679,7 +37802,7 @@
       </p:sp>
       <p:sp>
         <p:nvSpPr>
-          <p:cNvPr id="256" name="Google Shape;256;p33"/>
+          <p:cNvPr id="254" name="Google Shape;254;p33"/>
           <p:cNvSpPr/>
           <p:nvPr/>
         </p:nvSpPr>
@@ -38744,7 +37867,7 @@
       </p:sp>
       <p:sp>
         <p:nvSpPr>
-          <p:cNvPr id="257" name="Google Shape;257;p33"/>
+          <p:cNvPr id="255" name="Google Shape;255;p33"/>
           <p:cNvSpPr/>
           <p:nvPr/>
         </p:nvSpPr>
@@ -38803,7 +37926,7 @@
       </p:sp>
       <p:sp>
         <p:nvSpPr>
-          <p:cNvPr id="258" name="Google Shape;258;p33"/>
+          <p:cNvPr id="256" name="Google Shape;256;p33"/>
           <p:cNvSpPr txBox="1"/>
           <p:nvPr/>
         </p:nvSpPr>
@@ -38869,7 +37992,7 @@
       </p:sp>
       <p:sp>
         <p:nvSpPr>
-          <p:cNvPr id="259" name="Google Shape;259;p33"/>
+          <p:cNvPr id="257" name="Google Shape;257;p33"/>
           <p:cNvSpPr txBox="1"/>
           <p:nvPr/>
         </p:nvSpPr>
@@ -39015,343 +38138,7 @@
       </p:sp>
       <p:sp>
         <p:nvSpPr>
-          <p:cNvPr id="260" name="Google Shape;260;p33"/>
-          <p:cNvSpPr/>
-          <p:nvPr/>
-        </p:nvSpPr>
-        <p:spPr>
-          <a:xfrm>
-            <a:off x="4311396" y="4114800"/>
-            <a:ext cx="3566160" cy="2139696"/>
-          </a:xfrm>
-          <a:prstGeom prst="rect">
-            <a:avLst/>
-          </a:prstGeom>
-          <a:solidFill>
-            <a:srgbClr val="FFFFFF"/>
-          </a:solidFill>
-          <a:ln cap="flat" cmpd="sng" w="15875">
-            <a:solidFill>
-              <a:srgbClr val="E0793A"/>
-            </a:solidFill>
-            <a:prstDash val="solid"/>
-            <a:round/>
-            <a:headEnd len="sm" w="sm" type="none"/>
-            <a:tailEnd len="sm" w="sm" type="none"/>
-          </a:ln>
-        </p:spPr>
-        <p:txBody>
-          <a:bodyPr anchorCtr="0" anchor="ctr" bIns="45700" lIns="91425" spcFirstLastPara="1" rIns="91425" wrap="square" tIns="45700">
-            <a:noAutofit/>
-          </a:bodyPr>
-          <a:lstStyle/>
-          <a:p>
-            <a:pPr indent="0" lvl="0" marL="0" marR="0" rtl="0" algn="ctr">
-              <a:lnSpc>
-                <a:spcPct val="100000"/>
-              </a:lnSpc>
-              <a:spcBef>
-                <a:spcPts val="0"/>
-              </a:spcBef>
-              <a:spcAft>
-                <a:spcPts val="0"/>
-              </a:spcAft>
-              <a:buClr>
-                <a:srgbClr val="000000"/>
-              </a:buClr>
-              <a:buSzPts val="1400"/>
-              <a:buFont typeface="Arial"/>
-              <a:buNone/>
-            </a:pPr>
-            <a:r>
-              <a:t/>
-            </a:r>
-            <a:endParaRPr b="0" i="0" sz="1400" u="none" cap="none" strike="noStrike">
-              <a:solidFill>
-                <a:schemeClr val="lt1"/>
-              </a:solidFill>
-              <a:latin typeface="Arial"/>
-              <a:ea typeface="Arial"/>
-              <a:cs typeface="Arial"/>
-              <a:sym typeface="Arial"/>
-            </a:endParaRPr>
-          </a:p>
-        </p:txBody>
-      </p:sp>
-      <p:sp>
-        <p:nvSpPr>
-          <p:cNvPr id="261" name="Google Shape;261;p33"/>
-          <p:cNvSpPr/>
-          <p:nvPr/>
-        </p:nvSpPr>
-        <p:spPr>
-          <a:xfrm>
-            <a:off x="4311396" y="4114800"/>
-            <a:ext cx="3566160" cy="457200"/>
-          </a:xfrm>
-          <a:prstGeom prst="rect">
-            <a:avLst/>
-          </a:prstGeom>
-          <a:solidFill>
-            <a:srgbClr val="E0793A"/>
-          </a:solidFill>
-          <a:ln>
-            <a:noFill/>
-          </a:ln>
-        </p:spPr>
-        <p:txBody>
-          <a:bodyPr anchorCtr="0" anchor="ctr" bIns="45700" lIns="91425" spcFirstLastPara="1" rIns="91425" wrap="square" tIns="45700">
-            <a:noAutofit/>
-          </a:bodyPr>
-          <a:lstStyle/>
-          <a:p>
-            <a:pPr indent="0" lvl="0" marL="0" marR="0" rtl="0" algn="ctr">
-              <a:lnSpc>
-                <a:spcPct val="100000"/>
-              </a:lnSpc>
-              <a:spcBef>
-                <a:spcPts val="0"/>
-              </a:spcBef>
-              <a:spcAft>
-                <a:spcPts val="0"/>
-              </a:spcAft>
-              <a:buClr>
-                <a:srgbClr val="000000"/>
-              </a:buClr>
-              <a:buSzPts val="1400"/>
-              <a:buFont typeface="Arial"/>
-              <a:buNone/>
-            </a:pPr>
-            <a:r>
-              <a:t/>
-            </a:r>
-            <a:endParaRPr b="0" i="0" sz="1400" u="none" cap="none" strike="noStrike">
-              <a:solidFill>
-                <a:schemeClr val="lt1"/>
-              </a:solidFill>
-              <a:latin typeface="Arial"/>
-              <a:ea typeface="Arial"/>
-              <a:cs typeface="Arial"/>
-              <a:sym typeface="Arial"/>
-            </a:endParaRPr>
-          </a:p>
-        </p:txBody>
-      </p:sp>
-      <p:sp>
-        <p:nvSpPr>
-          <p:cNvPr id="262" name="Google Shape;262;p33"/>
-          <p:cNvSpPr txBox="1"/>
-          <p:nvPr/>
-        </p:nvSpPr>
-        <p:spPr>
-          <a:xfrm>
-            <a:off x="4494276" y="4114800"/>
-            <a:ext cx="3200400" cy="457200"/>
-          </a:xfrm>
-          <a:prstGeom prst="rect">
-            <a:avLst/>
-          </a:prstGeom>
-          <a:noFill/>
-          <a:ln>
-            <a:noFill/>
-          </a:ln>
-        </p:spPr>
-        <p:txBody>
-          <a:bodyPr anchorCtr="0" anchor="ctr" bIns="0" lIns="0" spcFirstLastPara="1" rIns="0" wrap="square" tIns="0">
-            <a:spAutoFit/>
-          </a:bodyPr>
-          <a:lstStyle/>
-          <a:p>
-            <a:pPr indent="0" lvl="0" marL="0" marR="0" rtl="0" algn="l">
-              <a:lnSpc>
-                <a:spcPct val="100000"/>
-              </a:lnSpc>
-              <a:spcBef>
-                <a:spcPts val="0"/>
-              </a:spcBef>
-              <a:spcAft>
-                <a:spcPts val="0"/>
-              </a:spcAft>
-              <a:buClr>
-                <a:srgbClr val="000000"/>
-              </a:buClr>
-              <a:buSzPts val="1300"/>
-              <a:buFont typeface="Arial"/>
-              <a:buNone/>
-            </a:pPr>
-            <a:r>
-              <a:rPr b="1" i="0" lang="en-US" sz="1300" u="none" cap="none" strike="noStrike">
-                <a:solidFill>
-                  <a:srgbClr val="FFFFFF"/>
-                </a:solidFill>
-                <a:latin typeface="Calibri"/>
-                <a:ea typeface="Calibri"/>
-                <a:cs typeface="Calibri"/>
-                <a:sym typeface="Calibri"/>
-              </a:rPr>
-              <a:t>Payment reconciliation not enforced</a:t>
-            </a:r>
-            <a:endParaRPr b="0" i="0" sz="1400" u="none" cap="none" strike="noStrike">
-              <a:solidFill>
-                <a:srgbClr val="000000"/>
-              </a:solidFill>
-              <a:latin typeface="Arial"/>
-              <a:ea typeface="Arial"/>
-              <a:cs typeface="Arial"/>
-              <a:sym typeface="Arial"/>
-            </a:endParaRPr>
-          </a:p>
-        </p:txBody>
-      </p:sp>
-      <p:sp>
-        <p:nvSpPr>
-          <p:cNvPr id="263" name="Google Shape;263;p33"/>
-          <p:cNvSpPr txBox="1"/>
-          <p:nvPr/>
-        </p:nvSpPr>
-        <p:spPr>
-          <a:xfrm>
-            <a:off x="4494276" y="4700016"/>
-            <a:ext cx="3200400" cy="1463040"/>
-          </a:xfrm>
-          <a:prstGeom prst="rect">
-            <a:avLst/>
-          </a:prstGeom>
-          <a:noFill/>
-          <a:ln>
-            <a:noFill/>
-          </a:ln>
-        </p:spPr>
-        <p:txBody>
-          <a:bodyPr anchorCtr="0" anchor="t" bIns="0" lIns="0" spcFirstLastPara="1" rIns="0" wrap="square" tIns="0">
-            <a:spAutoFit/>
-          </a:bodyPr>
-          <a:lstStyle/>
-          <a:p>
-            <a:pPr indent="0" lvl="0" marL="0" marR="0" rtl="0" algn="l">
-              <a:lnSpc>
-                <a:spcPct val="118000"/>
-              </a:lnSpc>
-              <a:spcBef>
-                <a:spcPts val="0"/>
-              </a:spcBef>
-              <a:spcAft>
-                <a:spcPts val="0"/>
-              </a:spcAft>
-              <a:buClr>
-                <a:srgbClr val="000000"/>
-              </a:buClr>
-              <a:buSzPts val="1150"/>
-              <a:buFont typeface="Arial"/>
-              <a:buNone/>
-            </a:pPr>
-            <a:r>
-              <a:rPr b="0" i="0" lang="en-US" sz="1150" u="none" cap="none" strike="noStrike">
-                <a:solidFill>
-                  <a:srgbClr val="222C37"/>
-                </a:solidFill>
-                <a:latin typeface="Calibri"/>
-                <a:ea typeface="Calibri"/>
-                <a:cs typeface="Calibri"/>
-                <a:sym typeface="Calibri"/>
-              </a:rPr>
-              <a:t>Reconciliation flags exist in the marts, but no test blocks on a tolerance.</a:t>
-            </a:r>
-            <a:endParaRPr b="0" i="0" sz="1400" u="none" cap="none" strike="noStrike">
-              <a:solidFill>
-                <a:srgbClr val="000000"/>
-              </a:solidFill>
-              <a:latin typeface="Arial"/>
-              <a:ea typeface="Arial"/>
-              <a:cs typeface="Arial"/>
-              <a:sym typeface="Arial"/>
-            </a:endParaRPr>
-          </a:p>
-          <a:p>
-            <a:pPr indent="0" lvl="0" marL="0" marR="0" rtl="0" algn="l">
-              <a:lnSpc>
-                <a:spcPct val="100000"/>
-              </a:lnSpc>
-              <a:spcBef>
-                <a:spcPts val="800"/>
-              </a:spcBef>
-              <a:spcAft>
-                <a:spcPts val="0"/>
-              </a:spcAft>
-              <a:buClr>
-                <a:srgbClr val="000000"/>
-              </a:buClr>
-              <a:buSzPts val="900"/>
-              <a:buFont typeface="Arial"/>
-              <a:buNone/>
-            </a:pPr>
-            <a:r>
-              <a:rPr b="1" i="0" lang="en-US" sz="900" u="none" cap="none" strike="noStrike">
-                <a:solidFill>
-                  <a:srgbClr val="E0793A"/>
-                </a:solidFill>
-                <a:latin typeface="Calibri"/>
-                <a:ea typeface="Calibri"/>
-                <a:cs typeface="Calibri"/>
-                <a:sym typeface="Calibri"/>
-              </a:rPr>
-              <a:t>OPEN GAP</a:t>
-            </a:r>
-            <a:endParaRPr b="0" i="0" sz="1400" u="none" cap="none" strike="noStrike">
-              <a:solidFill>
-                <a:srgbClr val="000000"/>
-              </a:solidFill>
-              <a:latin typeface="Arial"/>
-              <a:ea typeface="Arial"/>
-              <a:cs typeface="Arial"/>
-              <a:sym typeface="Arial"/>
-            </a:endParaRPr>
-          </a:p>
-          <a:p>
-            <a:pPr indent="0" lvl="0" marL="0" marR="0" rtl="0" algn="l">
-              <a:lnSpc>
-                <a:spcPct val="118000"/>
-              </a:lnSpc>
-              <a:spcBef>
-                <a:spcPts val="300"/>
-              </a:spcBef>
-              <a:spcAft>
-                <a:spcPts val="0"/>
-              </a:spcAft>
-              <a:buClr>
-                <a:srgbClr val="000000"/>
-              </a:buClr>
-              <a:buSzPts val="1150"/>
-              <a:buFont typeface="Arial"/>
-              <a:buNone/>
-            </a:pPr>
-            <a:r>
-              <a:rPr b="0" i="0" lang="en-US" sz="1150" u="none" cap="none" strike="noStrike">
-                <a:solidFill>
-                  <a:srgbClr val="5B6B7A"/>
-                </a:solidFill>
-                <a:latin typeface="Calibri"/>
-                <a:ea typeface="Calibri"/>
-                <a:cs typeface="Calibri"/>
-                <a:sym typeface="Calibri"/>
-              </a:rPr>
-              <a:t>Documented as an open gap rather than a silent one. Next: a blocking test at a tolerance finance agrees.</a:t>
-            </a:r>
-            <a:endParaRPr b="0" i="0" sz="1400" u="none" cap="none" strike="noStrike">
-              <a:solidFill>
-                <a:srgbClr val="000000"/>
-              </a:solidFill>
-              <a:latin typeface="Arial"/>
-              <a:ea typeface="Arial"/>
-              <a:cs typeface="Arial"/>
-              <a:sym typeface="Arial"/>
-            </a:endParaRPr>
-          </a:p>
-        </p:txBody>
-      </p:sp>
-      <p:sp>
-        <p:nvSpPr>
-          <p:cNvPr id="264" name="Google Shape;264;p33"/>
+          <p:cNvPr id="258" name="Google Shape;258;p33"/>
           <p:cNvSpPr/>
           <p:nvPr/>
         </p:nvSpPr>
@@ -39416,7 +38203,7 @@
       </p:sp>
       <p:sp>
         <p:nvSpPr>
-          <p:cNvPr id="265" name="Google Shape;265;p33"/>
+          <p:cNvPr id="259" name="Google Shape;259;p33"/>
           <p:cNvSpPr/>
           <p:nvPr/>
         </p:nvSpPr>
@@ -39475,7 +38262,7 @@
       </p:sp>
       <p:sp>
         <p:nvSpPr>
-          <p:cNvPr id="266" name="Google Shape;266;p33"/>
+          <p:cNvPr id="260" name="Google Shape;260;p33"/>
           <p:cNvSpPr txBox="1"/>
           <p:nvPr/>
         </p:nvSpPr>
@@ -39541,7 +38328,7 @@
       </p:sp>
       <p:sp>
         <p:nvSpPr>
-          <p:cNvPr id="267" name="Google Shape;267;p33"/>
+          <p:cNvPr id="261" name="Google Shape;261;p33"/>
           <p:cNvSpPr txBox="1"/>
           <p:nvPr/>
         </p:nvSpPr>
@@ -39694,6 +38481,285 @@
 </file>
 
 <file path=ppt/theme/theme1.xml><?xml version="1.0" encoding="utf-8"?>
+<a:theme xmlns:a="http://schemas.openxmlformats.org/drawingml/2006/main" xmlns:r="http://schemas.openxmlformats.org/officeDocument/2006/relationships">
+  <a:themeElements>
+    <a:clrScheme name="Default">
+      <a:dk1>
+        <a:srgbClr val="000000"/>
+      </a:dk1>
+      <a:lt1>
+        <a:srgbClr val="FFFFFF"/>
+      </a:lt1>
+      <a:dk2>
+        <a:srgbClr val="158158"/>
+      </a:dk2>
+      <a:lt2>
+        <a:srgbClr val="F3F3F3"/>
+      </a:lt2>
+      <a:accent1>
+        <a:srgbClr val="058DC7"/>
+      </a:accent1>
+      <a:accent2>
+        <a:srgbClr val="50B432"/>
+      </a:accent2>
+      <a:accent3>
+        <a:srgbClr val="ED561B"/>
+      </a:accent3>
+      <a:accent4>
+        <a:srgbClr val="EDEF00"/>
+      </a:accent4>
+      <a:accent5>
+        <a:srgbClr val="24CBE5"/>
+      </a:accent5>
+      <a:accent6>
+        <a:srgbClr val="64E572"/>
+      </a:accent6>
+      <a:hlink>
+        <a:srgbClr val="2200CC"/>
+      </a:hlink>
+      <a:folHlink>
+        <a:srgbClr val="551A8B"/>
+      </a:folHlink>
+    </a:clrScheme>
+    <a:fontScheme name="Office">
+      <a:majorFont>
+        <a:latin typeface="Arial"/>
+        <a:ea typeface=""/>
+        <a:cs typeface=""/>
+        <a:font script="Jpan" typeface="ＭＳ Ｐゴシック"/>
+        <a:font script="Hang" typeface="맑은 고딕"/>
+        <a:font script="Hans" typeface="宋体"/>
+        <a:font script="Hant" typeface="新細明體"/>
+        <a:font script="Arab" typeface="Times New Roman"/>
+        <a:font script="Hebr" typeface="Times New Roman"/>
+        <a:font script="Thai" typeface="Angsana New"/>
+        <a:font script="Ethi" typeface="Nyala"/>
+        <a:font script="Beng" typeface="Vrinda"/>
+        <a:font script="Gujr" typeface="Shruti"/>
+        <a:font script="Khmr" typeface="MoolBoran"/>
+        <a:font script="Knda" typeface="Tunga"/>
+        <a:font script="Guru" typeface="Raavi"/>
+        <a:font script="Cans" typeface="Euphemia"/>
+        <a:font script="Cher" typeface="Plantagenet Cherokee"/>
+        <a:font script="Yiii" typeface="Microsoft Yi Baiti"/>
+        <a:font script="Tibt" typeface="Microsoft Himalaya"/>
+        <a:font script="Thaa" typeface="MV Boli"/>
+        <a:font script="Deva" typeface="Mangal"/>
+        <a:font script="Telu" typeface="Gautami"/>
+        <a:font script="Taml" typeface="Latha"/>
+        <a:font script="Syrc" typeface="Estrangelo Edessa"/>
+        <a:font script="Orya" typeface="Kalinga"/>
+        <a:font script="Mlym" typeface="Kartika"/>
+        <a:font script="Laoo" typeface="DokChampa"/>
+        <a:font script="Sinh" typeface="Iskoola Pota"/>
+        <a:font script="Mong" typeface="Mongolian Baiti"/>
+        <a:font script="Viet" typeface="Times New Roman"/>
+        <a:font script="Uigh" typeface="Microsoft Uighur"/>
+        <a:font script="Geor" typeface="Sylfaen"/>
+      </a:majorFont>
+      <a:minorFont>
+        <a:latin typeface="Arial"/>
+        <a:ea typeface=""/>
+        <a:cs typeface=""/>
+        <a:font script="Jpan" typeface="ＭＳ Ｐゴシック"/>
+        <a:font script="Hang" typeface="맑은 고딕"/>
+        <a:font script="Hans" typeface="宋体"/>
+        <a:font script="Hant" typeface="新細明體"/>
+        <a:font script="Arab" typeface="Arial"/>
+        <a:font script="Hebr" typeface="Arial"/>
+        <a:font script="Thai" typeface="Cordia New"/>
+        <a:font script="Ethi" typeface="Nyala"/>
+        <a:font script="Beng" typeface="Vrinda"/>
+        <a:font script="Gujr" typeface="Shruti"/>
+        <a:font script="Khmr" typeface="DaunPenh"/>
+        <a:font script="Knda" typeface="Tunga"/>
+        <a:font script="Guru" typeface="Raavi"/>
+        <a:font script="Cans" typeface="Euphemia"/>
+        <a:font script="Cher" typeface="Plantagenet Cherokee"/>
+        <a:font script="Yiii" typeface="Microsoft Yi Baiti"/>
+        <a:font script="Tibt" typeface="Microsoft Himalaya"/>
+        <a:font script="Thaa" typeface="MV Boli"/>
+        <a:font script="Deva" typeface="Mangal"/>
+        <a:font script="Telu" typeface="Gautami"/>
+        <a:font script="Taml" typeface="Latha"/>
+        <a:font script="Syrc" typeface="Estrangelo Edessa"/>
+        <a:font script="Orya" typeface="Kalinga"/>
+        <a:font script="Mlym" typeface="Kartika"/>
+        <a:font script="Laoo" typeface="DokChampa"/>
+        <a:font script="Sinh" typeface="Iskoola Pota"/>
+        <a:font script="Mong" typeface="Mongolian Baiti"/>
+        <a:font script="Viet" typeface="Arial"/>
+        <a:font script="Uigh" typeface="Microsoft Uighur"/>
+        <a:font script="Geor" typeface="Sylfaen"/>
+      </a:minorFont>
+    </a:fontScheme>
+    <a:fmtScheme name="Office">
+      <a:fillStyleLst>
+        <a:solidFill>
+          <a:schemeClr val="phClr"/>
+        </a:solidFill>
+        <a:gradFill rotWithShape="1">
+          <a:gsLst>
+            <a:gs pos="0">
+              <a:schemeClr val="phClr">
+                <a:tint val="50000"/>
+                <a:satMod val="300000"/>
+              </a:schemeClr>
+            </a:gs>
+            <a:gs pos="35000">
+              <a:schemeClr val="phClr">
+                <a:tint val="37000"/>
+                <a:satMod val="300000"/>
+              </a:schemeClr>
+            </a:gs>
+            <a:gs pos="100000">
+              <a:schemeClr val="phClr">
+                <a:tint val="15000"/>
+                <a:satMod val="350000"/>
+              </a:schemeClr>
+            </a:gs>
+          </a:gsLst>
+          <a:lin ang="16200000" scaled="1"/>
+        </a:gradFill>
+        <a:gradFill rotWithShape="1">
+          <a:gsLst>
+            <a:gs pos="0">
+              <a:schemeClr val="phClr">
+                <a:tint val="100000"/>
+                <a:shade val="100000"/>
+                <a:satMod val="130000"/>
+              </a:schemeClr>
+            </a:gs>
+            <a:gs pos="100000">
+              <a:schemeClr val="phClr">
+                <a:tint val="50000"/>
+                <a:shade val="100000"/>
+                <a:satMod val="350000"/>
+              </a:schemeClr>
+            </a:gs>
+          </a:gsLst>
+          <a:lin ang="16200000" scaled="0"/>
+        </a:gradFill>
+      </a:fillStyleLst>
+      <a:lnStyleLst>
+        <a:ln w="9525" cap="flat" cmpd="sng" algn="ctr">
+          <a:solidFill>
+            <a:schemeClr val="phClr">
+              <a:shade val="95000"/>
+              <a:satMod val="105000"/>
+            </a:schemeClr>
+          </a:solidFill>
+          <a:prstDash val="solid"/>
+        </a:ln>
+        <a:ln w="25400" cap="flat" cmpd="sng" algn="ctr">
+          <a:solidFill>
+            <a:schemeClr val="phClr"/>
+          </a:solidFill>
+          <a:prstDash val="solid"/>
+        </a:ln>
+        <a:ln w="38100" cap="flat" cmpd="sng" algn="ctr">
+          <a:solidFill>
+            <a:schemeClr val="phClr"/>
+          </a:solidFill>
+          <a:prstDash val="solid"/>
+        </a:ln>
+      </a:lnStyleLst>
+      <a:effectStyleLst>
+        <a:effectStyle>
+          <a:effectLst>
+            <a:outerShdw blurRad="40000" dist="20000" dir="5400000" rotWithShape="0">
+              <a:srgbClr val="000000">
+                <a:alpha val="38000"/>
+              </a:srgbClr>
+            </a:outerShdw>
+          </a:effectLst>
+        </a:effectStyle>
+        <a:effectStyle>
+          <a:effectLst>
+            <a:outerShdw blurRad="40000" dist="23000" dir="5400000" rotWithShape="0">
+              <a:srgbClr val="000000">
+                <a:alpha val="35000"/>
+              </a:srgbClr>
+            </a:outerShdw>
+          </a:effectLst>
+        </a:effectStyle>
+        <a:effectStyle>
+          <a:effectLst>
+            <a:outerShdw blurRad="40000" dist="23000" dir="5400000" rotWithShape="0">
+              <a:srgbClr val="000000">
+                <a:alpha val="35000"/>
+              </a:srgbClr>
+            </a:outerShdw>
+          </a:effectLst>
+          <a:scene3d>
+            <a:camera prst="orthographicFront">
+              <a:rot lat="0" lon="0" rev="0"/>
+            </a:camera>
+            <a:lightRig rig="threePt" dir="t">
+              <a:rot lat="0" lon="0" rev="1200000"/>
+            </a:lightRig>
+          </a:scene3d>
+          <a:sp3d>
+            <a:bevelT w="63500" h="25400"/>
+          </a:sp3d>
+        </a:effectStyle>
+      </a:effectStyleLst>
+      <a:bgFillStyleLst>
+        <a:solidFill>
+          <a:schemeClr val="phClr"/>
+        </a:solidFill>
+        <a:gradFill rotWithShape="1">
+          <a:gsLst>
+            <a:gs pos="0">
+              <a:schemeClr val="phClr">
+                <a:tint val="40000"/>
+                <a:satMod val="350000"/>
+              </a:schemeClr>
+            </a:gs>
+            <a:gs pos="40000">
+              <a:schemeClr val="phClr">
+                <a:tint val="45000"/>
+                <a:shade val="99000"/>
+                <a:satMod val="350000"/>
+              </a:schemeClr>
+            </a:gs>
+            <a:gs pos="100000">
+              <a:schemeClr val="phClr">
+                <a:shade val="20000"/>
+                <a:satMod val="255000"/>
+              </a:schemeClr>
+            </a:gs>
+          </a:gsLst>
+          <a:path path="circle">
+            <a:fillToRect l="50000" t="-80000" r="50000" b="180000"/>
+          </a:path>
+        </a:gradFill>
+        <a:gradFill rotWithShape="1">
+          <a:gsLst>
+            <a:gs pos="0">
+              <a:schemeClr val="phClr">
+                <a:tint val="80000"/>
+                <a:satMod val="300000"/>
+              </a:schemeClr>
+            </a:gs>
+            <a:gs pos="100000">
+              <a:schemeClr val="phClr">
+                <a:shade val="30000"/>
+                <a:satMod val="200000"/>
+              </a:schemeClr>
+            </a:gs>
+          </a:gsLst>
+          <a:path path="circle">
+            <a:fillToRect l="50000" t="50000" r="50000" b="50000"/>
+          </a:path>
+        </a:gradFill>
+      </a:bgFillStyleLst>
+    </a:fmtScheme>
+  </a:themeElements>
+</a:theme>
+</file>
+
+<file path=ppt/theme/theme2.xml><?xml version="1.0" encoding="utf-8"?>
 <a:theme xmlns:a="http://schemas.openxmlformats.org/drawingml/2006/main" xmlns:r="http://schemas.openxmlformats.org/officeDocument/2006/relationships" name="Office Theme">
   <a:themeElements>
     <a:clrScheme name="Office">
@@ -39970,283 +39036,4 @@
     </a:fmtScheme>
   </a:themeElements>
 </a:theme>
-</file>
-
-<file path=ppt/theme/theme2.xml><?xml version="1.0" encoding="utf-8"?>
-<a:theme xmlns:a="http://schemas.openxmlformats.org/drawingml/2006/main" xmlns:r="http://schemas.openxmlformats.org/officeDocument/2006/relationships">
-  <a:themeElements>
-    <a:clrScheme name="Default">
-      <a:dk1>
-        <a:srgbClr val="000000"/>
-      </a:dk1>
-      <a:lt1>
-        <a:srgbClr val="FFFFFF"/>
-      </a:lt1>
-      <a:dk2>
-        <a:srgbClr val="158158"/>
-      </a:dk2>
-      <a:lt2>
-        <a:srgbClr val="F3F3F3"/>
-      </a:lt2>
-      <a:accent1>
-        <a:srgbClr val="058DC7"/>
-      </a:accent1>
-      <a:accent2>
-        <a:srgbClr val="50B432"/>
-      </a:accent2>
-      <a:accent3>
-        <a:srgbClr val="ED561B"/>
-      </a:accent3>
-      <a:accent4>
-        <a:srgbClr val="EDEF00"/>
-      </a:accent4>
-      <a:accent5>
-        <a:srgbClr val="24CBE5"/>
-      </a:accent5>
-      <a:accent6>
-        <a:srgbClr val="64E572"/>
-      </a:accent6>
-      <a:hlink>
-        <a:srgbClr val="2200CC"/>
-      </a:hlink>
-      <a:folHlink>
-        <a:srgbClr val="551A8B"/>
-      </a:folHlink>
-    </a:clrScheme>
-    <a:fontScheme name="Office">
-      <a:majorFont>
-        <a:latin typeface="Arial"/>
-        <a:ea typeface=""/>
-        <a:cs typeface=""/>
-        <a:font script="Jpan" typeface="ＭＳ Ｐゴシック"/>
-        <a:font script="Hang" typeface="맑은 고딕"/>
-        <a:font script="Hans" typeface="宋体"/>
-        <a:font script="Hant" typeface="新細明體"/>
-        <a:font script="Arab" typeface="Times New Roman"/>
-        <a:font script="Hebr" typeface="Times New Roman"/>
-        <a:font script="Thai" typeface="Angsana New"/>
-        <a:font script="Ethi" typeface="Nyala"/>
-        <a:font script="Beng" typeface="Vrinda"/>
-        <a:font script="Gujr" typeface="Shruti"/>
-        <a:font script="Khmr" typeface="MoolBoran"/>
-        <a:font script="Knda" typeface="Tunga"/>
-        <a:font script="Guru" typeface="Raavi"/>
-        <a:font script="Cans" typeface="Euphemia"/>
-        <a:font script="Cher" typeface="Plantagenet Cherokee"/>
-        <a:font script="Yiii" typeface="Microsoft Yi Baiti"/>
-        <a:font script="Tibt" typeface="Microsoft Himalaya"/>
-        <a:font script="Thaa" typeface="MV Boli"/>
-        <a:font script="Deva" typeface="Mangal"/>
-        <a:font script="Telu" typeface="Gautami"/>
-        <a:font script="Taml" typeface="Latha"/>
-        <a:font script="Syrc" typeface="Estrangelo Edessa"/>
-        <a:font script="Orya" typeface="Kalinga"/>
-        <a:font script="Mlym" typeface="Kartika"/>
-        <a:font script="Laoo" typeface="DokChampa"/>
-        <a:font script="Sinh" typeface="Iskoola Pota"/>
-        <a:font script="Mong" typeface="Mongolian Baiti"/>
-        <a:font script="Viet" typeface="Times New Roman"/>
-        <a:font script="Uigh" typeface="Microsoft Uighur"/>
-        <a:font script="Geor" typeface="Sylfaen"/>
-      </a:majorFont>
-      <a:minorFont>
-        <a:latin typeface="Arial"/>
-        <a:ea typeface=""/>
-        <a:cs typeface=""/>
-        <a:font script="Jpan" typeface="ＭＳ Ｐゴシック"/>
-        <a:font script="Hang" typeface="맑은 고딕"/>
-        <a:font script="Hans" typeface="宋体"/>
-        <a:font script="Hant" typeface="新細明體"/>
-        <a:font script="Arab" typeface="Arial"/>
-        <a:font script="Hebr" typeface="Arial"/>
-        <a:font script="Thai" typeface="Cordia New"/>
-        <a:font script="Ethi" typeface="Nyala"/>
-        <a:font script="Beng" typeface="Vrinda"/>
-        <a:font script="Gujr" typeface="Shruti"/>
-        <a:font script="Khmr" typeface="DaunPenh"/>
-        <a:font script="Knda" typeface="Tunga"/>
-        <a:font script="Guru" typeface="Raavi"/>
-        <a:font script="Cans" typeface="Euphemia"/>
-        <a:font script="Cher" typeface="Plantagenet Cherokee"/>
-        <a:font script="Yiii" typeface="Microsoft Yi Baiti"/>
-        <a:font script="Tibt" typeface="Microsoft Himalaya"/>
-        <a:font script="Thaa" typeface="MV Boli"/>
-        <a:font script="Deva" typeface="Mangal"/>
-        <a:font script="Telu" typeface="Gautami"/>
-        <a:font script="Taml" typeface="Latha"/>
-        <a:font script="Syrc" typeface="Estrangelo Edessa"/>
-        <a:font script="Orya" typeface="Kalinga"/>
-        <a:font script="Mlym" typeface="Kartika"/>
-        <a:font script="Laoo" typeface="DokChampa"/>
-        <a:font script="Sinh" typeface="Iskoola Pota"/>
-        <a:font script="Mong" typeface="Mongolian Baiti"/>
-        <a:font script="Viet" typeface="Arial"/>
-        <a:font script="Uigh" typeface="Microsoft Uighur"/>
-        <a:font script="Geor" typeface="Sylfaen"/>
-      </a:minorFont>
-    </a:fontScheme>
-    <a:fmtScheme name="Office">
-      <a:fillStyleLst>
-        <a:solidFill>
-          <a:schemeClr val="phClr"/>
-        </a:solidFill>
-        <a:gradFill rotWithShape="1">
-          <a:gsLst>
-            <a:gs pos="0">
-              <a:schemeClr val="phClr">
-                <a:tint val="50000"/>
-                <a:satMod val="300000"/>
-              </a:schemeClr>
-            </a:gs>
-            <a:gs pos="35000">
-              <a:schemeClr val="phClr">
-                <a:tint val="37000"/>
-                <a:satMod val="300000"/>
-              </a:schemeClr>
-            </a:gs>
-            <a:gs pos="100000">
-              <a:schemeClr val="phClr">
-                <a:tint val="15000"/>
-                <a:satMod val="350000"/>
-              </a:schemeClr>
-            </a:gs>
-          </a:gsLst>
-          <a:lin ang="16200000" scaled="1"/>
-        </a:gradFill>
-        <a:gradFill rotWithShape="1">
-          <a:gsLst>
-            <a:gs pos="0">
-              <a:schemeClr val="phClr">
-                <a:tint val="100000"/>
-                <a:shade val="100000"/>
-                <a:satMod val="130000"/>
-              </a:schemeClr>
-            </a:gs>
-            <a:gs pos="100000">
-              <a:schemeClr val="phClr">
-                <a:tint val="50000"/>
-                <a:shade val="100000"/>
-                <a:satMod val="350000"/>
-              </a:schemeClr>
-            </a:gs>
-          </a:gsLst>
-          <a:lin ang="16200000" scaled="0"/>
-        </a:gradFill>
-      </a:fillStyleLst>
-      <a:lnStyleLst>
-        <a:ln w="9525" cap="flat" cmpd="sng" algn="ctr">
-          <a:solidFill>
-            <a:schemeClr val="phClr">
-              <a:shade val="95000"/>
-              <a:satMod val="105000"/>
-            </a:schemeClr>
-          </a:solidFill>
-          <a:prstDash val="solid"/>
-        </a:ln>
-        <a:ln w="25400" cap="flat" cmpd="sng" algn="ctr">
-          <a:solidFill>
-            <a:schemeClr val="phClr"/>
-          </a:solidFill>
-          <a:prstDash val="solid"/>
-        </a:ln>
-        <a:ln w="38100" cap="flat" cmpd="sng" algn="ctr">
-          <a:solidFill>
-            <a:schemeClr val="phClr"/>
-          </a:solidFill>
-          <a:prstDash val="solid"/>
-        </a:ln>
-      </a:lnStyleLst>
-      <a:effectStyleLst>
-        <a:effectStyle>
-          <a:effectLst>
-            <a:outerShdw blurRad="40000" dist="20000" dir="5400000" rotWithShape="0">
-              <a:srgbClr val="000000">
-                <a:alpha val="38000"/>
-              </a:srgbClr>
-            </a:outerShdw>
-          </a:effectLst>
-        </a:effectStyle>
-        <a:effectStyle>
-          <a:effectLst>
-            <a:outerShdw blurRad="40000" dist="23000" dir="5400000" rotWithShape="0">
-              <a:srgbClr val="000000">
-                <a:alpha val="35000"/>
-              </a:srgbClr>
-            </a:outerShdw>
-          </a:effectLst>
-        </a:effectStyle>
-        <a:effectStyle>
-          <a:effectLst>
-            <a:outerShdw blurRad="40000" dist="23000" dir="5400000" rotWithShape="0">
-              <a:srgbClr val="000000">
-                <a:alpha val="35000"/>
-              </a:srgbClr>
-            </a:outerShdw>
-          </a:effectLst>
-          <a:scene3d>
-            <a:camera prst="orthographicFront">
-              <a:rot lat="0" lon="0" rev="0"/>
-            </a:camera>
-            <a:lightRig rig="threePt" dir="t">
-              <a:rot lat="0" lon="0" rev="1200000"/>
-            </a:lightRig>
-          </a:scene3d>
-          <a:sp3d>
-            <a:bevelT w="63500" h="25400"/>
-          </a:sp3d>
-        </a:effectStyle>
-      </a:effectStyleLst>
-      <a:bgFillStyleLst>
-        <a:solidFill>
-          <a:schemeClr val="phClr"/>
-        </a:solidFill>
-        <a:gradFill rotWithShape="1">
-          <a:gsLst>
-            <a:gs pos="0">
-              <a:schemeClr val="phClr">
-                <a:tint val="40000"/>
-                <a:satMod val="350000"/>
-              </a:schemeClr>
-            </a:gs>
-            <a:gs pos="40000">
-              <a:schemeClr val="phClr">
-                <a:tint val="45000"/>
-                <a:shade val="99000"/>
-                <a:satMod val="350000"/>
-              </a:schemeClr>
-            </a:gs>
-            <a:gs pos="100000">
-              <a:schemeClr val="phClr">
-                <a:shade val="20000"/>
-                <a:satMod val="255000"/>
-              </a:schemeClr>
-            </a:gs>
-          </a:gsLst>
-          <a:path path="circle">
-            <a:fillToRect l="50000" t="-80000" r="50000" b="180000"/>
-          </a:path>
-        </a:gradFill>
-        <a:gradFill rotWithShape="1">
-          <a:gsLst>
-            <a:gs pos="0">
-              <a:schemeClr val="phClr">
-                <a:tint val="80000"/>
-                <a:satMod val="300000"/>
-              </a:schemeClr>
-            </a:gs>
-            <a:gs pos="100000">
-              <a:schemeClr val="phClr">
-                <a:shade val="30000"/>
-                <a:satMod val="200000"/>
-              </a:schemeClr>
-            </a:gs>
-          </a:gsLst>
-          <a:path path="circle">
-            <a:fillToRect l="50000" t="50000" r="50000" b="50000"/>
-          </a:path>
-        </a:gradFill>
-      </a:bgFillStyleLst>
-    </a:fmtScheme>
-  </a:themeElements>
-</a:theme>
 </file>